--- a/Chapter One 1448/IT 611_Advanced Information Systems Analysis and Design/Lectute Slides/Week1_SystemsAnalysisDesign.pptx
+++ b/Chapter One 1448/IT 611_Advanced Information Systems Analysis and Design/Lectute Slides/Week1_SystemsAnalysisDesign.pptx
@@ -2,32 +2,35 @@
 <file path=ppt/presentation.xml><?xml version="1.0" encoding="utf-8"?>
 <p:presentation xmlns:a="http://schemas.openxmlformats.org/drawingml/2006/main" xmlns:r="http://schemas.openxmlformats.org/officeDocument/2006/relationships" xmlns:p="http://schemas.openxmlformats.org/presentationml/2006/main" saveSubsetFonts="1" autoCompressPictures="0">
   <p:sldMasterIdLst>
-    <p:sldMasterId id="2147483648" r:id="rId1"/>
+    <p:sldMasterId id="2147483650" r:id="rId4"/>
   </p:sldMasterIdLst>
   <p:notesMasterIdLst>
-    <p:notesMasterId r:id="rId18"/>
+    <p:notesMasterId r:id="rId21"/>
   </p:notesMasterIdLst>
   <p:sldIdLst>
-    <p:sldId id="256" r:id="rId2"/>
-    <p:sldId id="257" r:id="rId3"/>
-    <p:sldId id="259" r:id="rId4"/>
-    <p:sldId id="260" r:id="rId5"/>
-    <p:sldId id="261" r:id="rId6"/>
-    <p:sldId id="262" r:id="rId7"/>
-    <p:sldId id="263" r:id="rId8"/>
-    <p:sldId id="264" r:id="rId9"/>
-    <p:sldId id="265" r:id="rId10"/>
-    <p:sldId id="274" r:id="rId11"/>
-    <p:sldId id="266" r:id="rId12"/>
-    <p:sldId id="267" r:id="rId13"/>
-    <p:sldId id="268" r:id="rId14"/>
-    <p:sldId id="269" r:id="rId15"/>
-    <p:sldId id="270" r:id="rId16"/>
-    <p:sldId id="272" r:id="rId17"/>
+    <p:sldId id="256" r:id="rId5"/>
+    <p:sldId id="257" r:id="rId6"/>
+    <p:sldId id="259" r:id="rId7"/>
+    <p:sldId id="260" r:id="rId8"/>
+    <p:sldId id="261" r:id="rId9"/>
+    <p:sldId id="262" r:id="rId10"/>
+    <p:sldId id="263" r:id="rId11"/>
+    <p:sldId id="264" r:id="rId12"/>
+    <p:sldId id="265" r:id="rId13"/>
+    <p:sldId id="274" r:id="rId14"/>
+    <p:sldId id="266" r:id="rId15"/>
+    <p:sldId id="267" r:id="rId16"/>
+    <p:sldId id="268" r:id="rId17"/>
+    <p:sldId id="269" r:id="rId18"/>
+    <p:sldId id="270" r:id="rId19"/>
+    <p:sldId id="272" r:id="rId20"/>
   </p:sldIdLst>
   <p:sldSz cx="12192000" cy="6858000"/>
   <p:notesSz cx="6858000" cy="12192000"/>
   <p:defaultTextStyle>
+    <a:defPPr>
+      <a:defRPr lang="en-US"/>
+    </a:defPPr>
     <a:lvl1pPr marL="0" algn="l" defTabSz="914400" rtl="0" eaLnBrk="1" latinLnBrk="0" hangingPunct="1">
       <a:defRPr sz="1800" kern="1200">
         <a:solidFill>
@@ -129,6 +132,15 @@
 
 <file path=ppt/changesInfos/changesInfo1.xml><?xml version="1.0" encoding="utf-8"?>
 <pc:chgInfo xmlns:a="http://schemas.openxmlformats.org/drawingml/2006/main" xmlns:r="http://schemas.openxmlformats.org/officeDocument/2006/relationships" xmlns:ac="http://schemas.microsoft.com/office/drawing/2013/main/command" xmlns:pc="http://schemas.microsoft.com/office/powerpoint/2013/main/command">
+  <pc:docChgLst>
+    <pc:chgData name="عبدالعزيز صالح محمد القبلان" userId="e8d9e4d9-6f25-472c-9315-01d09980dd71" providerId="ADAL" clId="{4E9A3F63-AF6F-4176-BDC1-F52DFA4CD0E1}"/>
+    <pc:docChg chg="delSld">
+      <pc:chgData name="عبدالعزيز صالح محمد القبلان" userId="e8d9e4d9-6f25-472c-9315-01d09980dd71" providerId="ADAL" clId="{4E9A3F63-AF6F-4176-BDC1-F52DFA4CD0E1}" dt="2026-08-25T06:39:24.177" v="0" actId="2696"/>
+      <pc:docMkLst>
+        <pc:docMk/>
+      </pc:docMkLst>
+    </pc:docChg>
+  </pc:docChgLst>
   <pc:docChgLst>
     <pc:chgData name="abdulaziz saleh M algablan" userId="e8d9e4d9-6f25-472c-9315-01d09980dd71" providerId="ADAL" clId="{9AAC7DDA-9862-4F25-B568-460DED6EBA8A}"/>
     <pc:docChg chg="undo custSel addSld delSld modSld">
@@ -386,15 +398,6 @@
       </pc:sldChg>
     </pc:docChg>
   </pc:docChgLst>
-  <pc:docChgLst>
-    <pc:chgData name="عبدالعزيز صالح محمد القبلان" userId="e8d9e4d9-6f25-472c-9315-01d09980dd71" providerId="ADAL" clId="{4E9A3F63-AF6F-4176-BDC1-F52DFA4CD0E1}"/>
-    <pc:docChg chg="delSld">
-      <pc:chgData name="عبدالعزيز صالح محمد القبلان" userId="e8d9e4d9-6f25-472c-9315-01d09980dd71" providerId="ADAL" clId="{4E9A3F63-AF6F-4176-BDC1-F52DFA4CD0E1}" dt="2026-08-25T06:39:24.177" v="0" actId="2696"/>
-      <pc:docMkLst>
-        <pc:docMk/>
-      </pc:docMkLst>
-    </pc:docChg>
-  </pc:docChgLst>
 </pc:chgInfo>
 </file>
 
@@ -480,7 +483,7 @@
           <a:p>
             <a:fld id="{F5A67FE8-30F2-F246-84FB-31BE051663C7}" type="datetimeFigureOut">
               <a:rPr lang="en-SA" smtClean="0"/>
-              <a:t>08/30/2026</a:t>
+              <a:t>10/03/2026</a:t>
             </a:fld>
             <a:endParaRPr lang="en-SA"/>
           </a:p>
@@ -2117,7 +2120,636 @@
 </file>
 
 <file path=ppt/slideLayouts/slideLayout1.xml><?xml version="1.0" encoding="utf-8"?>
-<p:sldLayout xmlns:a="http://schemas.openxmlformats.org/drawingml/2006/main" xmlns:r="http://schemas.openxmlformats.org/officeDocument/2006/relationships" xmlns:p="http://schemas.openxmlformats.org/presentationml/2006/main" preserve="1">
+<p:sldLayout xmlns:a="http://schemas.openxmlformats.org/drawingml/2006/main" xmlns:r="http://schemas.openxmlformats.org/officeDocument/2006/relationships" xmlns:p="http://schemas.openxmlformats.org/presentationml/2006/main" type="title" preserve="1">
+  <p:cSld name="Title Slide">
+    <p:spTree>
+      <p:nvGrpSpPr>
+        <p:cNvPr id="1" name=""/>
+        <p:cNvGrpSpPr/>
+        <p:nvPr/>
+      </p:nvGrpSpPr>
+      <p:grpSpPr>
+        <a:xfrm>
+          <a:off x="0" y="0"/>
+          <a:ext cx="0" cy="0"/>
+          <a:chOff x="0" y="0"/>
+          <a:chExt cx="0" cy="0"/>
+        </a:xfrm>
+      </p:grpSpPr>
+      <p:sp>
+        <p:nvSpPr>
+          <p:cNvPr id="2" name="Title 1">
+            <a:extLst>
+              <a:ext uri="{FF2B5EF4-FFF2-40B4-BE49-F238E27FC236}">
+                <a16:creationId xmlns:a16="http://schemas.microsoft.com/office/drawing/2014/main" id="{89074C35-9D35-38A6-91D9-DD41531E1E38}"/>
+              </a:ext>
+            </a:extLst>
+          </p:cNvPr>
+          <p:cNvSpPr>
+            <a:spLocks noGrp="1"/>
+          </p:cNvSpPr>
+          <p:nvPr>
+            <p:ph type="ctrTitle"/>
+          </p:nvPr>
+        </p:nvSpPr>
+        <p:spPr>
+          <a:xfrm>
+            <a:off x="1524000" y="1122363"/>
+            <a:ext cx="9144000" cy="2387600"/>
+          </a:xfrm>
+        </p:spPr>
+        <p:txBody>
+          <a:bodyPr anchor="b"/>
+          <a:lstStyle>
+            <a:lvl1pPr algn="ctr">
+              <a:defRPr sz="6000"/>
+            </a:lvl1pPr>
+          </a:lstStyle>
+          <a:p>
+            <a:r>
+              <a:rPr lang="en-US"/>
+              <a:t>Click to edit Master title style</a:t>
+            </a:r>
+          </a:p>
+        </p:txBody>
+      </p:sp>
+      <p:sp>
+        <p:nvSpPr>
+          <p:cNvPr id="3" name="Subtitle 2">
+            <a:extLst>
+              <a:ext uri="{FF2B5EF4-FFF2-40B4-BE49-F238E27FC236}">
+                <a16:creationId xmlns:a16="http://schemas.microsoft.com/office/drawing/2014/main" id="{8E913A33-CABA-8ACF-1949-74A7DAA22025}"/>
+              </a:ext>
+            </a:extLst>
+          </p:cNvPr>
+          <p:cNvSpPr>
+            <a:spLocks noGrp="1"/>
+          </p:cNvSpPr>
+          <p:nvPr>
+            <p:ph type="subTitle" idx="1"/>
+          </p:nvPr>
+        </p:nvSpPr>
+        <p:spPr>
+          <a:xfrm>
+            <a:off x="1524000" y="3602038"/>
+            <a:ext cx="9144000" cy="1655762"/>
+          </a:xfrm>
+        </p:spPr>
+        <p:txBody>
+          <a:bodyPr/>
+          <a:lstStyle>
+            <a:lvl1pPr marL="0" indent="0" algn="ctr">
+              <a:buNone/>
+              <a:defRPr sz="2400"/>
+            </a:lvl1pPr>
+            <a:lvl2pPr marL="457200" indent="0" algn="ctr">
+              <a:buNone/>
+              <a:defRPr sz="2000"/>
+            </a:lvl2pPr>
+            <a:lvl3pPr marL="914400" indent="0" algn="ctr">
+              <a:buNone/>
+              <a:defRPr sz="1800"/>
+            </a:lvl3pPr>
+            <a:lvl4pPr marL="1371600" indent="0" algn="ctr">
+              <a:buNone/>
+              <a:defRPr sz="1600"/>
+            </a:lvl4pPr>
+            <a:lvl5pPr marL="1828800" indent="0" algn="ctr">
+              <a:buNone/>
+              <a:defRPr sz="1600"/>
+            </a:lvl5pPr>
+            <a:lvl6pPr marL="2286000" indent="0" algn="ctr">
+              <a:buNone/>
+              <a:defRPr sz="1600"/>
+            </a:lvl6pPr>
+            <a:lvl7pPr marL="2743200" indent="0" algn="ctr">
+              <a:buNone/>
+              <a:defRPr sz="1600"/>
+            </a:lvl7pPr>
+            <a:lvl8pPr marL="3200400" indent="0" algn="ctr">
+              <a:buNone/>
+              <a:defRPr sz="1600"/>
+            </a:lvl8pPr>
+            <a:lvl9pPr marL="3657600" indent="0" algn="ctr">
+              <a:buNone/>
+              <a:defRPr sz="1600"/>
+            </a:lvl9pPr>
+          </a:lstStyle>
+          <a:p>
+            <a:r>
+              <a:rPr lang="en-US"/>
+              <a:t>Click to edit Master subtitle style</a:t>
+            </a:r>
+          </a:p>
+        </p:txBody>
+      </p:sp>
+      <p:sp>
+        <p:nvSpPr>
+          <p:cNvPr id="4" name="Date Placeholder 3">
+            <a:extLst>
+              <a:ext uri="{FF2B5EF4-FFF2-40B4-BE49-F238E27FC236}">
+                <a16:creationId xmlns:a16="http://schemas.microsoft.com/office/drawing/2014/main" id="{4A8046CA-ADD6-1441-C405-E5324E8752C8}"/>
+              </a:ext>
+            </a:extLst>
+          </p:cNvPr>
+          <p:cNvSpPr>
+            <a:spLocks noGrp="1"/>
+          </p:cNvSpPr>
+          <p:nvPr>
+            <p:ph type="dt" sz="half" idx="10"/>
+          </p:nvPr>
+        </p:nvSpPr>
+        <p:spPr/>
+        <p:txBody>
+          <a:bodyPr/>
+          <a:lstStyle/>
+          <a:p>
+            <a:fld id="{4F1764C8-6DEA-4559-B38B-7F974AB06E3C}" type="datetimeFigureOut">
+              <a:rPr lang="en-US" smtClean="0"/>
+              <a:t>10/3/2026</a:t>
+            </a:fld>
+            <a:endParaRPr lang="en-US"/>
+          </a:p>
+        </p:txBody>
+      </p:sp>
+      <p:sp>
+        <p:nvSpPr>
+          <p:cNvPr id="5" name="Footer Placeholder 4">
+            <a:extLst>
+              <a:ext uri="{FF2B5EF4-FFF2-40B4-BE49-F238E27FC236}">
+                <a16:creationId xmlns:a16="http://schemas.microsoft.com/office/drawing/2014/main" id="{7C83579B-9E11-A908-0327-1FA996A5DC21}"/>
+              </a:ext>
+            </a:extLst>
+          </p:cNvPr>
+          <p:cNvSpPr>
+            <a:spLocks noGrp="1"/>
+          </p:cNvSpPr>
+          <p:nvPr>
+            <p:ph type="ftr" sz="quarter" idx="11"/>
+          </p:nvPr>
+        </p:nvSpPr>
+        <p:spPr/>
+        <p:txBody>
+          <a:bodyPr/>
+          <a:lstStyle/>
+          <a:p>
+            <a:endParaRPr lang="en-US"/>
+          </a:p>
+        </p:txBody>
+      </p:sp>
+      <p:sp>
+        <p:nvSpPr>
+          <p:cNvPr id="6" name="Slide Number Placeholder 5">
+            <a:extLst>
+              <a:ext uri="{FF2B5EF4-FFF2-40B4-BE49-F238E27FC236}">
+                <a16:creationId xmlns:a16="http://schemas.microsoft.com/office/drawing/2014/main" id="{6225E573-EDAD-CFE6-71A3-60C2F4DF42F1}"/>
+              </a:ext>
+            </a:extLst>
+          </p:cNvPr>
+          <p:cNvSpPr>
+            <a:spLocks noGrp="1"/>
+          </p:cNvSpPr>
+          <p:nvPr>
+            <p:ph type="sldNum" sz="quarter" idx="12"/>
+          </p:nvPr>
+        </p:nvSpPr>
+        <p:spPr/>
+        <p:txBody>
+          <a:bodyPr/>
+          <a:lstStyle/>
+          <a:p>
+            <a:fld id="{81E2607C-147D-4640-84F6-205905AA5ABA}" type="slidenum">
+              <a:rPr lang="en-US" smtClean="0"/>
+              <a:t>‹#›</a:t>
+            </a:fld>
+            <a:endParaRPr lang="en-US"/>
+          </a:p>
+        </p:txBody>
+      </p:sp>
+    </p:spTree>
+    <p:extLst>
+      <p:ext uri="{BB962C8B-B14F-4D97-AF65-F5344CB8AC3E}">
+        <p14:creationId xmlns:p14="http://schemas.microsoft.com/office/powerpoint/2010/main" val="4105844402"/>
+      </p:ext>
+    </p:extLst>
+  </p:cSld>
+  <p:clrMapOvr>
+    <a:masterClrMapping/>
+  </p:clrMapOvr>
+  <p:hf sldNum="0" hdr="0" ftr="0" dt="0"/>
+</p:sldLayout>
+</file>
+
+<file path=ppt/slideLayouts/slideLayout10.xml><?xml version="1.0" encoding="utf-8"?>
+<p:sldLayout xmlns:a="http://schemas.openxmlformats.org/drawingml/2006/main" xmlns:r="http://schemas.openxmlformats.org/officeDocument/2006/relationships" xmlns:p="http://schemas.openxmlformats.org/presentationml/2006/main" type="vertTx" preserve="1">
+  <p:cSld name="Title and Vertical Text">
+    <p:spTree>
+      <p:nvGrpSpPr>
+        <p:cNvPr id="1" name=""/>
+        <p:cNvGrpSpPr/>
+        <p:nvPr/>
+      </p:nvGrpSpPr>
+      <p:grpSpPr>
+        <a:xfrm>
+          <a:off x="0" y="0"/>
+          <a:ext cx="0" cy="0"/>
+          <a:chOff x="0" y="0"/>
+          <a:chExt cx="0" cy="0"/>
+        </a:xfrm>
+      </p:grpSpPr>
+      <p:sp>
+        <p:nvSpPr>
+          <p:cNvPr id="2" name="Title 1">
+            <a:extLst>
+              <a:ext uri="{FF2B5EF4-FFF2-40B4-BE49-F238E27FC236}">
+                <a16:creationId xmlns:a16="http://schemas.microsoft.com/office/drawing/2014/main" id="{958EDA03-7010-7285-BAC2-2F48EC66636A}"/>
+              </a:ext>
+            </a:extLst>
+          </p:cNvPr>
+          <p:cNvSpPr>
+            <a:spLocks noGrp="1"/>
+          </p:cNvSpPr>
+          <p:nvPr>
+            <p:ph type="title"/>
+          </p:nvPr>
+        </p:nvSpPr>
+        <p:spPr/>
+        <p:txBody>
+          <a:bodyPr/>
+          <a:lstStyle/>
+          <a:p>
+            <a:r>
+              <a:rPr lang="en-US"/>
+              <a:t>Click to edit Master title style</a:t>
+            </a:r>
+          </a:p>
+        </p:txBody>
+      </p:sp>
+      <p:sp>
+        <p:nvSpPr>
+          <p:cNvPr id="3" name="Vertical Text Placeholder 2">
+            <a:extLst>
+              <a:ext uri="{FF2B5EF4-FFF2-40B4-BE49-F238E27FC236}">
+                <a16:creationId xmlns:a16="http://schemas.microsoft.com/office/drawing/2014/main" id="{83B5A677-0E32-4844-68AE-0FE9E733BCAB}"/>
+              </a:ext>
+            </a:extLst>
+          </p:cNvPr>
+          <p:cNvSpPr>
+            <a:spLocks noGrp="1"/>
+          </p:cNvSpPr>
+          <p:nvPr>
+            <p:ph type="body" orient="vert" idx="1"/>
+          </p:nvPr>
+        </p:nvSpPr>
+        <p:spPr/>
+        <p:txBody>
+          <a:bodyPr vert="eaVert"/>
+          <a:lstStyle/>
+          <a:p>
+            <a:pPr lvl="0"/>
+            <a:r>
+              <a:rPr lang="en-US"/>
+              <a:t>Click to edit Master text styles</a:t>
+            </a:r>
+          </a:p>
+          <a:p>
+            <a:pPr lvl="1"/>
+            <a:r>
+              <a:rPr lang="en-US"/>
+              <a:t>Second level</a:t>
+            </a:r>
+          </a:p>
+          <a:p>
+            <a:pPr lvl="2"/>
+            <a:r>
+              <a:rPr lang="en-US"/>
+              <a:t>Third level</a:t>
+            </a:r>
+          </a:p>
+          <a:p>
+            <a:pPr lvl="3"/>
+            <a:r>
+              <a:rPr lang="en-US"/>
+              <a:t>Fourth level</a:t>
+            </a:r>
+          </a:p>
+          <a:p>
+            <a:pPr lvl="4"/>
+            <a:r>
+              <a:rPr lang="en-US"/>
+              <a:t>Fifth level</a:t>
+            </a:r>
+          </a:p>
+        </p:txBody>
+      </p:sp>
+      <p:sp>
+        <p:nvSpPr>
+          <p:cNvPr id="4" name="Date Placeholder 3">
+            <a:extLst>
+              <a:ext uri="{FF2B5EF4-FFF2-40B4-BE49-F238E27FC236}">
+                <a16:creationId xmlns:a16="http://schemas.microsoft.com/office/drawing/2014/main" id="{A7053A6E-BA15-0F82-3A1F-BDAEF31CC233}"/>
+              </a:ext>
+            </a:extLst>
+          </p:cNvPr>
+          <p:cNvSpPr>
+            <a:spLocks noGrp="1"/>
+          </p:cNvSpPr>
+          <p:nvPr>
+            <p:ph type="dt" sz="half" idx="10"/>
+          </p:nvPr>
+        </p:nvSpPr>
+        <p:spPr/>
+        <p:txBody>
+          <a:bodyPr/>
+          <a:lstStyle/>
+          <a:p>
+            <a:fld id="{4F1764C8-6DEA-4559-B38B-7F974AB06E3C}" type="datetimeFigureOut">
+              <a:rPr lang="en-US" smtClean="0"/>
+              <a:t>10/3/2026</a:t>
+            </a:fld>
+            <a:endParaRPr lang="en-US"/>
+          </a:p>
+        </p:txBody>
+      </p:sp>
+      <p:sp>
+        <p:nvSpPr>
+          <p:cNvPr id="5" name="Footer Placeholder 4">
+            <a:extLst>
+              <a:ext uri="{FF2B5EF4-FFF2-40B4-BE49-F238E27FC236}">
+                <a16:creationId xmlns:a16="http://schemas.microsoft.com/office/drawing/2014/main" id="{6BA6EEEB-1140-9FF6-90D9-F4A90908B734}"/>
+              </a:ext>
+            </a:extLst>
+          </p:cNvPr>
+          <p:cNvSpPr>
+            <a:spLocks noGrp="1"/>
+          </p:cNvSpPr>
+          <p:nvPr>
+            <p:ph type="ftr" sz="quarter" idx="11"/>
+          </p:nvPr>
+        </p:nvSpPr>
+        <p:spPr/>
+        <p:txBody>
+          <a:bodyPr/>
+          <a:lstStyle/>
+          <a:p>
+            <a:endParaRPr lang="en-US"/>
+          </a:p>
+        </p:txBody>
+      </p:sp>
+      <p:sp>
+        <p:nvSpPr>
+          <p:cNvPr id="6" name="Slide Number Placeholder 5">
+            <a:extLst>
+              <a:ext uri="{FF2B5EF4-FFF2-40B4-BE49-F238E27FC236}">
+                <a16:creationId xmlns:a16="http://schemas.microsoft.com/office/drawing/2014/main" id="{68872A1F-A050-93B2-4381-92ACBF27D46F}"/>
+              </a:ext>
+            </a:extLst>
+          </p:cNvPr>
+          <p:cNvSpPr>
+            <a:spLocks noGrp="1"/>
+          </p:cNvSpPr>
+          <p:nvPr>
+            <p:ph type="sldNum" sz="quarter" idx="12"/>
+          </p:nvPr>
+        </p:nvSpPr>
+        <p:spPr/>
+        <p:txBody>
+          <a:bodyPr/>
+          <a:lstStyle/>
+          <a:p>
+            <a:fld id="{81E2607C-147D-4640-84F6-205905AA5ABA}" type="slidenum">
+              <a:rPr lang="en-US" smtClean="0"/>
+              <a:t>‹#›</a:t>
+            </a:fld>
+            <a:endParaRPr lang="en-US"/>
+          </a:p>
+        </p:txBody>
+      </p:sp>
+    </p:spTree>
+    <p:extLst>
+      <p:ext uri="{BB962C8B-B14F-4D97-AF65-F5344CB8AC3E}">
+        <p14:creationId xmlns:p14="http://schemas.microsoft.com/office/powerpoint/2010/main" val="2533045818"/>
+      </p:ext>
+    </p:extLst>
+  </p:cSld>
+  <p:clrMapOvr>
+    <a:masterClrMapping/>
+  </p:clrMapOvr>
+  <p:hf sldNum="0" hdr="0" ftr="0" dt="0"/>
+</p:sldLayout>
+</file>
+
+<file path=ppt/slideLayouts/slideLayout11.xml><?xml version="1.0" encoding="utf-8"?>
+<p:sldLayout xmlns:a="http://schemas.openxmlformats.org/drawingml/2006/main" xmlns:r="http://schemas.openxmlformats.org/officeDocument/2006/relationships" xmlns:p="http://schemas.openxmlformats.org/presentationml/2006/main" type="vertTitleAndTx" preserve="1">
+  <p:cSld name="Vertical Title and Text">
+    <p:spTree>
+      <p:nvGrpSpPr>
+        <p:cNvPr id="1" name=""/>
+        <p:cNvGrpSpPr/>
+        <p:nvPr/>
+      </p:nvGrpSpPr>
+      <p:grpSpPr>
+        <a:xfrm>
+          <a:off x="0" y="0"/>
+          <a:ext cx="0" cy="0"/>
+          <a:chOff x="0" y="0"/>
+          <a:chExt cx="0" cy="0"/>
+        </a:xfrm>
+      </p:grpSpPr>
+      <p:sp>
+        <p:nvSpPr>
+          <p:cNvPr id="2" name="Vertical Title 1">
+            <a:extLst>
+              <a:ext uri="{FF2B5EF4-FFF2-40B4-BE49-F238E27FC236}">
+                <a16:creationId xmlns:a16="http://schemas.microsoft.com/office/drawing/2014/main" id="{A647CB1E-F840-4D75-7D1C-E72475177E1D}"/>
+              </a:ext>
+            </a:extLst>
+          </p:cNvPr>
+          <p:cNvSpPr>
+            <a:spLocks noGrp="1"/>
+          </p:cNvSpPr>
+          <p:nvPr>
+            <p:ph type="title" orient="vert"/>
+          </p:nvPr>
+        </p:nvSpPr>
+        <p:spPr>
+          <a:xfrm>
+            <a:off x="8724900" y="365125"/>
+            <a:ext cx="2628900" cy="5811838"/>
+          </a:xfrm>
+        </p:spPr>
+        <p:txBody>
+          <a:bodyPr vert="eaVert"/>
+          <a:lstStyle/>
+          <a:p>
+            <a:r>
+              <a:rPr lang="en-US"/>
+              <a:t>Click to edit Master title style</a:t>
+            </a:r>
+          </a:p>
+        </p:txBody>
+      </p:sp>
+      <p:sp>
+        <p:nvSpPr>
+          <p:cNvPr id="3" name="Vertical Text Placeholder 2">
+            <a:extLst>
+              <a:ext uri="{FF2B5EF4-FFF2-40B4-BE49-F238E27FC236}">
+                <a16:creationId xmlns:a16="http://schemas.microsoft.com/office/drawing/2014/main" id="{F81935C2-3DB9-0C8E-73FD-7B6F43C99A03}"/>
+              </a:ext>
+            </a:extLst>
+          </p:cNvPr>
+          <p:cNvSpPr>
+            <a:spLocks noGrp="1"/>
+          </p:cNvSpPr>
+          <p:nvPr>
+            <p:ph type="body" orient="vert" idx="1"/>
+          </p:nvPr>
+        </p:nvSpPr>
+        <p:spPr>
+          <a:xfrm>
+            <a:off x="838200" y="365125"/>
+            <a:ext cx="7734300" cy="5811838"/>
+          </a:xfrm>
+        </p:spPr>
+        <p:txBody>
+          <a:bodyPr vert="eaVert"/>
+          <a:lstStyle/>
+          <a:p>
+            <a:pPr lvl="0"/>
+            <a:r>
+              <a:rPr lang="en-US"/>
+              <a:t>Click to edit Master text styles</a:t>
+            </a:r>
+          </a:p>
+          <a:p>
+            <a:pPr lvl="1"/>
+            <a:r>
+              <a:rPr lang="en-US"/>
+              <a:t>Second level</a:t>
+            </a:r>
+          </a:p>
+          <a:p>
+            <a:pPr lvl="2"/>
+            <a:r>
+              <a:rPr lang="en-US"/>
+              <a:t>Third level</a:t>
+            </a:r>
+          </a:p>
+          <a:p>
+            <a:pPr lvl="3"/>
+            <a:r>
+              <a:rPr lang="en-US"/>
+              <a:t>Fourth level</a:t>
+            </a:r>
+          </a:p>
+          <a:p>
+            <a:pPr lvl="4"/>
+            <a:r>
+              <a:rPr lang="en-US"/>
+              <a:t>Fifth level</a:t>
+            </a:r>
+          </a:p>
+        </p:txBody>
+      </p:sp>
+      <p:sp>
+        <p:nvSpPr>
+          <p:cNvPr id="4" name="Date Placeholder 3">
+            <a:extLst>
+              <a:ext uri="{FF2B5EF4-FFF2-40B4-BE49-F238E27FC236}">
+                <a16:creationId xmlns:a16="http://schemas.microsoft.com/office/drawing/2014/main" id="{F908F40B-7D0F-4013-89D4-08306CE1F52A}"/>
+              </a:ext>
+            </a:extLst>
+          </p:cNvPr>
+          <p:cNvSpPr>
+            <a:spLocks noGrp="1"/>
+          </p:cNvSpPr>
+          <p:nvPr>
+            <p:ph type="dt" sz="half" idx="10"/>
+          </p:nvPr>
+        </p:nvSpPr>
+        <p:spPr/>
+        <p:txBody>
+          <a:bodyPr/>
+          <a:lstStyle/>
+          <a:p>
+            <a:fld id="{4F1764C8-6DEA-4559-B38B-7F974AB06E3C}" type="datetimeFigureOut">
+              <a:rPr lang="en-US" smtClean="0"/>
+              <a:t>10/3/2026</a:t>
+            </a:fld>
+            <a:endParaRPr lang="en-US"/>
+          </a:p>
+        </p:txBody>
+      </p:sp>
+      <p:sp>
+        <p:nvSpPr>
+          <p:cNvPr id="5" name="Footer Placeholder 4">
+            <a:extLst>
+              <a:ext uri="{FF2B5EF4-FFF2-40B4-BE49-F238E27FC236}">
+                <a16:creationId xmlns:a16="http://schemas.microsoft.com/office/drawing/2014/main" id="{EC1570E5-6A34-9B30-5D32-5CE0957A3CAE}"/>
+              </a:ext>
+            </a:extLst>
+          </p:cNvPr>
+          <p:cNvSpPr>
+            <a:spLocks noGrp="1"/>
+          </p:cNvSpPr>
+          <p:nvPr>
+            <p:ph type="ftr" sz="quarter" idx="11"/>
+          </p:nvPr>
+        </p:nvSpPr>
+        <p:spPr/>
+        <p:txBody>
+          <a:bodyPr/>
+          <a:lstStyle/>
+          <a:p>
+            <a:endParaRPr lang="en-US"/>
+          </a:p>
+        </p:txBody>
+      </p:sp>
+      <p:sp>
+        <p:nvSpPr>
+          <p:cNvPr id="6" name="Slide Number Placeholder 5">
+            <a:extLst>
+              <a:ext uri="{FF2B5EF4-FFF2-40B4-BE49-F238E27FC236}">
+                <a16:creationId xmlns:a16="http://schemas.microsoft.com/office/drawing/2014/main" id="{82D69709-FFE4-E2F6-7125-FD42FF372294}"/>
+              </a:ext>
+            </a:extLst>
+          </p:cNvPr>
+          <p:cNvSpPr>
+            <a:spLocks noGrp="1"/>
+          </p:cNvSpPr>
+          <p:nvPr>
+            <p:ph type="sldNum" sz="quarter" idx="12"/>
+          </p:nvPr>
+        </p:nvSpPr>
+        <p:spPr/>
+        <p:txBody>
+          <a:bodyPr/>
+          <a:lstStyle/>
+          <a:p>
+            <a:fld id="{81E2607C-147D-4640-84F6-205905AA5ABA}" type="slidenum">
+              <a:rPr lang="en-US" smtClean="0"/>
+              <a:t>‹#›</a:t>
+            </a:fld>
+            <a:endParaRPr lang="en-US"/>
+          </a:p>
+        </p:txBody>
+      </p:sp>
+    </p:spTree>
+    <p:extLst>
+      <p:ext uri="{BB962C8B-B14F-4D97-AF65-F5344CB8AC3E}">
+        <p14:creationId xmlns:p14="http://schemas.microsoft.com/office/powerpoint/2010/main" val="4038680491"/>
+      </p:ext>
+    </p:extLst>
+  </p:cSld>
+  <p:clrMapOvr>
+    <a:masterClrMapping/>
+  </p:clrMapOvr>
+  <p:hf sldNum="0" hdr="0" ftr="0" dt="0"/>
+</p:sldLayout>
+</file>
+
+<file path=ppt/slideLayouts/slideLayout12.xml><?xml version="1.0" encoding="utf-8"?>
+<p:sldLayout xmlns:a="http://schemas.openxmlformats.org/drawingml/2006/main" xmlns:r="http://schemas.openxmlformats.org/officeDocument/2006/relationships" xmlns:p="http://schemas.openxmlformats.org/presentationml/2006/main">
   <p:cSld name="DEFAULT">
     <p:bg>
       <p:bgRef idx="1001">
@@ -2139,10 +2771,2026 @@
         </a:xfrm>
       </p:grpSpPr>
     </p:spTree>
+    <p:extLst>
+      <p:ext uri="{BB962C8B-B14F-4D97-AF65-F5344CB8AC3E}">
+        <p14:creationId xmlns:p14="http://schemas.microsoft.com/office/powerpoint/2010/main" val="3878841563"/>
+      </p:ext>
+    </p:extLst>
   </p:cSld>
   <p:clrMapOvr>
     <a:masterClrMapping/>
   </p:clrMapOvr>
+</p:sldLayout>
+</file>
+
+<file path=ppt/slideLayouts/slideLayout2.xml><?xml version="1.0" encoding="utf-8"?>
+<p:sldLayout xmlns:a="http://schemas.openxmlformats.org/drawingml/2006/main" xmlns:r="http://schemas.openxmlformats.org/officeDocument/2006/relationships" xmlns:p="http://schemas.openxmlformats.org/presentationml/2006/main" type="obj" preserve="1">
+  <p:cSld name="Title and Content">
+    <p:spTree>
+      <p:nvGrpSpPr>
+        <p:cNvPr id="1" name=""/>
+        <p:cNvGrpSpPr/>
+        <p:nvPr/>
+      </p:nvGrpSpPr>
+      <p:grpSpPr>
+        <a:xfrm>
+          <a:off x="0" y="0"/>
+          <a:ext cx="0" cy="0"/>
+          <a:chOff x="0" y="0"/>
+          <a:chExt cx="0" cy="0"/>
+        </a:xfrm>
+      </p:grpSpPr>
+      <p:sp>
+        <p:nvSpPr>
+          <p:cNvPr id="2" name="Title 1">
+            <a:extLst>
+              <a:ext uri="{FF2B5EF4-FFF2-40B4-BE49-F238E27FC236}">
+                <a16:creationId xmlns:a16="http://schemas.microsoft.com/office/drawing/2014/main" id="{3BA3E2A5-B38A-2C2D-90BA-3BB72D870F99}"/>
+              </a:ext>
+            </a:extLst>
+          </p:cNvPr>
+          <p:cNvSpPr>
+            <a:spLocks noGrp="1"/>
+          </p:cNvSpPr>
+          <p:nvPr>
+            <p:ph type="title"/>
+          </p:nvPr>
+        </p:nvSpPr>
+        <p:spPr/>
+        <p:txBody>
+          <a:bodyPr/>
+          <a:lstStyle/>
+          <a:p>
+            <a:r>
+              <a:rPr lang="en-US"/>
+              <a:t>Click to edit Master title style</a:t>
+            </a:r>
+          </a:p>
+        </p:txBody>
+      </p:sp>
+      <p:sp>
+        <p:nvSpPr>
+          <p:cNvPr id="3" name="Content Placeholder 2">
+            <a:extLst>
+              <a:ext uri="{FF2B5EF4-FFF2-40B4-BE49-F238E27FC236}">
+                <a16:creationId xmlns:a16="http://schemas.microsoft.com/office/drawing/2014/main" id="{8D67879D-C82B-9813-A28E-838F9FBC3197}"/>
+              </a:ext>
+            </a:extLst>
+          </p:cNvPr>
+          <p:cNvSpPr>
+            <a:spLocks noGrp="1"/>
+          </p:cNvSpPr>
+          <p:nvPr>
+            <p:ph idx="1"/>
+          </p:nvPr>
+        </p:nvSpPr>
+        <p:spPr/>
+        <p:txBody>
+          <a:bodyPr/>
+          <a:lstStyle/>
+          <a:p>
+            <a:pPr lvl="0"/>
+            <a:r>
+              <a:rPr lang="en-US"/>
+              <a:t>Click to edit Master text styles</a:t>
+            </a:r>
+          </a:p>
+          <a:p>
+            <a:pPr lvl="1"/>
+            <a:r>
+              <a:rPr lang="en-US"/>
+              <a:t>Second level</a:t>
+            </a:r>
+          </a:p>
+          <a:p>
+            <a:pPr lvl="2"/>
+            <a:r>
+              <a:rPr lang="en-US"/>
+              <a:t>Third level</a:t>
+            </a:r>
+          </a:p>
+          <a:p>
+            <a:pPr lvl="3"/>
+            <a:r>
+              <a:rPr lang="en-US"/>
+              <a:t>Fourth level</a:t>
+            </a:r>
+          </a:p>
+          <a:p>
+            <a:pPr lvl="4"/>
+            <a:r>
+              <a:rPr lang="en-US"/>
+              <a:t>Fifth level</a:t>
+            </a:r>
+          </a:p>
+        </p:txBody>
+      </p:sp>
+      <p:sp>
+        <p:nvSpPr>
+          <p:cNvPr id="4" name="Date Placeholder 3">
+            <a:extLst>
+              <a:ext uri="{FF2B5EF4-FFF2-40B4-BE49-F238E27FC236}">
+                <a16:creationId xmlns:a16="http://schemas.microsoft.com/office/drawing/2014/main" id="{18BCBABC-D089-7985-1703-3F8141E3C99D}"/>
+              </a:ext>
+            </a:extLst>
+          </p:cNvPr>
+          <p:cNvSpPr>
+            <a:spLocks noGrp="1"/>
+          </p:cNvSpPr>
+          <p:nvPr>
+            <p:ph type="dt" sz="half" idx="10"/>
+          </p:nvPr>
+        </p:nvSpPr>
+        <p:spPr/>
+        <p:txBody>
+          <a:bodyPr/>
+          <a:lstStyle/>
+          <a:p>
+            <a:fld id="{4F1764C8-6DEA-4559-B38B-7F974AB06E3C}" type="datetimeFigureOut">
+              <a:rPr lang="en-US" smtClean="0"/>
+              <a:t>10/3/2026</a:t>
+            </a:fld>
+            <a:endParaRPr lang="en-US"/>
+          </a:p>
+        </p:txBody>
+      </p:sp>
+      <p:sp>
+        <p:nvSpPr>
+          <p:cNvPr id="5" name="Footer Placeholder 4">
+            <a:extLst>
+              <a:ext uri="{FF2B5EF4-FFF2-40B4-BE49-F238E27FC236}">
+                <a16:creationId xmlns:a16="http://schemas.microsoft.com/office/drawing/2014/main" id="{2A9E4ABC-C08A-7A0D-7791-49C2B6FA364E}"/>
+              </a:ext>
+            </a:extLst>
+          </p:cNvPr>
+          <p:cNvSpPr>
+            <a:spLocks noGrp="1"/>
+          </p:cNvSpPr>
+          <p:nvPr>
+            <p:ph type="ftr" sz="quarter" idx="11"/>
+          </p:nvPr>
+        </p:nvSpPr>
+        <p:spPr/>
+        <p:txBody>
+          <a:bodyPr/>
+          <a:lstStyle/>
+          <a:p>
+            <a:endParaRPr lang="en-US"/>
+          </a:p>
+        </p:txBody>
+      </p:sp>
+      <p:sp>
+        <p:nvSpPr>
+          <p:cNvPr id="6" name="Slide Number Placeholder 5">
+            <a:extLst>
+              <a:ext uri="{FF2B5EF4-FFF2-40B4-BE49-F238E27FC236}">
+                <a16:creationId xmlns:a16="http://schemas.microsoft.com/office/drawing/2014/main" id="{E34D7F98-5850-E9EB-EE39-6A546289D33A}"/>
+              </a:ext>
+            </a:extLst>
+          </p:cNvPr>
+          <p:cNvSpPr>
+            <a:spLocks noGrp="1"/>
+          </p:cNvSpPr>
+          <p:nvPr>
+            <p:ph type="sldNum" sz="quarter" idx="12"/>
+          </p:nvPr>
+        </p:nvSpPr>
+        <p:spPr/>
+        <p:txBody>
+          <a:bodyPr/>
+          <a:lstStyle/>
+          <a:p>
+            <a:fld id="{81E2607C-147D-4640-84F6-205905AA5ABA}" type="slidenum">
+              <a:rPr lang="en-US" smtClean="0"/>
+              <a:t>‹#›</a:t>
+            </a:fld>
+            <a:endParaRPr lang="en-US"/>
+          </a:p>
+        </p:txBody>
+      </p:sp>
+    </p:spTree>
+    <p:extLst>
+      <p:ext uri="{BB962C8B-B14F-4D97-AF65-F5344CB8AC3E}">
+        <p14:creationId xmlns:p14="http://schemas.microsoft.com/office/powerpoint/2010/main" val="218939718"/>
+      </p:ext>
+    </p:extLst>
+  </p:cSld>
+  <p:clrMapOvr>
+    <a:masterClrMapping/>
+  </p:clrMapOvr>
+  <p:hf sldNum="0" hdr="0" ftr="0" dt="0"/>
+</p:sldLayout>
+</file>
+
+<file path=ppt/slideLayouts/slideLayout3.xml><?xml version="1.0" encoding="utf-8"?>
+<p:sldLayout xmlns:a="http://schemas.openxmlformats.org/drawingml/2006/main" xmlns:r="http://schemas.openxmlformats.org/officeDocument/2006/relationships" xmlns:p="http://schemas.openxmlformats.org/presentationml/2006/main" type="secHead" preserve="1">
+  <p:cSld name="Section Header">
+    <p:spTree>
+      <p:nvGrpSpPr>
+        <p:cNvPr id="1" name=""/>
+        <p:cNvGrpSpPr/>
+        <p:nvPr/>
+      </p:nvGrpSpPr>
+      <p:grpSpPr>
+        <a:xfrm>
+          <a:off x="0" y="0"/>
+          <a:ext cx="0" cy="0"/>
+          <a:chOff x="0" y="0"/>
+          <a:chExt cx="0" cy="0"/>
+        </a:xfrm>
+      </p:grpSpPr>
+      <p:sp>
+        <p:nvSpPr>
+          <p:cNvPr id="2" name="Title 1">
+            <a:extLst>
+              <a:ext uri="{FF2B5EF4-FFF2-40B4-BE49-F238E27FC236}">
+                <a16:creationId xmlns:a16="http://schemas.microsoft.com/office/drawing/2014/main" id="{CA0CE29B-E1A6-0D41-6F6C-5D38C4C70130}"/>
+              </a:ext>
+            </a:extLst>
+          </p:cNvPr>
+          <p:cNvSpPr>
+            <a:spLocks noGrp="1"/>
+          </p:cNvSpPr>
+          <p:nvPr>
+            <p:ph type="title"/>
+          </p:nvPr>
+        </p:nvSpPr>
+        <p:spPr>
+          <a:xfrm>
+            <a:off x="831850" y="1709738"/>
+            <a:ext cx="10515600" cy="2852737"/>
+          </a:xfrm>
+        </p:spPr>
+        <p:txBody>
+          <a:bodyPr anchor="b"/>
+          <a:lstStyle>
+            <a:lvl1pPr>
+              <a:defRPr sz="6000"/>
+            </a:lvl1pPr>
+          </a:lstStyle>
+          <a:p>
+            <a:r>
+              <a:rPr lang="en-US"/>
+              <a:t>Click to edit Master title style</a:t>
+            </a:r>
+          </a:p>
+        </p:txBody>
+      </p:sp>
+      <p:sp>
+        <p:nvSpPr>
+          <p:cNvPr id="3" name="Text Placeholder 2">
+            <a:extLst>
+              <a:ext uri="{FF2B5EF4-FFF2-40B4-BE49-F238E27FC236}">
+                <a16:creationId xmlns:a16="http://schemas.microsoft.com/office/drawing/2014/main" id="{A7875948-0A90-8577-4183-146B536E6EA3}"/>
+              </a:ext>
+            </a:extLst>
+          </p:cNvPr>
+          <p:cNvSpPr>
+            <a:spLocks noGrp="1"/>
+          </p:cNvSpPr>
+          <p:nvPr>
+            <p:ph type="body" idx="1"/>
+          </p:nvPr>
+        </p:nvSpPr>
+        <p:spPr>
+          <a:xfrm>
+            <a:off x="831850" y="4589463"/>
+            <a:ext cx="10515600" cy="1500187"/>
+          </a:xfrm>
+        </p:spPr>
+        <p:txBody>
+          <a:bodyPr/>
+          <a:lstStyle>
+            <a:lvl1pPr marL="0" indent="0">
+              <a:buNone/>
+              <a:defRPr sz="2400">
+                <a:solidFill>
+                  <a:schemeClr val="tx1">
+                    <a:tint val="82000"/>
+                  </a:schemeClr>
+                </a:solidFill>
+              </a:defRPr>
+            </a:lvl1pPr>
+            <a:lvl2pPr marL="457200" indent="0">
+              <a:buNone/>
+              <a:defRPr sz="2000">
+                <a:solidFill>
+                  <a:schemeClr val="tx1">
+                    <a:tint val="82000"/>
+                  </a:schemeClr>
+                </a:solidFill>
+              </a:defRPr>
+            </a:lvl2pPr>
+            <a:lvl3pPr marL="914400" indent="0">
+              <a:buNone/>
+              <a:defRPr sz="1800">
+                <a:solidFill>
+                  <a:schemeClr val="tx1">
+                    <a:tint val="82000"/>
+                  </a:schemeClr>
+                </a:solidFill>
+              </a:defRPr>
+            </a:lvl3pPr>
+            <a:lvl4pPr marL="1371600" indent="0">
+              <a:buNone/>
+              <a:defRPr sz="1600">
+                <a:solidFill>
+                  <a:schemeClr val="tx1">
+                    <a:tint val="82000"/>
+                  </a:schemeClr>
+                </a:solidFill>
+              </a:defRPr>
+            </a:lvl4pPr>
+            <a:lvl5pPr marL="1828800" indent="0">
+              <a:buNone/>
+              <a:defRPr sz="1600">
+                <a:solidFill>
+                  <a:schemeClr val="tx1">
+                    <a:tint val="82000"/>
+                  </a:schemeClr>
+                </a:solidFill>
+              </a:defRPr>
+            </a:lvl5pPr>
+            <a:lvl6pPr marL="2286000" indent="0">
+              <a:buNone/>
+              <a:defRPr sz="1600">
+                <a:solidFill>
+                  <a:schemeClr val="tx1">
+                    <a:tint val="82000"/>
+                  </a:schemeClr>
+                </a:solidFill>
+              </a:defRPr>
+            </a:lvl6pPr>
+            <a:lvl7pPr marL="2743200" indent="0">
+              <a:buNone/>
+              <a:defRPr sz="1600">
+                <a:solidFill>
+                  <a:schemeClr val="tx1">
+                    <a:tint val="82000"/>
+                  </a:schemeClr>
+                </a:solidFill>
+              </a:defRPr>
+            </a:lvl7pPr>
+            <a:lvl8pPr marL="3200400" indent="0">
+              <a:buNone/>
+              <a:defRPr sz="1600">
+                <a:solidFill>
+                  <a:schemeClr val="tx1">
+                    <a:tint val="82000"/>
+                  </a:schemeClr>
+                </a:solidFill>
+              </a:defRPr>
+            </a:lvl8pPr>
+            <a:lvl9pPr marL="3657600" indent="0">
+              <a:buNone/>
+              <a:defRPr sz="1600">
+                <a:solidFill>
+                  <a:schemeClr val="tx1">
+                    <a:tint val="82000"/>
+                  </a:schemeClr>
+                </a:solidFill>
+              </a:defRPr>
+            </a:lvl9pPr>
+          </a:lstStyle>
+          <a:p>
+            <a:pPr lvl="0"/>
+            <a:r>
+              <a:rPr lang="en-US"/>
+              <a:t>Click to edit Master text styles</a:t>
+            </a:r>
+          </a:p>
+        </p:txBody>
+      </p:sp>
+      <p:sp>
+        <p:nvSpPr>
+          <p:cNvPr id="4" name="Date Placeholder 3">
+            <a:extLst>
+              <a:ext uri="{FF2B5EF4-FFF2-40B4-BE49-F238E27FC236}">
+                <a16:creationId xmlns:a16="http://schemas.microsoft.com/office/drawing/2014/main" id="{8CE21008-EB87-60DC-44E7-880A584285AD}"/>
+              </a:ext>
+            </a:extLst>
+          </p:cNvPr>
+          <p:cNvSpPr>
+            <a:spLocks noGrp="1"/>
+          </p:cNvSpPr>
+          <p:nvPr>
+            <p:ph type="dt" sz="half" idx="10"/>
+          </p:nvPr>
+        </p:nvSpPr>
+        <p:spPr/>
+        <p:txBody>
+          <a:bodyPr/>
+          <a:lstStyle/>
+          <a:p>
+            <a:fld id="{4F1764C8-6DEA-4559-B38B-7F974AB06E3C}" type="datetimeFigureOut">
+              <a:rPr lang="en-US" smtClean="0"/>
+              <a:t>10/3/2026</a:t>
+            </a:fld>
+            <a:endParaRPr lang="en-US"/>
+          </a:p>
+        </p:txBody>
+      </p:sp>
+      <p:sp>
+        <p:nvSpPr>
+          <p:cNvPr id="5" name="Footer Placeholder 4">
+            <a:extLst>
+              <a:ext uri="{FF2B5EF4-FFF2-40B4-BE49-F238E27FC236}">
+                <a16:creationId xmlns:a16="http://schemas.microsoft.com/office/drawing/2014/main" id="{8F6E95ED-1FA4-65FB-5B5A-DA239C6EC1BE}"/>
+              </a:ext>
+            </a:extLst>
+          </p:cNvPr>
+          <p:cNvSpPr>
+            <a:spLocks noGrp="1"/>
+          </p:cNvSpPr>
+          <p:nvPr>
+            <p:ph type="ftr" sz="quarter" idx="11"/>
+          </p:nvPr>
+        </p:nvSpPr>
+        <p:spPr/>
+        <p:txBody>
+          <a:bodyPr/>
+          <a:lstStyle/>
+          <a:p>
+            <a:endParaRPr lang="en-US"/>
+          </a:p>
+        </p:txBody>
+      </p:sp>
+      <p:sp>
+        <p:nvSpPr>
+          <p:cNvPr id="6" name="Slide Number Placeholder 5">
+            <a:extLst>
+              <a:ext uri="{FF2B5EF4-FFF2-40B4-BE49-F238E27FC236}">
+                <a16:creationId xmlns:a16="http://schemas.microsoft.com/office/drawing/2014/main" id="{8B014A98-0C74-3127-6FE1-25FE79B64700}"/>
+              </a:ext>
+            </a:extLst>
+          </p:cNvPr>
+          <p:cNvSpPr>
+            <a:spLocks noGrp="1"/>
+          </p:cNvSpPr>
+          <p:nvPr>
+            <p:ph type="sldNum" sz="quarter" idx="12"/>
+          </p:nvPr>
+        </p:nvSpPr>
+        <p:spPr/>
+        <p:txBody>
+          <a:bodyPr/>
+          <a:lstStyle/>
+          <a:p>
+            <a:fld id="{81E2607C-147D-4640-84F6-205905AA5ABA}" type="slidenum">
+              <a:rPr lang="en-US" smtClean="0"/>
+              <a:t>‹#›</a:t>
+            </a:fld>
+            <a:endParaRPr lang="en-US"/>
+          </a:p>
+        </p:txBody>
+      </p:sp>
+    </p:spTree>
+    <p:extLst>
+      <p:ext uri="{BB962C8B-B14F-4D97-AF65-F5344CB8AC3E}">
+        <p14:creationId xmlns:p14="http://schemas.microsoft.com/office/powerpoint/2010/main" val="334414483"/>
+      </p:ext>
+    </p:extLst>
+  </p:cSld>
+  <p:clrMapOvr>
+    <a:masterClrMapping/>
+  </p:clrMapOvr>
+  <p:hf sldNum="0" hdr="0" ftr="0" dt="0"/>
+</p:sldLayout>
+</file>
+
+<file path=ppt/slideLayouts/slideLayout4.xml><?xml version="1.0" encoding="utf-8"?>
+<p:sldLayout xmlns:a="http://schemas.openxmlformats.org/drawingml/2006/main" xmlns:r="http://schemas.openxmlformats.org/officeDocument/2006/relationships" xmlns:p="http://schemas.openxmlformats.org/presentationml/2006/main" type="twoObj" preserve="1">
+  <p:cSld name="Two Content">
+    <p:spTree>
+      <p:nvGrpSpPr>
+        <p:cNvPr id="1" name=""/>
+        <p:cNvGrpSpPr/>
+        <p:nvPr/>
+      </p:nvGrpSpPr>
+      <p:grpSpPr>
+        <a:xfrm>
+          <a:off x="0" y="0"/>
+          <a:ext cx="0" cy="0"/>
+          <a:chOff x="0" y="0"/>
+          <a:chExt cx="0" cy="0"/>
+        </a:xfrm>
+      </p:grpSpPr>
+      <p:sp>
+        <p:nvSpPr>
+          <p:cNvPr id="2" name="Title 1">
+            <a:extLst>
+              <a:ext uri="{FF2B5EF4-FFF2-40B4-BE49-F238E27FC236}">
+                <a16:creationId xmlns:a16="http://schemas.microsoft.com/office/drawing/2014/main" id="{5F08E6E4-7BA7-ABE5-3F04-DE5691DD0C7F}"/>
+              </a:ext>
+            </a:extLst>
+          </p:cNvPr>
+          <p:cNvSpPr>
+            <a:spLocks noGrp="1"/>
+          </p:cNvSpPr>
+          <p:nvPr>
+            <p:ph type="title"/>
+          </p:nvPr>
+        </p:nvSpPr>
+        <p:spPr/>
+        <p:txBody>
+          <a:bodyPr/>
+          <a:lstStyle/>
+          <a:p>
+            <a:r>
+              <a:rPr lang="en-US"/>
+              <a:t>Click to edit Master title style</a:t>
+            </a:r>
+          </a:p>
+        </p:txBody>
+      </p:sp>
+      <p:sp>
+        <p:nvSpPr>
+          <p:cNvPr id="3" name="Content Placeholder 2">
+            <a:extLst>
+              <a:ext uri="{FF2B5EF4-FFF2-40B4-BE49-F238E27FC236}">
+                <a16:creationId xmlns:a16="http://schemas.microsoft.com/office/drawing/2014/main" id="{641DE2EA-1976-2651-D1B2-1385F7AE78F8}"/>
+              </a:ext>
+            </a:extLst>
+          </p:cNvPr>
+          <p:cNvSpPr>
+            <a:spLocks noGrp="1"/>
+          </p:cNvSpPr>
+          <p:nvPr>
+            <p:ph sz="half" idx="1"/>
+          </p:nvPr>
+        </p:nvSpPr>
+        <p:spPr>
+          <a:xfrm>
+            <a:off x="838200" y="1825625"/>
+            <a:ext cx="5181600" cy="4351338"/>
+          </a:xfrm>
+        </p:spPr>
+        <p:txBody>
+          <a:bodyPr/>
+          <a:lstStyle/>
+          <a:p>
+            <a:pPr lvl="0"/>
+            <a:r>
+              <a:rPr lang="en-US"/>
+              <a:t>Click to edit Master text styles</a:t>
+            </a:r>
+          </a:p>
+          <a:p>
+            <a:pPr lvl="1"/>
+            <a:r>
+              <a:rPr lang="en-US"/>
+              <a:t>Second level</a:t>
+            </a:r>
+          </a:p>
+          <a:p>
+            <a:pPr lvl="2"/>
+            <a:r>
+              <a:rPr lang="en-US"/>
+              <a:t>Third level</a:t>
+            </a:r>
+          </a:p>
+          <a:p>
+            <a:pPr lvl="3"/>
+            <a:r>
+              <a:rPr lang="en-US"/>
+              <a:t>Fourth level</a:t>
+            </a:r>
+          </a:p>
+          <a:p>
+            <a:pPr lvl="4"/>
+            <a:r>
+              <a:rPr lang="en-US"/>
+              <a:t>Fifth level</a:t>
+            </a:r>
+          </a:p>
+        </p:txBody>
+      </p:sp>
+      <p:sp>
+        <p:nvSpPr>
+          <p:cNvPr id="4" name="Content Placeholder 3">
+            <a:extLst>
+              <a:ext uri="{FF2B5EF4-FFF2-40B4-BE49-F238E27FC236}">
+                <a16:creationId xmlns:a16="http://schemas.microsoft.com/office/drawing/2014/main" id="{C1579C91-A6B8-6173-C199-D0087A595C29}"/>
+              </a:ext>
+            </a:extLst>
+          </p:cNvPr>
+          <p:cNvSpPr>
+            <a:spLocks noGrp="1"/>
+          </p:cNvSpPr>
+          <p:nvPr>
+            <p:ph sz="half" idx="2"/>
+          </p:nvPr>
+        </p:nvSpPr>
+        <p:spPr>
+          <a:xfrm>
+            <a:off x="6172200" y="1825625"/>
+            <a:ext cx="5181600" cy="4351338"/>
+          </a:xfrm>
+        </p:spPr>
+        <p:txBody>
+          <a:bodyPr/>
+          <a:lstStyle/>
+          <a:p>
+            <a:pPr lvl="0"/>
+            <a:r>
+              <a:rPr lang="en-US"/>
+              <a:t>Click to edit Master text styles</a:t>
+            </a:r>
+          </a:p>
+          <a:p>
+            <a:pPr lvl="1"/>
+            <a:r>
+              <a:rPr lang="en-US"/>
+              <a:t>Second level</a:t>
+            </a:r>
+          </a:p>
+          <a:p>
+            <a:pPr lvl="2"/>
+            <a:r>
+              <a:rPr lang="en-US"/>
+              <a:t>Third level</a:t>
+            </a:r>
+          </a:p>
+          <a:p>
+            <a:pPr lvl="3"/>
+            <a:r>
+              <a:rPr lang="en-US"/>
+              <a:t>Fourth level</a:t>
+            </a:r>
+          </a:p>
+          <a:p>
+            <a:pPr lvl="4"/>
+            <a:r>
+              <a:rPr lang="en-US"/>
+              <a:t>Fifth level</a:t>
+            </a:r>
+          </a:p>
+        </p:txBody>
+      </p:sp>
+      <p:sp>
+        <p:nvSpPr>
+          <p:cNvPr id="5" name="Date Placeholder 4">
+            <a:extLst>
+              <a:ext uri="{FF2B5EF4-FFF2-40B4-BE49-F238E27FC236}">
+                <a16:creationId xmlns:a16="http://schemas.microsoft.com/office/drawing/2014/main" id="{838C70D6-168D-4352-177E-EF0F826C2573}"/>
+              </a:ext>
+            </a:extLst>
+          </p:cNvPr>
+          <p:cNvSpPr>
+            <a:spLocks noGrp="1"/>
+          </p:cNvSpPr>
+          <p:nvPr>
+            <p:ph type="dt" sz="half" idx="10"/>
+          </p:nvPr>
+        </p:nvSpPr>
+        <p:spPr/>
+        <p:txBody>
+          <a:bodyPr/>
+          <a:lstStyle/>
+          <a:p>
+            <a:fld id="{4F1764C8-6DEA-4559-B38B-7F974AB06E3C}" type="datetimeFigureOut">
+              <a:rPr lang="en-US" smtClean="0"/>
+              <a:t>10/3/2026</a:t>
+            </a:fld>
+            <a:endParaRPr lang="en-US"/>
+          </a:p>
+        </p:txBody>
+      </p:sp>
+      <p:sp>
+        <p:nvSpPr>
+          <p:cNvPr id="6" name="Footer Placeholder 5">
+            <a:extLst>
+              <a:ext uri="{FF2B5EF4-FFF2-40B4-BE49-F238E27FC236}">
+                <a16:creationId xmlns:a16="http://schemas.microsoft.com/office/drawing/2014/main" id="{07C284C1-347A-2459-01D1-CC417D3663A2}"/>
+              </a:ext>
+            </a:extLst>
+          </p:cNvPr>
+          <p:cNvSpPr>
+            <a:spLocks noGrp="1"/>
+          </p:cNvSpPr>
+          <p:nvPr>
+            <p:ph type="ftr" sz="quarter" idx="11"/>
+          </p:nvPr>
+        </p:nvSpPr>
+        <p:spPr/>
+        <p:txBody>
+          <a:bodyPr/>
+          <a:lstStyle/>
+          <a:p>
+            <a:endParaRPr lang="en-US"/>
+          </a:p>
+        </p:txBody>
+      </p:sp>
+      <p:sp>
+        <p:nvSpPr>
+          <p:cNvPr id="7" name="Slide Number Placeholder 6">
+            <a:extLst>
+              <a:ext uri="{FF2B5EF4-FFF2-40B4-BE49-F238E27FC236}">
+                <a16:creationId xmlns:a16="http://schemas.microsoft.com/office/drawing/2014/main" id="{686BC9CA-44B2-623D-2596-B7E0E7D34204}"/>
+              </a:ext>
+            </a:extLst>
+          </p:cNvPr>
+          <p:cNvSpPr>
+            <a:spLocks noGrp="1"/>
+          </p:cNvSpPr>
+          <p:nvPr>
+            <p:ph type="sldNum" sz="quarter" idx="12"/>
+          </p:nvPr>
+        </p:nvSpPr>
+        <p:spPr/>
+        <p:txBody>
+          <a:bodyPr/>
+          <a:lstStyle/>
+          <a:p>
+            <a:fld id="{81E2607C-147D-4640-84F6-205905AA5ABA}" type="slidenum">
+              <a:rPr lang="en-US" smtClean="0"/>
+              <a:t>‹#›</a:t>
+            </a:fld>
+            <a:endParaRPr lang="en-US"/>
+          </a:p>
+        </p:txBody>
+      </p:sp>
+    </p:spTree>
+    <p:extLst>
+      <p:ext uri="{BB962C8B-B14F-4D97-AF65-F5344CB8AC3E}">
+        <p14:creationId xmlns:p14="http://schemas.microsoft.com/office/powerpoint/2010/main" val="3834855956"/>
+      </p:ext>
+    </p:extLst>
+  </p:cSld>
+  <p:clrMapOvr>
+    <a:masterClrMapping/>
+  </p:clrMapOvr>
+  <p:hf sldNum="0" hdr="0" ftr="0" dt="0"/>
+</p:sldLayout>
+</file>
+
+<file path=ppt/slideLayouts/slideLayout5.xml><?xml version="1.0" encoding="utf-8"?>
+<p:sldLayout xmlns:a="http://schemas.openxmlformats.org/drawingml/2006/main" xmlns:r="http://schemas.openxmlformats.org/officeDocument/2006/relationships" xmlns:p="http://schemas.openxmlformats.org/presentationml/2006/main" type="twoTxTwoObj" preserve="1">
+  <p:cSld name="Comparison">
+    <p:spTree>
+      <p:nvGrpSpPr>
+        <p:cNvPr id="1" name=""/>
+        <p:cNvGrpSpPr/>
+        <p:nvPr/>
+      </p:nvGrpSpPr>
+      <p:grpSpPr>
+        <a:xfrm>
+          <a:off x="0" y="0"/>
+          <a:ext cx="0" cy="0"/>
+          <a:chOff x="0" y="0"/>
+          <a:chExt cx="0" cy="0"/>
+        </a:xfrm>
+      </p:grpSpPr>
+      <p:sp>
+        <p:nvSpPr>
+          <p:cNvPr id="2" name="Title 1">
+            <a:extLst>
+              <a:ext uri="{FF2B5EF4-FFF2-40B4-BE49-F238E27FC236}">
+                <a16:creationId xmlns:a16="http://schemas.microsoft.com/office/drawing/2014/main" id="{9A3F8904-62CE-85C3-98D4-FAE5043AB2D5}"/>
+              </a:ext>
+            </a:extLst>
+          </p:cNvPr>
+          <p:cNvSpPr>
+            <a:spLocks noGrp="1"/>
+          </p:cNvSpPr>
+          <p:nvPr>
+            <p:ph type="title"/>
+          </p:nvPr>
+        </p:nvSpPr>
+        <p:spPr>
+          <a:xfrm>
+            <a:off x="839788" y="365125"/>
+            <a:ext cx="10515600" cy="1325563"/>
+          </a:xfrm>
+        </p:spPr>
+        <p:txBody>
+          <a:bodyPr/>
+          <a:lstStyle/>
+          <a:p>
+            <a:r>
+              <a:rPr lang="en-US"/>
+              <a:t>Click to edit Master title style</a:t>
+            </a:r>
+          </a:p>
+        </p:txBody>
+      </p:sp>
+      <p:sp>
+        <p:nvSpPr>
+          <p:cNvPr id="3" name="Text Placeholder 2">
+            <a:extLst>
+              <a:ext uri="{FF2B5EF4-FFF2-40B4-BE49-F238E27FC236}">
+                <a16:creationId xmlns:a16="http://schemas.microsoft.com/office/drawing/2014/main" id="{08EAE4EC-4EFE-A69F-E0AB-682A8F2BE053}"/>
+              </a:ext>
+            </a:extLst>
+          </p:cNvPr>
+          <p:cNvSpPr>
+            <a:spLocks noGrp="1"/>
+          </p:cNvSpPr>
+          <p:nvPr>
+            <p:ph type="body" idx="1"/>
+          </p:nvPr>
+        </p:nvSpPr>
+        <p:spPr>
+          <a:xfrm>
+            <a:off x="839788" y="1681163"/>
+            <a:ext cx="5157787" cy="823912"/>
+          </a:xfrm>
+        </p:spPr>
+        <p:txBody>
+          <a:bodyPr anchor="b"/>
+          <a:lstStyle>
+            <a:lvl1pPr marL="0" indent="0">
+              <a:buNone/>
+              <a:defRPr sz="2400" b="1"/>
+            </a:lvl1pPr>
+            <a:lvl2pPr marL="457200" indent="0">
+              <a:buNone/>
+              <a:defRPr sz="2000" b="1"/>
+            </a:lvl2pPr>
+            <a:lvl3pPr marL="914400" indent="0">
+              <a:buNone/>
+              <a:defRPr sz="1800" b="1"/>
+            </a:lvl3pPr>
+            <a:lvl4pPr marL="1371600" indent="0">
+              <a:buNone/>
+              <a:defRPr sz="1600" b="1"/>
+            </a:lvl4pPr>
+            <a:lvl5pPr marL="1828800" indent="0">
+              <a:buNone/>
+              <a:defRPr sz="1600" b="1"/>
+            </a:lvl5pPr>
+            <a:lvl6pPr marL="2286000" indent="0">
+              <a:buNone/>
+              <a:defRPr sz="1600" b="1"/>
+            </a:lvl6pPr>
+            <a:lvl7pPr marL="2743200" indent="0">
+              <a:buNone/>
+              <a:defRPr sz="1600" b="1"/>
+            </a:lvl7pPr>
+            <a:lvl8pPr marL="3200400" indent="0">
+              <a:buNone/>
+              <a:defRPr sz="1600" b="1"/>
+            </a:lvl8pPr>
+            <a:lvl9pPr marL="3657600" indent="0">
+              <a:buNone/>
+              <a:defRPr sz="1600" b="1"/>
+            </a:lvl9pPr>
+          </a:lstStyle>
+          <a:p>
+            <a:pPr lvl="0"/>
+            <a:r>
+              <a:rPr lang="en-US"/>
+              <a:t>Click to edit Master text styles</a:t>
+            </a:r>
+          </a:p>
+        </p:txBody>
+      </p:sp>
+      <p:sp>
+        <p:nvSpPr>
+          <p:cNvPr id="4" name="Content Placeholder 3">
+            <a:extLst>
+              <a:ext uri="{FF2B5EF4-FFF2-40B4-BE49-F238E27FC236}">
+                <a16:creationId xmlns:a16="http://schemas.microsoft.com/office/drawing/2014/main" id="{27B8A335-CE49-31F2-BF17-89673548B3FF}"/>
+              </a:ext>
+            </a:extLst>
+          </p:cNvPr>
+          <p:cNvSpPr>
+            <a:spLocks noGrp="1"/>
+          </p:cNvSpPr>
+          <p:nvPr>
+            <p:ph sz="half" idx="2"/>
+          </p:nvPr>
+        </p:nvSpPr>
+        <p:spPr>
+          <a:xfrm>
+            <a:off x="839788" y="2505075"/>
+            <a:ext cx="5157787" cy="3684588"/>
+          </a:xfrm>
+        </p:spPr>
+        <p:txBody>
+          <a:bodyPr/>
+          <a:lstStyle/>
+          <a:p>
+            <a:pPr lvl="0"/>
+            <a:r>
+              <a:rPr lang="en-US"/>
+              <a:t>Click to edit Master text styles</a:t>
+            </a:r>
+          </a:p>
+          <a:p>
+            <a:pPr lvl="1"/>
+            <a:r>
+              <a:rPr lang="en-US"/>
+              <a:t>Second level</a:t>
+            </a:r>
+          </a:p>
+          <a:p>
+            <a:pPr lvl="2"/>
+            <a:r>
+              <a:rPr lang="en-US"/>
+              <a:t>Third level</a:t>
+            </a:r>
+          </a:p>
+          <a:p>
+            <a:pPr lvl="3"/>
+            <a:r>
+              <a:rPr lang="en-US"/>
+              <a:t>Fourth level</a:t>
+            </a:r>
+          </a:p>
+          <a:p>
+            <a:pPr lvl="4"/>
+            <a:r>
+              <a:rPr lang="en-US"/>
+              <a:t>Fifth level</a:t>
+            </a:r>
+          </a:p>
+        </p:txBody>
+      </p:sp>
+      <p:sp>
+        <p:nvSpPr>
+          <p:cNvPr id="5" name="Text Placeholder 4">
+            <a:extLst>
+              <a:ext uri="{FF2B5EF4-FFF2-40B4-BE49-F238E27FC236}">
+                <a16:creationId xmlns:a16="http://schemas.microsoft.com/office/drawing/2014/main" id="{051F63B8-C96B-6009-5F91-15DB76C9A3B0}"/>
+              </a:ext>
+            </a:extLst>
+          </p:cNvPr>
+          <p:cNvSpPr>
+            <a:spLocks noGrp="1"/>
+          </p:cNvSpPr>
+          <p:nvPr>
+            <p:ph type="body" sz="quarter" idx="3"/>
+          </p:nvPr>
+        </p:nvSpPr>
+        <p:spPr>
+          <a:xfrm>
+            <a:off x="6172200" y="1681163"/>
+            <a:ext cx="5183188" cy="823912"/>
+          </a:xfrm>
+        </p:spPr>
+        <p:txBody>
+          <a:bodyPr anchor="b"/>
+          <a:lstStyle>
+            <a:lvl1pPr marL="0" indent="0">
+              <a:buNone/>
+              <a:defRPr sz="2400" b="1"/>
+            </a:lvl1pPr>
+            <a:lvl2pPr marL="457200" indent="0">
+              <a:buNone/>
+              <a:defRPr sz="2000" b="1"/>
+            </a:lvl2pPr>
+            <a:lvl3pPr marL="914400" indent="0">
+              <a:buNone/>
+              <a:defRPr sz="1800" b="1"/>
+            </a:lvl3pPr>
+            <a:lvl4pPr marL="1371600" indent="0">
+              <a:buNone/>
+              <a:defRPr sz="1600" b="1"/>
+            </a:lvl4pPr>
+            <a:lvl5pPr marL="1828800" indent="0">
+              <a:buNone/>
+              <a:defRPr sz="1600" b="1"/>
+            </a:lvl5pPr>
+            <a:lvl6pPr marL="2286000" indent="0">
+              <a:buNone/>
+              <a:defRPr sz="1600" b="1"/>
+            </a:lvl6pPr>
+            <a:lvl7pPr marL="2743200" indent="0">
+              <a:buNone/>
+              <a:defRPr sz="1600" b="1"/>
+            </a:lvl7pPr>
+            <a:lvl8pPr marL="3200400" indent="0">
+              <a:buNone/>
+              <a:defRPr sz="1600" b="1"/>
+            </a:lvl8pPr>
+            <a:lvl9pPr marL="3657600" indent="0">
+              <a:buNone/>
+              <a:defRPr sz="1600" b="1"/>
+            </a:lvl9pPr>
+          </a:lstStyle>
+          <a:p>
+            <a:pPr lvl="0"/>
+            <a:r>
+              <a:rPr lang="en-US"/>
+              <a:t>Click to edit Master text styles</a:t>
+            </a:r>
+          </a:p>
+        </p:txBody>
+      </p:sp>
+      <p:sp>
+        <p:nvSpPr>
+          <p:cNvPr id="6" name="Content Placeholder 5">
+            <a:extLst>
+              <a:ext uri="{FF2B5EF4-FFF2-40B4-BE49-F238E27FC236}">
+                <a16:creationId xmlns:a16="http://schemas.microsoft.com/office/drawing/2014/main" id="{DAC3A776-F2D2-9013-9BCE-D9B29E677EF8}"/>
+              </a:ext>
+            </a:extLst>
+          </p:cNvPr>
+          <p:cNvSpPr>
+            <a:spLocks noGrp="1"/>
+          </p:cNvSpPr>
+          <p:nvPr>
+            <p:ph sz="quarter" idx="4"/>
+          </p:nvPr>
+        </p:nvSpPr>
+        <p:spPr>
+          <a:xfrm>
+            <a:off x="6172200" y="2505075"/>
+            <a:ext cx="5183188" cy="3684588"/>
+          </a:xfrm>
+        </p:spPr>
+        <p:txBody>
+          <a:bodyPr/>
+          <a:lstStyle/>
+          <a:p>
+            <a:pPr lvl="0"/>
+            <a:r>
+              <a:rPr lang="en-US"/>
+              <a:t>Click to edit Master text styles</a:t>
+            </a:r>
+          </a:p>
+          <a:p>
+            <a:pPr lvl="1"/>
+            <a:r>
+              <a:rPr lang="en-US"/>
+              <a:t>Second level</a:t>
+            </a:r>
+          </a:p>
+          <a:p>
+            <a:pPr lvl="2"/>
+            <a:r>
+              <a:rPr lang="en-US"/>
+              <a:t>Third level</a:t>
+            </a:r>
+          </a:p>
+          <a:p>
+            <a:pPr lvl="3"/>
+            <a:r>
+              <a:rPr lang="en-US"/>
+              <a:t>Fourth level</a:t>
+            </a:r>
+          </a:p>
+          <a:p>
+            <a:pPr lvl="4"/>
+            <a:r>
+              <a:rPr lang="en-US"/>
+              <a:t>Fifth level</a:t>
+            </a:r>
+          </a:p>
+        </p:txBody>
+      </p:sp>
+      <p:sp>
+        <p:nvSpPr>
+          <p:cNvPr id="7" name="Date Placeholder 6">
+            <a:extLst>
+              <a:ext uri="{FF2B5EF4-FFF2-40B4-BE49-F238E27FC236}">
+                <a16:creationId xmlns:a16="http://schemas.microsoft.com/office/drawing/2014/main" id="{DBE4DC84-4BA0-82FF-843F-4066FCFD9225}"/>
+              </a:ext>
+            </a:extLst>
+          </p:cNvPr>
+          <p:cNvSpPr>
+            <a:spLocks noGrp="1"/>
+          </p:cNvSpPr>
+          <p:nvPr>
+            <p:ph type="dt" sz="half" idx="10"/>
+          </p:nvPr>
+        </p:nvSpPr>
+        <p:spPr/>
+        <p:txBody>
+          <a:bodyPr/>
+          <a:lstStyle/>
+          <a:p>
+            <a:fld id="{4F1764C8-6DEA-4559-B38B-7F974AB06E3C}" type="datetimeFigureOut">
+              <a:rPr lang="en-US" smtClean="0"/>
+              <a:t>10/3/2026</a:t>
+            </a:fld>
+            <a:endParaRPr lang="en-US"/>
+          </a:p>
+        </p:txBody>
+      </p:sp>
+      <p:sp>
+        <p:nvSpPr>
+          <p:cNvPr id="8" name="Footer Placeholder 7">
+            <a:extLst>
+              <a:ext uri="{FF2B5EF4-FFF2-40B4-BE49-F238E27FC236}">
+                <a16:creationId xmlns:a16="http://schemas.microsoft.com/office/drawing/2014/main" id="{B2D923C9-DC1C-371E-57A0-C9DF9A9E0C14}"/>
+              </a:ext>
+            </a:extLst>
+          </p:cNvPr>
+          <p:cNvSpPr>
+            <a:spLocks noGrp="1"/>
+          </p:cNvSpPr>
+          <p:nvPr>
+            <p:ph type="ftr" sz="quarter" idx="11"/>
+          </p:nvPr>
+        </p:nvSpPr>
+        <p:spPr/>
+        <p:txBody>
+          <a:bodyPr/>
+          <a:lstStyle/>
+          <a:p>
+            <a:endParaRPr lang="en-US"/>
+          </a:p>
+        </p:txBody>
+      </p:sp>
+      <p:sp>
+        <p:nvSpPr>
+          <p:cNvPr id="9" name="Slide Number Placeholder 8">
+            <a:extLst>
+              <a:ext uri="{FF2B5EF4-FFF2-40B4-BE49-F238E27FC236}">
+                <a16:creationId xmlns:a16="http://schemas.microsoft.com/office/drawing/2014/main" id="{E05A3AA9-8E0A-01F6-07B7-3E22C39F52ED}"/>
+              </a:ext>
+            </a:extLst>
+          </p:cNvPr>
+          <p:cNvSpPr>
+            <a:spLocks noGrp="1"/>
+          </p:cNvSpPr>
+          <p:nvPr>
+            <p:ph type="sldNum" sz="quarter" idx="12"/>
+          </p:nvPr>
+        </p:nvSpPr>
+        <p:spPr/>
+        <p:txBody>
+          <a:bodyPr/>
+          <a:lstStyle/>
+          <a:p>
+            <a:fld id="{81E2607C-147D-4640-84F6-205905AA5ABA}" type="slidenum">
+              <a:rPr lang="en-US" smtClean="0"/>
+              <a:t>‹#›</a:t>
+            </a:fld>
+            <a:endParaRPr lang="en-US"/>
+          </a:p>
+        </p:txBody>
+      </p:sp>
+    </p:spTree>
+    <p:extLst>
+      <p:ext uri="{BB962C8B-B14F-4D97-AF65-F5344CB8AC3E}">
+        <p14:creationId xmlns:p14="http://schemas.microsoft.com/office/powerpoint/2010/main" val="4200030581"/>
+      </p:ext>
+    </p:extLst>
+  </p:cSld>
+  <p:clrMapOvr>
+    <a:masterClrMapping/>
+  </p:clrMapOvr>
+  <p:hf sldNum="0" hdr="0" ftr="0" dt="0"/>
+</p:sldLayout>
+</file>
+
+<file path=ppt/slideLayouts/slideLayout6.xml><?xml version="1.0" encoding="utf-8"?>
+<p:sldLayout xmlns:a="http://schemas.openxmlformats.org/drawingml/2006/main" xmlns:r="http://schemas.openxmlformats.org/officeDocument/2006/relationships" xmlns:p="http://schemas.openxmlformats.org/presentationml/2006/main" type="titleOnly" preserve="1">
+  <p:cSld name="Title Only">
+    <p:spTree>
+      <p:nvGrpSpPr>
+        <p:cNvPr id="1" name=""/>
+        <p:cNvGrpSpPr/>
+        <p:nvPr/>
+      </p:nvGrpSpPr>
+      <p:grpSpPr>
+        <a:xfrm>
+          <a:off x="0" y="0"/>
+          <a:ext cx="0" cy="0"/>
+          <a:chOff x="0" y="0"/>
+          <a:chExt cx="0" cy="0"/>
+        </a:xfrm>
+      </p:grpSpPr>
+      <p:sp>
+        <p:nvSpPr>
+          <p:cNvPr id="2" name="Title 1">
+            <a:extLst>
+              <a:ext uri="{FF2B5EF4-FFF2-40B4-BE49-F238E27FC236}">
+                <a16:creationId xmlns:a16="http://schemas.microsoft.com/office/drawing/2014/main" id="{C144CA54-D0AF-DA90-B2D5-8B736A5B0D9A}"/>
+              </a:ext>
+            </a:extLst>
+          </p:cNvPr>
+          <p:cNvSpPr>
+            <a:spLocks noGrp="1"/>
+          </p:cNvSpPr>
+          <p:nvPr>
+            <p:ph type="title"/>
+          </p:nvPr>
+        </p:nvSpPr>
+        <p:spPr/>
+        <p:txBody>
+          <a:bodyPr/>
+          <a:lstStyle/>
+          <a:p>
+            <a:r>
+              <a:rPr lang="en-US"/>
+              <a:t>Click to edit Master title style</a:t>
+            </a:r>
+          </a:p>
+        </p:txBody>
+      </p:sp>
+      <p:sp>
+        <p:nvSpPr>
+          <p:cNvPr id="3" name="Date Placeholder 2">
+            <a:extLst>
+              <a:ext uri="{FF2B5EF4-FFF2-40B4-BE49-F238E27FC236}">
+                <a16:creationId xmlns:a16="http://schemas.microsoft.com/office/drawing/2014/main" id="{6618087B-CB78-F3BE-0F19-DA3CECF7D735}"/>
+              </a:ext>
+            </a:extLst>
+          </p:cNvPr>
+          <p:cNvSpPr>
+            <a:spLocks noGrp="1"/>
+          </p:cNvSpPr>
+          <p:nvPr>
+            <p:ph type="dt" sz="half" idx="10"/>
+          </p:nvPr>
+        </p:nvSpPr>
+        <p:spPr/>
+        <p:txBody>
+          <a:bodyPr/>
+          <a:lstStyle/>
+          <a:p>
+            <a:fld id="{4F1764C8-6DEA-4559-B38B-7F974AB06E3C}" type="datetimeFigureOut">
+              <a:rPr lang="en-US" smtClean="0"/>
+              <a:t>10/3/2026</a:t>
+            </a:fld>
+            <a:endParaRPr lang="en-US"/>
+          </a:p>
+        </p:txBody>
+      </p:sp>
+      <p:sp>
+        <p:nvSpPr>
+          <p:cNvPr id="4" name="Footer Placeholder 3">
+            <a:extLst>
+              <a:ext uri="{FF2B5EF4-FFF2-40B4-BE49-F238E27FC236}">
+                <a16:creationId xmlns:a16="http://schemas.microsoft.com/office/drawing/2014/main" id="{E863AF42-BE96-7E5C-765B-EB26D3328614}"/>
+              </a:ext>
+            </a:extLst>
+          </p:cNvPr>
+          <p:cNvSpPr>
+            <a:spLocks noGrp="1"/>
+          </p:cNvSpPr>
+          <p:nvPr>
+            <p:ph type="ftr" sz="quarter" idx="11"/>
+          </p:nvPr>
+        </p:nvSpPr>
+        <p:spPr/>
+        <p:txBody>
+          <a:bodyPr/>
+          <a:lstStyle/>
+          <a:p>
+            <a:endParaRPr lang="en-US"/>
+          </a:p>
+        </p:txBody>
+      </p:sp>
+      <p:sp>
+        <p:nvSpPr>
+          <p:cNvPr id="5" name="Slide Number Placeholder 4">
+            <a:extLst>
+              <a:ext uri="{FF2B5EF4-FFF2-40B4-BE49-F238E27FC236}">
+                <a16:creationId xmlns:a16="http://schemas.microsoft.com/office/drawing/2014/main" id="{A7776467-384E-90FD-7DE0-1E621172E2C2}"/>
+              </a:ext>
+            </a:extLst>
+          </p:cNvPr>
+          <p:cNvSpPr>
+            <a:spLocks noGrp="1"/>
+          </p:cNvSpPr>
+          <p:nvPr>
+            <p:ph type="sldNum" sz="quarter" idx="12"/>
+          </p:nvPr>
+        </p:nvSpPr>
+        <p:spPr/>
+        <p:txBody>
+          <a:bodyPr/>
+          <a:lstStyle/>
+          <a:p>
+            <a:fld id="{81E2607C-147D-4640-84F6-205905AA5ABA}" type="slidenum">
+              <a:rPr lang="en-US" smtClean="0"/>
+              <a:t>‹#›</a:t>
+            </a:fld>
+            <a:endParaRPr lang="en-US"/>
+          </a:p>
+        </p:txBody>
+      </p:sp>
+    </p:spTree>
+    <p:extLst>
+      <p:ext uri="{BB962C8B-B14F-4D97-AF65-F5344CB8AC3E}">
+        <p14:creationId xmlns:p14="http://schemas.microsoft.com/office/powerpoint/2010/main" val="947145329"/>
+      </p:ext>
+    </p:extLst>
+  </p:cSld>
+  <p:clrMapOvr>
+    <a:masterClrMapping/>
+  </p:clrMapOvr>
+  <p:hf sldNum="0" hdr="0" ftr="0" dt="0"/>
+</p:sldLayout>
+</file>
+
+<file path=ppt/slideLayouts/slideLayout7.xml><?xml version="1.0" encoding="utf-8"?>
+<p:sldLayout xmlns:a="http://schemas.openxmlformats.org/drawingml/2006/main" xmlns:r="http://schemas.openxmlformats.org/officeDocument/2006/relationships" xmlns:p="http://schemas.openxmlformats.org/presentationml/2006/main" type="blank" preserve="1">
+  <p:cSld name="Blank">
+    <p:spTree>
+      <p:nvGrpSpPr>
+        <p:cNvPr id="1" name=""/>
+        <p:cNvGrpSpPr/>
+        <p:nvPr/>
+      </p:nvGrpSpPr>
+      <p:grpSpPr>
+        <a:xfrm>
+          <a:off x="0" y="0"/>
+          <a:ext cx="0" cy="0"/>
+          <a:chOff x="0" y="0"/>
+          <a:chExt cx="0" cy="0"/>
+        </a:xfrm>
+      </p:grpSpPr>
+      <p:sp>
+        <p:nvSpPr>
+          <p:cNvPr id="2" name="Date Placeholder 1">
+            <a:extLst>
+              <a:ext uri="{FF2B5EF4-FFF2-40B4-BE49-F238E27FC236}">
+                <a16:creationId xmlns:a16="http://schemas.microsoft.com/office/drawing/2014/main" id="{6B365695-0569-12AA-D5BF-2F47B12B4674}"/>
+              </a:ext>
+            </a:extLst>
+          </p:cNvPr>
+          <p:cNvSpPr>
+            <a:spLocks noGrp="1"/>
+          </p:cNvSpPr>
+          <p:nvPr>
+            <p:ph type="dt" sz="half" idx="10"/>
+          </p:nvPr>
+        </p:nvSpPr>
+        <p:spPr/>
+        <p:txBody>
+          <a:bodyPr/>
+          <a:lstStyle/>
+          <a:p>
+            <a:fld id="{4F1764C8-6DEA-4559-B38B-7F974AB06E3C}" type="datetimeFigureOut">
+              <a:rPr lang="en-US" smtClean="0"/>
+              <a:t>10/3/2026</a:t>
+            </a:fld>
+            <a:endParaRPr lang="en-US"/>
+          </a:p>
+        </p:txBody>
+      </p:sp>
+      <p:sp>
+        <p:nvSpPr>
+          <p:cNvPr id="3" name="Footer Placeholder 2">
+            <a:extLst>
+              <a:ext uri="{FF2B5EF4-FFF2-40B4-BE49-F238E27FC236}">
+                <a16:creationId xmlns:a16="http://schemas.microsoft.com/office/drawing/2014/main" id="{BE8685D2-13FB-09F5-7ECE-F6A40C2385E4}"/>
+              </a:ext>
+            </a:extLst>
+          </p:cNvPr>
+          <p:cNvSpPr>
+            <a:spLocks noGrp="1"/>
+          </p:cNvSpPr>
+          <p:nvPr>
+            <p:ph type="ftr" sz="quarter" idx="11"/>
+          </p:nvPr>
+        </p:nvSpPr>
+        <p:spPr/>
+        <p:txBody>
+          <a:bodyPr/>
+          <a:lstStyle/>
+          <a:p>
+            <a:endParaRPr lang="en-US"/>
+          </a:p>
+        </p:txBody>
+      </p:sp>
+      <p:sp>
+        <p:nvSpPr>
+          <p:cNvPr id="4" name="Slide Number Placeholder 3">
+            <a:extLst>
+              <a:ext uri="{FF2B5EF4-FFF2-40B4-BE49-F238E27FC236}">
+                <a16:creationId xmlns:a16="http://schemas.microsoft.com/office/drawing/2014/main" id="{4C5A468B-AE28-A9D4-7D9A-A566369D6D10}"/>
+              </a:ext>
+            </a:extLst>
+          </p:cNvPr>
+          <p:cNvSpPr>
+            <a:spLocks noGrp="1"/>
+          </p:cNvSpPr>
+          <p:nvPr>
+            <p:ph type="sldNum" sz="quarter" idx="12"/>
+          </p:nvPr>
+        </p:nvSpPr>
+        <p:spPr/>
+        <p:txBody>
+          <a:bodyPr/>
+          <a:lstStyle/>
+          <a:p>
+            <a:fld id="{81E2607C-147D-4640-84F6-205905AA5ABA}" type="slidenum">
+              <a:rPr lang="en-US" smtClean="0"/>
+              <a:t>‹#›</a:t>
+            </a:fld>
+            <a:endParaRPr lang="en-US"/>
+          </a:p>
+        </p:txBody>
+      </p:sp>
+    </p:spTree>
+    <p:extLst>
+      <p:ext uri="{BB962C8B-B14F-4D97-AF65-F5344CB8AC3E}">
+        <p14:creationId xmlns:p14="http://schemas.microsoft.com/office/powerpoint/2010/main" val="3314943093"/>
+      </p:ext>
+    </p:extLst>
+  </p:cSld>
+  <p:clrMapOvr>
+    <a:masterClrMapping/>
+  </p:clrMapOvr>
+  <p:hf sldNum="0" hdr="0" ftr="0" dt="0"/>
+</p:sldLayout>
+</file>
+
+<file path=ppt/slideLayouts/slideLayout8.xml><?xml version="1.0" encoding="utf-8"?>
+<p:sldLayout xmlns:a="http://schemas.openxmlformats.org/drawingml/2006/main" xmlns:r="http://schemas.openxmlformats.org/officeDocument/2006/relationships" xmlns:p="http://schemas.openxmlformats.org/presentationml/2006/main" type="objTx" preserve="1">
+  <p:cSld name="Content with Caption">
+    <p:spTree>
+      <p:nvGrpSpPr>
+        <p:cNvPr id="1" name=""/>
+        <p:cNvGrpSpPr/>
+        <p:nvPr/>
+      </p:nvGrpSpPr>
+      <p:grpSpPr>
+        <a:xfrm>
+          <a:off x="0" y="0"/>
+          <a:ext cx="0" cy="0"/>
+          <a:chOff x="0" y="0"/>
+          <a:chExt cx="0" cy="0"/>
+        </a:xfrm>
+      </p:grpSpPr>
+      <p:sp>
+        <p:nvSpPr>
+          <p:cNvPr id="2" name="Title 1">
+            <a:extLst>
+              <a:ext uri="{FF2B5EF4-FFF2-40B4-BE49-F238E27FC236}">
+                <a16:creationId xmlns:a16="http://schemas.microsoft.com/office/drawing/2014/main" id="{B540B628-4F55-ABC5-5BC0-BDEACD209F26}"/>
+              </a:ext>
+            </a:extLst>
+          </p:cNvPr>
+          <p:cNvSpPr>
+            <a:spLocks noGrp="1"/>
+          </p:cNvSpPr>
+          <p:nvPr>
+            <p:ph type="title"/>
+          </p:nvPr>
+        </p:nvSpPr>
+        <p:spPr>
+          <a:xfrm>
+            <a:off x="839788" y="457200"/>
+            <a:ext cx="3932237" cy="1600200"/>
+          </a:xfrm>
+        </p:spPr>
+        <p:txBody>
+          <a:bodyPr anchor="b"/>
+          <a:lstStyle>
+            <a:lvl1pPr>
+              <a:defRPr sz="3200"/>
+            </a:lvl1pPr>
+          </a:lstStyle>
+          <a:p>
+            <a:r>
+              <a:rPr lang="en-US"/>
+              <a:t>Click to edit Master title style</a:t>
+            </a:r>
+          </a:p>
+        </p:txBody>
+      </p:sp>
+      <p:sp>
+        <p:nvSpPr>
+          <p:cNvPr id="3" name="Content Placeholder 2">
+            <a:extLst>
+              <a:ext uri="{FF2B5EF4-FFF2-40B4-BE49-F238E27FC236}">
+                <a16:creationId xmlns:a16="http://schemas.microsoft.com/office/drawing/2014/main" id="{7711FFBC-91FC-8859-630C-251E1A11AF87}"/>
+              </a:ext>
+            </a:extLst>
+          </p:cNvPr>
+          <p:cNvSpPr>
+            <a:spLocks noGrp="1"/>
+          </p:cNvSpPr>
+          <p:nvPr>
+            <p:ph idx="1"/>
+          </p:nvPr>
+        </p:nvSpPr>
+        <p:spPr>
+          <a:xfrm>
+            <a:off x="5183188" y="987425"/>
+            <a:ext cx="6172200" cy="4873625"/>
+          </a:xfrm>
+        </p:spPr>
+        <p:txBody>
+          <a:bodyPr/>
+          <a:lstStyle>
+            <a:lvl1pPr>
+              <a:defRPr sz="3200"/>
+            </a:lvl1pPr>
+            <a:lvl2pPr>
+              <a:defRPr sz="2800"/>
+            </a:lvl2pPr>
+            <a:lvl3pPr>
+              <a:defRPr sz="2400"/>
+            </a:lvl3pPr>
+            <a:lvl4pPr>
+              <a:defRPr sz="2000"/>
+            </a:lvl4pPr>
+            <a:lvl5pPr>
+              <a:defRPr sz="2000"/>
+            </a:lvl5pPr>
+            <a:lvl6pPr>
+              <a:defRPr sz="2000"/>
+            </a:lvl6pPr>
+            <a:lvl7pPr>
+              <a:defRPr sz="2000"/>
+            </a:lvl7pPr>
+            <a:lvl8pPr>
+              <a:defRPr sz="2000"/>
+            </a:lvl8pPr>
+            <a:lvl9pPr>
+              <a:defRPr sz="2000"/>
+            </a:lvl9pPr>
+          </a:lstStyle>
+          <a:p>
+            <a:pPr lvl="0"/>
+            <a:r>
+              <a:rPr lang="en-US"/>
+              <a:t>Click to edit Master text styles</a:t>
+            </a:r>
+          </a:p>
+          <a:p>
+            <a:pPr lvl="1"/>
+            <a:r>
+              <a:rPr lang="en-US"/>
+              <a:t>Second level</a:t>
+            </a:r>
+          </a:p>
+          <a:p>
+            <a:pPr lvl="2"/>
+            <a:r>
+              <a:rPr lang="en-US"/>
+              <a:t>Third level</a:t>
+            </a:r>
+          </a:p>
+          <a:p>
+            <a:pPr lvl="3"/>
+            <a:r>
+              <a:rPr lang="en-US"/>
+              <a:t>Fourth level</a:t>
+            </a:r>
+          </a:p>
+          <a:p>
+            <a:pPr lvl="4"/>
+            <a:r>
+              <a:rPr lang="en-US"/>
+              <a:t>Fifth level</a:t>
+            </a:r>
+          </a:p>
+        </p:txBody>
+      </p:sp>
+      <p:sp>
+        <p:nvSpPr>
+          <p:cNvPr id="4" name="Text Placeholder 3">
+            <a:extLst>
+              <a:ext uri="{FF2B5EF4-FFF2-40B4-BE49-F238E27FC236}">
+                <a16:creationId xmlns:a16="http://schemas.microsoft.com/office/drawing/2014/main" id="{F9021749-8102-5152-AEEB-32BE97C80182}"/>
+              </a:ext>
+            </a:extLst>
+          </p:cNvPr>
+          <p:cNvSpPr>
+            <a:spLocks noGrp="1"/>
+          </p:cNvSpPr>
+          <p:nvPr>
+            <p:ph type="body" sz="half" idx="2"/>
+          </p:nvPr>
+        </p:nvSpPr>
+        <p:spPr>
+          <a:xfrm>
+            <a:off x="839788" y="2057400"/>
+            <a:ext cx="3932237" cy="3811588"/>
+          </a:xfrm>
+        </p:spPr>
+        <p:txBody>
+          <a:bodyPr/>
+          <a:lstStyle>
+            <a:lvl1pPr marL="0" indent="0">
+              <a:buNone/>
+              <a:defRPr sz="1600"/>
+            </a:lvl1pPr>
+            <a:lvl2pPr marL="457200" indent="0">
+              <a:buNone/>
+              <a:defRPr sz="1400"/>
+            </a:lvl2pPr>
+            <a:lvl3pPr marL="914400" indent="0">
+              <a:buNone/>
+              <a:defRPr sz="1200"/>
+            </a:lvl3pPr>
+            <a:lvl4pPr marL="1371600" indent="0">
+              <a:buNone/>
+              <a:defRPr sz="1000"/>
+            </a:lvl4pPr>
+            <a:lvl5pPr marL="1828800" indent="0">
+              <a:buNone/>
+              <a:defRPr sz="1000"/>
+            </a:lvl5pPr>
+            <a:lvl6pPr marL="2286000" indent="0">
+              <a:buNone/>
+              <a:defRPr sz="1000"/>
+            </a:lvl6pPr>
+            <a:lvl7pPr marL="2743200" indent="0">
+              <a:buNone/>
+              <a:defRPr sz="1000"/>
+            </a:lvl7pPr>
+            <a:lvl8pPr marL="3200400" indent="0">
+              <a:buNone/>
+              <a:defRPr sz="1000"/>
+            </a:lvl8pPr>
+            <a:lvl9pPr marL="3657600" indent="0">
+              <a:buNone/>
+              <a:defRPr sz="1000"/>
+            </a:lvl9pPr>
+          </a:lstStyle>
+          <a:p>
+            <a:pPr lvl="0"/>
+            <a:r>
+              <a:rPr lang="en-US"/>
+              <a:t>Click to edit Master text styles</a:t>
+            </a:r>
+          </a:p>
+        </p:txBody>
+      </p:sp>
+      <p:sp>
+        <p:nvSpPr>
+          <p:cNvPr id="5" name="Date Placeholder 4">
+            <a:extLst>
+              <a:ext uri="{FF2B5EF4-FFF2-40B4-BE49-F238E27FC236}">
+                <a16:creationId xmlns:a16="http://schemas.microsoft.com/office/drawing/2014/main" id="{E7A6E3DD-B426-A407-CA1E-5FFF894551DB}"/>
+              </a:ext>
+            </a:extLst>
+          </p:cNvPr>
+          <p:cNvSpPr>
+            <a:spLocks noGrp="1"/>
+          </p:cNvSpPr>
+          <p:nvPr>
+            <p:ph type="dt" sz="half" idx="10"/>
+          </p:nvPr>
+        </p:nvSpPr>
+        <p:spPr/>
+        <p:txBody>
+          <a:bodyPr/>
+          <a:lstStyle/>
+          <a:p>
+            <a:fld id="{4F1764C8-6DEA-4559-B38B-7F974AB06E3C}" type="datetimeFigureOut">
+              <a:rPr lang="en-US" smtClean="0"/>
+              <a:t>10/3/2026</a:t>
+            </a:fld>
+            <a:endParaRPr lang="en-US"/>
+          </a:p>
+        </p:txBody>
+      </p:sp>
+      <p:sp>
+        <p:nvSpPr>
+          <p:cNvPr id="6" name="Footer Placeholder 5">
+            <a:extLst>
+              <a:ext uri="{FF2B5EF4-FFF2-40B4-BE49-F238E27FC236}">
+                <a16:creationId xmlns:a16="http://schemas.microsoft.com/office/drawing/2014/main" id="{01932636-0842-A763-8F05-49BE505AB282}"/>
+              </a:ext>
+            </a:extLst>
+          </p:cNvPr>
+          <p:cNvSpPr>
+            <a:spLocks noGrp="1"/>
+          </p:cNvSpPr>
+          <p:nvPr>
+            <p:ph type="ftr" sz="quarter" idx="11"/>
+          </p:nvPr>
+        </p:nvSpPr>
+        <p:spPr/>
+        <p:txBody>
+          <a:bodyPr/>
+          <a:lstStyle/>
+          <a:p>
+            <a:endParaRPr lang="en-US"/>
+          </a:p>
+        </p:txBody>
+      </p:sp>
+      <p:sp>
+        <p:nvSpPr>
+          <p:cNvPr id="7" name="Slide Number Placeholder 6">
+            <a:extLst>
+              <a:ext uri="{FF2B5EF4-FFF2-40B4-BE49-F238E27FC236}">
+                <a16:creationId xmlns:a16="http://schemas.microsoft.com/office/drawing/2014/main" id="{59735255-3AC8-76CF-E75C-FBBD726221FD}"/>
+              </a:ext>
+            </a:extLst>
+          </p:cNvPr>
+          <p:cNvSpPr>
+            <a:spLocks noGrp="1"/>
+          </p:cNvSpPr>
+          <p:nvPr>
+            <p:ph type="sldNum" sz="quarter" idx="12"/>
+          </p:nvPr>
+        </p:nvSpPr>
+        <p:spPr/>
+        <p:txBody>
+          <a:bodyPr/>
+          <a:lstStyle/>
+          <a:p>
+            <a:fld id="{81E2607C-147D-4640-84F6-205905AA5ABA}" type="slidenum">
+              <a:rPr lang="en-US" smtClean="0"/>
+              <a:t>‹#›</a:t>
+            </a:fld>
+            <a:endParaRPr lang="en-US"/>
+          </a:p>
+        </p:txBody>
+      </p:sp>
+    </p:spTree>
+    <p:extLst>
+      <p:ext uri="{BB962C8B-B14F-4D97-AF65-F5344CB8AC3E}">
+        <p14:creationId xmlns:p14="http://schemas.microsoft.com/office/powerpoint/2010/main" val="1966798609"/>
+      </p:ext>
+    </p:extLst>
+  </p:cSld>
+  <p:clrMapOvr>
+    <a:masterClrMapping/>
+  </p:clrMapOvr>
+  <p:hf sldNum="0" hdr="0" ftr="0" dt="0"/>
+</p:sldLayout>
+</file>
+
+<file path=ppt/slideLayouts/slideLayout9.xml><?xml version="1.0" encoding="utf-8"?>
+<p:sldLayout xmlns:a="http://schemas.openxmlformats.org/drawingml/2006/main" xmlns:r="http://schemas.openxmlformats.org/officeDocument/2006/relationships" xmlns:p="http://schemas.openxmlformats.org/presentationml/2006/main" type="picTx" preserve="1">
+  <p:cSld name="Picture with Caption">
+    <p:spTree>
+      <p:nvGrpSpPr>
+        <p:cNvPr id="1" name=""/>
+        <p:cNvGrpSpPr/>
+        <p:nvPr/>
+      </p:nvGrpSpPr>
+      <p:grpSpPr>
+        <a:xfrm>
+          <a:off x="0" y="0"/>
+          <a:ext cx="0" cy="0"/>
+          <a:chOff x="0" y="0"/>
+          <a:chExt cx="0" cy="0"/>
+        </a:xfrm>
+      </p:grpSpPr>
+      <p:sp>
+        <p:nvSpPr>
+          <p:cNvPr id="2" name="Title 1">
+            <a:extLst>
+              <a:ext uri="{FF2B5EF4-FFF2-40B4-BE49-F238E27FC236}">
+                <a16:creationId xmlns:a16="http://schemas.microsoft.com/office/drawing/2014/main" id="{458FA483-A9D7-21A6-7375-9785AE1C55BF}"/>
+              </a:ext>
+            </a:extLst>
+          </p:cNvPr>
+          <p:cNvSpPr>
+            <a:spLocks noGrp="1"/>
+          </p:cNvSpPr>
+          <p:nvPr>
+            <p:ph type="title"/>
+          </p:nvPr>
+        </p:nvSpPr>
+        <p:spPr>
+          <a:xfrm>
+            <a:off x="839788" y="457200"/>
+            <a:ext cx="3932237" cy="1600200"/>
+          </a:xfrm>
+        </p:spPr>
+        <p:txBody>
+          <a:bodyPr anchor="b"/>
+          <a:lstStyle>
+            <a:lvl1pPr>
+              <a:defRPr sz="3200"/>
+            </a:lvl1pPr>
+          </a:lstStyle>
+          <a:p>
+            <a:r>
+              <a:rPr lang="en-US"/>
+              <a:t>Click to edit Master title style</a:t>
+            </a:r>
+          </a:p>
+        </p:txBody>
+      </p:sp>
+      <p:sp>
+        <p:nvSpPr>
+          <p:cNvPr id="3" name="Picture Placeholder 2">
+            <a:extLst>
+              <a:ext uri="{FF2B5EF4-FFF2-40B4-BE49-F238E27FC236}">
+                <a16:creationId xmlns:a16="http://schemas.microsoft.com/office/drawing/2014/main" id="{E6F1030F-B830-73C0-54D5-850B4EBA7322}"/>
+              </a:ext>
+            </a:extLst>
+          </p:cNvPr>
+          <p:cNvSpPr>
+            <a:spLocks noGrp="1" noChangeAspect="1"/>
+          </p:cNvSpPr>
+          <p:nvPr>
+            <p:ph type="pic" idx="1"/>
+          </p:nvPr>
+        </p:nvSpPr>
+        <p:spPr>
+          <a:xfrm>
+            <a:off x="5183188" y="987425"/>
+            <a:ext cx="6172200" cy="4873625"/>
+          </a:xfrm>
+        </p:spPr>
+        <p:txBody>
+          <a:bodyPr/>
+          <a:lstStyle>
+            <a:lvl1pPr marL="0" indent="0">
+              <a:buNone/>
+              <a:defRPr sz="3200"/>
+            </a:lvl1pPr>
+            <a:lvl2pPr marL="457200" indent="0">
+              <a:buNone/>
+              <a:defRPr sz="2800"/>
+            </a:lvl2pPr>
+            <a:lvl3pPr marL="914400" indent="0">
+              <a:buNone/>
+              <a:defRPr sz="2400"/>
+            </a:lvl3pPr>
+            <a:lvl4pPr marL="1371600" indent="0">
+              <a:buNone/>
+              <a:defRPr sz="2000"/>
+            </a:lvl4pPr>
+            <a:lvl5pPr marL="1828800" indent="0">
+              <a:buNone/>
+              <a:defRPr sz="2000"/>
+            </a:lvl5pPr>
+            <a:lvl6pPr marL="2286000" indent="0">
+              <a:buNone/>
+              <a:defRPr sz="2000"/>
+            </a:lvl6pPr>
+            <a:lvl7pPr marL="2743200" indent="0">
+              <a:buNone/>
+              <a:defRPr sz="2000"/>
+            </a:lvl7pPr>
+            <a:lvl8pPr marL="3200400" indent="0">
+              <a:buNone/>
+              <a:defRPr sz="2000"/>
+            </a:lvl8pPr>
+            <a:lvl9pPr marL="3657600" indent="0">
+              <a:buNone/>
+              <a:defRPr sz="2000"/>
+            </a:lvl9pPr>
+          </a:lstStyle>
+          <a:p>
+            <a:endParaRPr lang="en-US"/>
+          </a:p>
+        </p:txBody>
+      </p:sp>
+      <p:sp>
+        <p:nvSpPr>
+          <p:cNvPr id="4" name="Text Placeholder 3">
+            <a:extLst>
+              <a:ext uri="{FF2B5EF4-FFF2-40B4-BE49-F238E27FC236}">
+                <a16:creationId xmlns:a16="http://schemas.microsoft.com/office/drawing/2014/main" id="{2F781975-419C-741C-967E-06B2A0BFBA77}"/>
+              </a:ext>
+            </a:extLst>
+          </p:cNvPr>
+          <p:cNvSpPr>
+            <a:spLocks noGrp="1"/>
+          </p:cNvSpPr>
+          <p:nvPr>
+            <p:ph type="body" sz="half" idx="2"/>
+          </p:nvPr>
+        </p:nvSpPr>
+        <p:spPr>
+          <a:xfrm>
+            <a:off x="839788" y="2057400"/>
+            <a:ext cx="3932237" cy="3811588"/>
+          </a:xfrm>
+        </p:spPr>
+        <p:txBody>
+          <a:bodyPr/>
+          <a:lstStyle>
+            <a:lvl1pPr marL="0" indent="0">
+              <a:buNone/>
+              <a:defRPr sz="1600"/>
+            </a:lvl1pPr>
+            <a:lvl2pPr marL="457200" indent="0">
+              <a:buNone/>
+              <a:defRPr sz="1400"/>
+            </a:lvl2pPr>
+            <a:lvl3pPr marL="914400" indent="0">
+              <a:buNone/>
+              <a:defRPr sz="1200"/>
+            </a:lvl3pPr>
+            <a:lvl4pPr marL="1371600" indent="0">
+              <a:buNone/>
+              <a:defRPr sz="1000"/>
+            </a:lvl4pPr>
+            <a:lvl5pPr marL="1828800" indent="0">
+              <a:buNone/>
+              <a:defRPr sz="1000"/>
+            </a:lvl5pPr>
+            <a:lvl6pPr marL="2286000" indent="0">
+              <a:buNone/>
+              <a:defRPr sz="1000"/>
+            </a:lvl6pPr>
+            <a:lvl7pPr marL="2743200" indent="0">
+              <a:buNone/>
+              <a:defRPr sz="1000"/>
+            </a:lvl7pPr>
+            <a:lvl8pPr marL="3200400" indent="0">
+              <a:buNone/>
+              <a:defRPr sz="1000"/>
+            </a:lvl8pPr>
+            <a:lvl9pPr marL="3657600" indent="0">
+              <a:buNone/>
+              <a:defRPr sz="1000"/>
+            </a:lvl9pPr>
+          </a:lstStyle>
+          <a:p>
+            <a:pPr lvl="0"/>
+            <a:r>
+              <a:rPr lang="en-US"/>
+              <a:t>Click to edit Master text styles</a:t>
+            </a:r>
+          </a:p>
+        </p:txBody>
+      </p:sp>
+      <p:sp>
+        <p:nvSpPr>
+          <p:cNvPr id="5" name="Date Placeholder 4">
+            <a:extLst>
+              <a:ext uri="{FF2B5EF4-FFF2-40B4-BE49-F238E27FC236}">
+                <a16:creationId xmlns:a16="http://schemas.microsoft.com/office/drawing/2014/main" id="{B565253F-6250-6559-57CE-A3BFDDDB3A17}"/>
+              </a:ext>
+            </a:extLst>
+          </p:cNvPr>
+          <p:cNvSpPr>
+            <a:spLocks noGrp="1"/>
+          </p:cNvSpPr>
+          <p:nvPr>
+            <p:ph type="dt" sz="half" idx="10"/>
+          </p:nvPr>
+        </p:nvSpPr>
+        <p:spPr/>
+        <p:txBody>
+          <a:bodyPr/>
+          <a:lstStyle/>
+          <a:p>
+            <a:fld id="{4F1764C8-6DEA-4559-B38B-7F974AB06E3C}" type="datetimeFigureOut">
+              <a:rPr lang="en-US" smtClean="0"/>
+              <a:t>10/3/2026</a:t>
+            </a:fld>
+            <a:endParaRPr lang="en-US"/>
+          </a:p>
+        </p:txBody>
+      </p:sp>
+      <p:sp>
+        <p:nvSpPr>
+          <p:cNvPr id="6" name="Footer Placeholder 5">
+            <a:extLst>
+              <a:ext uri="{FF2B5EF4-FFF2-40B4-BE49-F238E27FC236}">
+                <a16:creationId xmlns:a16="http://schemas.microsoft.com/office/drawing/2014/main" id="{C5686CF0-49B9-094A-A1EE-3A9E1F009BB0}"/>
+              </a:ext>
+            </a:extLst>
+          </p:cNvPr>
+          <p:cNvSpPr>
+            <a:spLocks noGrp="1"/>
+          </p:cNvSpPr>
+          <p:nvPr>
+            <p:ph type="ftr" sz="quarter" idx="11"/>
+          </p:nvPr>
+        </p:nvSpPr>
+        <p:spPr/>
+        <p:txBody>
+          <a:bodyPr/>
+          <a:lstStyle/>
+          <a:p>
+            <a:endParaRPr lang="en-US"/>
+          </a:p>
+        </p:txBody>
+      </p:sp>
+      <p:sp>
+        <p:nvSpPr>
+          <p:cNvPr id="7" name="Slide Number Placeholder 6">
+            <a:extLst>
+              <a:ext uri="{FF2B5EF4-FFF2-40B4-BE49-F238E27FC236}">
+                <a16:creationId xmlns:a16="http://schemas.microsoft.com/office/drawing/2014/main" id="{648865D3-80E6-A163-6E77-6C2744F1FC12}"/>
+              </a:ext>
+            </a:extLst>
+          </p:cNvPr>
+          <p:cNvSpPr>
+            <a:spLocks noGrp="1"/>
+          </p:cNvSpPr>
+          <p:nvPr>
+            <p:ph type="sldNum" sz="quarter" idx="12"/>
+          </p:nvPr>
+        </p:nvSpPr>
+        <p:spPr/>
+        <p:txBody>
+          <a:bodyPr/>
+          <a:lstStyle/>
+          <a:p>
+            <a:fld id="{81E2607C-147D-4640-84F6-205905AA5ABA}" type="slidenum">
+              <a:rPr lang="en-US" smtClean="0"/>
+              <a:t>‹#›</a:t>
+            </a:fld>
+            <a:endParaRPr lang="en-US"/>
+          </a:p>
+        </p:txBody>
+      </p:sp>
+    </p:spTree>
+    <p:extLst>
+      <p:ext uri="{BB962C8B-B14F-4D97-AF65-F5344CB8AC3E}">
+        <p14:creationId xmlns:p14="http://schemas.microsoft.com/office/powerpoint/2010/main" val="3458711304"/>
+      </p:ext>
+    </p:extLst>
+  </p:cSld>
+  <p:clrMapOvr>
+    <a:masterClrMapping/>
+  </p:clrMapOvr>
+  <p:hf sldNum="0" hdr="0" ftr="0" dt="0"/>
 </p:sldLayout>
 </file>
 
@@ -2168,16 +4816,277 @@
           <a:chExt cx="0" cy="0"/>
         </a:xfrm>
       </p:grpSpPr>
+      <p:sp>
+        <p:nvSpPr>
+          <p:cNvPr id="2" name="Title Placeholder 1">
+            <a:extLst>
+              <a:ext uri="{FF2B5EF4-FFF2-40B4-BE49-F238E27FC236}">
+                <a16:creationId xmlns:a16="http://schemas.microsoft.com/office/drawing/2014/main" id="{C7654C6E-BBA3-D1B1-FE22-625FD4051B1F}"/>
+              </a:ext>
+            </a:extLst>
+          </p:cNvPr>
+          <p:cNvSpPr>
+            <a:spLocks noGrp="1"/>
+          </p:cNvSpPr>
+          <p:nvPr>
+            <p:ph type="title"/>
+          </p:nvPr>
+        </p:nvSpPr>
+        <p:spPr>
+          <a:xfrm>
+            <a:off x="838200" y="365125"/>
+            <a:ext cx="10515600" cy="1325563"/>
+          </a:xfrm>
+          <a:prstGeom prst="rect">
+            <a:avLst/>
+          </a:prstGeom>
+        </p:spPr>
+        <p:txBody>
+          <a:bodyPr vert="horz" lIns="91440" tIns="45720" rIns="91440" bIns="45720" rtlCol="0" anchor="ctr">
+            <a:normAutofit/>
+          </a:bodyPr>
+          <a:lstStyle/>
+          <a:p>
+            <a:r>
+              <a:rPr lang="en-US"/>
+              <a:t>Click to edit Master title style</a:t>
+            </a:r>
+          </a:p>
+        </p:txBody>
+      </p:sp>
+      <p:sp>
+        <p:nvSpPr>
+          <p:cNvPr id="3" name="Text Placeholder 2">
+            <a:extLst>
+              <a:ext uri="{FF2B5EF4-FFF2-40B4-BE49-F238E27FC236}">
+                <a16:creationId xmlns:a16="http://schemas.microsoft.com/office/drawing/2014/main" id="{E1AAE991-D6B9-8F90-0FCB-5FA90E4CE094}"/>
+              </a:ext>
+            </a:extLst>
+          </p:cNvPr>
+          <p:cNvSpPr>
+            <a:spLocks noGrp="1"/>
+          </p:cNvSpPr>
+          <p:nvPr>
+            <p:ph type="body" idx="1"/>
+          </p:nvPr>
+        </p:nvSpPr>
+        <p:spPr>
+          <a:xfrm>
+            <a:off x="838200" y="1825625"/>
+            <a:ext cx="10515600" cy="4351338"/>
+          </a:xfrm>
+          <a:prstGeom prst="rect">
+            <a:avLst/>
+          </a:prstGeom>
+        </p:spPr>
+        <p:txBody>
+          <a:bodyPr vert="horz" lIns="91440" tIns="45720" rIns="91440" bIns="45720" rtlCol="0">
+            <a:normAutofit/>
+          </a:bodyPr>
+          <a:lstStyle/>
+          <a:p>
+            <a:pPr lvl="0"/>
+            <a:r>
+              <a:rPr lang="en-US"/>
+              <a:t>Click to edit Master text styles</a:t>
+            </a:r>
+          </a:p>
+          <a:p>
+            <a:pPr lvl="1"/>
+            <a:r>
+              <a:rPr lang="en-US"/>
+              <a:t>Second level</a:t>
+            </a:r>
+          </a:p>
+          <a:p>
+            <a:pPr lvl="2"/>
+            <a:r>
+              <a:rPr lang="en-US"/>
+              <a:t>Third level</a:t>
+            </a:r>
+          </a:p>
+          <a:p>
+            <a:pPr lvl="3"/>
+            <a:r>
+              <a:rPr lang="en-US"/>
+              <a:t>Fourth level</a:t>
+            </a:r>
+          </a:p>
+          <a:p>
+            <a:pPr lvl="4"/>
+            <a:r>
+              <a:rPr lang="en-US"/>
+              <a:t>Fifth level</a:t>
+            </a:r>
+          </a:p>
+        </p:txBody>
+      </p:sp>
+      <p:sp>
+        <p:nvSpPr>
+          <p:cNvPr id="4" name="Date Placeholder 3">
+            <a:extLst>
+              <a:ext uri="{FF2B5EF4-FFF2-40B4-BE49-F238E27FC236}">
+                <a16:creationId xmlns:a16="http://schemas.microsoft.com/office/drawing/2014/main" id="{DC45D8A1-B26C-2CA4-72FF-49556A68454B}"/>
+              </a:ext>
+            </a:extLst>
+          </p:cNvPr>
+          <p:cNvSpPr>
+            <a:spLocks noGrp="1"/>
+          </p:cNvSpPr>
+          <p:nvPr>
+            <p:ph type="dt" sz="half" idx="2"/>
+          </p:nvPr>
+        </p:nvSpPr>
+        <p:spPr>
+          <a:xfrm>
+            <a:off x="838200" y="6356350"/>
+            <a:ext cx="2743200" cy="365125"/>
+          </a:xfrm>
+          <a:prstGeom prst="rect">
+            <a:avLst/>
+          </a:prstGeom>
+        </p:spPr>
+        <p:txBody>
+          <a:bodyPr vert="horz" lIns="91440" tIns="45720" rIns="91440" bIns="45720" rtlCol="0" anchor="ctr"/>
+          <a:lstStyle>
+            <a:lvl1pPr algn="l">
+              <a:defRPr sz="1200">
+                <a:solidFill>
+                  <a:schemeClr val="tx1">
+                    <a:tint val="82000"/>
+                  </a:schemeClr>
+                </a:solidFill>
+              </a:defRPr>
+            </a:lvl1pPr>
+          </a:lstStyle>
+          <a:p>
+            <a:fld id="{4F1764C8-6DEA-4559-B38B-7F974AB06E3C}" type="datetimeFigureOut">
+              <a:rPr lang="en-US" smtClean="0"/>
+              <a:t>10/3/2026</a:t>
+            </a:fld>
+            <a:endParaRPr lang="en-US"/>
+          </a:p>
+        </p:txBody>
+      </p:sp>
+      <p:sp>
+        <p:nvSpPr>
+          <p:cNvPr id="5" name="Footer Placeholder 4">
+            <a:extLst>
+              <a:ext uri="{FF2B5EF4-FFF2-40B4-BE49-F238E27FC236}">
+                <a16:creationId xmlns:a16="http://schemas.microsoft.com/office/drawing/2014/main" id="{041C6255-3A74-3DF9-E5BA-DC57C154612A}"/>
+              </a:ext>
+            </a:extLst>
+          </p:cNvPr>
+          <p:cNvSpPr>
+            <a:spLocks noGrp="1"/>
+          </p:cNvSpPr>
+          <p:nvPr>
+            <p:ph type="ftr" sz="quarter" idx="3"/>
+          </p:nvPr>
+        </p:nvSpPr>
+        <p:spPr>
+          <a:xfrm>
+            <a:off x="4038600" y="6356350"/>
+            <a:ext cx="4114800" cy="365125"/>
+          </a:xfrm>
+          <a:prstGeom prst="rect">
+            <a:avLst/>
+          </a:prstGeom>
+        </p:spPr>
+        <p:txBody>
+          <a:bodyPr vert="horz" lIns="91440" tIns="45720" rIns="91440" bIns="45720" rtlCol="0" anchor="ctr"/>
+          <a:lstStyle>
+            <a:lvl1pPr algn="ctr">
+              <a:defRPr sz="1200">
+                <a:solidFill>
+                  <a:schemeClr val="tx1">
+                    <a:tint val="82000"/>
+                  </a:schemeClr>
+                </a:solidFill>
+              </a:defRPr>
+            </a:lvl1pPr>
+          </a:lstStyle>
+          <a:p>
+            <a:endParaRPr lang="en-US"/>
+          </a:p>
+        </p:txBody>
+      </p:sp>
+      <p:sp>
+        <p:nvSpPr>
+          <p:cNvPr id="6" name="Slide Number Placeholder 5">
+            <a:extLst>
+              <a:ext uri="{FF2B5EF4-FFF2-40B4-BE49-F238E27FC236}">
+                <a16:creationId xmlns:a16="http://schemas.microsoft.com/office/drawing/2014/main" id="{AE001738-7156-8FD9-D837-EE2C3B2879BD}"/>
+              </a:ext>
+            </a:extLst>
+          </p:cNvPr>
+          <p:cNvSpPr>
+            <a:spLocks noGrp="1"/>
+          </p:cNvSpPr>
+          <p:nvPr>
+            <p:ph type="sldNum" sz="quarter" idx="4"/>
+          </p:nvPr>
+        </p:nvSpPr>
+        <p:spPr>
+          <a:xfrm>
+            <a:off x="8610600" y="6356350"/>
+            <a:ext cx="2743200" cy="365125"/>
+          </a:xfrm>
+          <a:prstGeom prst="rect">
+            <a:avLst/>
+          </a:prstGeom>
+        </p:spPr>
+        <p:txBody>
+          <a:bodyPr vert="horz" lIns="91440" tIns="45720" rIns="91440" bIns="45720" rtlCol="0" anchor="ctr"/>
+          <a:lstStyle>
+            <a:lvl1pPr algn="r">
+              <a:defRPr sz="1200">
+                <a:solidFill>
+                  <a:schemeClr val="tx1">
+                    <a:tint val="82000"/>
+                  </a:schemeClr>
+                </a:solidFill>
+              </a:defRPr>
+            </a:lvl1pPr>
+          </a:lstStyle>
+          <a:p>
+            <a:fld id="{81E2607C-147D-4640-84F6-205905AA5ABA}" type="slidenum">
+              <a:rPr lang="en-US" smtClean="0"/>
+              <a:t>‹#›</a:t>
+            </a:fld>
+            <a:endParaRPr lang="en-US"/>
+          </a:p>
+        </p:txBody>
+      </p:sp>
     </p:spTree>
+    <p:extLst>
+      <p:ext uri="{BB962C8B-B14F-4D97-AF65-F5344CB8AC3E}">
+        <p14:creationId xmlns:p14="http://schemas.microsoft.com/office/powerpoint/2010/main" val="2362631904"/>
+      </p:ext>
+    </p:extLst>
   </p:cSld>
   <p:clrMap bg1="lt1" tx1="dk1" bg2="lt2" tx2="dk2" accent1="accent1" accent2="accent2" accent3="accent3" accent4="accent4" accent5="accent5" accent6="accent6" hlink="hlink" folHlink="folHlink"/>
   <p:sldLayoutIdLst>
-    <p:sldLayoutId id="2147483649" r:id="rId1"/>
+    <p:sldLayoutId id="2147483651" r:id="rId1"/>
+    <p:sldLayoutId id="2147483652" r:id="rId2"/>
+    <p:sldLayoutId id="2147483653" r:id="rId3"/>
+    <p:sldLayoutId id="2147483654" r:id="rId4"/>
+    <p:sldLayoutId id="2147483655" r:id="rId5"/>
+    <p:sldLayoutId id="2147483656" r:id="rId6"/>
+    <p:sldLayoutId id="2147483657" r:id="rId7"/>
+    <p:sldLayoutId id="2147483658" r:id="rId8"/>
+    <p:sldLayoutId id="2147483659" r:id="rId9"/>
+    <p:sldLayoutId id="2147483660" r:id="rId10"/>
+    <p:sldLayoutId id="2147483661" r:id="rId11"/>
+    <p:sldLayoutId id="2147483662" r:id="rId12"/>
   </p:sldLayoutIdLst>
   <p:hf sldNum="0" hdr="0" ftr="0" dt="0"/>
   <p:txStyles>
     <p:titleStyle>
-      <a:lvl1pPr algn="ctr" defTabSz="914400" rtl="0" eaLnBrk="1" latinLnBrk="0" hangingPunct="1">
+      <a:lvl1pPr algn="l" defTabSz="914400" rtl="0" eaLnBrk="1" latinLnBrk="0" hangingPunct="1">
+        <a:lnSpc>
+          <a:spcPct val="90000"/>
+        </a:lnSpc>
         <a:spcBef>
           <a:spcPct val="0"/>
         </a:spcBef>
@@ -2193,13 +5102,16 @@
       </a:lvl1pPr>
     </p:titleStyle>
     <p:bodyStyle>
-      <a:lvl1pPr marL="342900" indent="-342900" algn="l" defTabSz="914400" rtl="0" eaLnBrk="1" latinLnBrk="0" hangingPunct="1">
+      <a:lvl1pPr marL="228600" indent="-228600" algn="l" defTabSz="914400" rtl="0" eaLnBrk="1" latinLnBrk="0" hangingPunct="1">
+        <a:lnSpc>
+          <a:spcPct val="90000"/>
+        </a:lnSpc>
         <a:spcBef>
-          <a:spcPct val="20000"/>
+          <a:spcPts val="1000"/>
         </a:spcBef>
-        <a:buFont typeface="Arial" pitchFamily="34" charset="0"/>
+        <a:buFont typeface="Arial" panose="020B0604020202020204" pitchFamily="34" charset="0"/>
         <a:buChar char="•"/>
-        <a:defRPr sz="3200" kern="1200">
+        <a:defRPr sz="2800" kern="1200">
           <a:solidFill>
             <a:schemeClr val="tx1"/>
           </a:solidFill>
@@ -2208,13 +5120,16 @@
           <a:cs typeface="+mn-cs"/>
         </a:defRPr>
       </a:lvl1pPr>
-      <a:lvl2pPr marL="742950" indent="-285750" algn="l" defTabSz="914400" rtl="0" eaLnBrk="1" latinLnBrk="0" hangingPunct="1">
+      <a:lvl2pPr marL="685800" indent="-228600" algn="l" defTabSz="914400" rtl="0" eaLnBrk="1" latinLnBrk="0" hangingPunct="1">
+        <a:lnSpc>
+          <a:spcPct val="90000"/>
+        </a:lnSpc>
         <a:spcBef>
-          <a:spcPct val="20000"/>
+          <a:spcPts val="500"/>
         </a:spcBef>
-        <a:buFont typeface="Arial" pitchFamily="34" charset="0"/>
-        <a:buChar char="–"/>
-        <a:defRPr sz="2800" kern="1200">
+        <a:buFont typeface="Arial" panose="020B0604020202020204" pitchFamily="34" charset="0"/>
+        <a:buChar char="•"/>
+        <a:defRPr sz="2400" kern="1200">
           <a:solidFill>
             <a:schemeClr val="tx1"/>
           </a:solidFill>
@@ -2224,12 +5139,15 @@
         </a:defRPr>
       </a:lvl2pPr>
       <a:lvl3pPr marL="1143000" indent="-228600" algn="l" defTabSz="914400" rtl="0" eaLnBrk="1" latinLnBrk="0" hangingPunct="1">
+        <a:lnSpc>
+          <a:spcPct val="90000"/>
+        </a:lnSpc>
         <a:spcBef>
-          <a:spcPct val="20000"/>
+          <a:spcPts val="500"/>
         </a:spcBef>
-        <a:buFont typeface="Arial" pitchFamily="34" charset="0"/>
+        <a:buFont typeface="Arial" panose="020B0604020202020204" pitchFamily="34" charset="0"/>
         <a:buChar char="•"/>
-        <a:defRPr sz="2400" kern="1200">
+        <a:defRPr sz="2000" kern="1200">
           <a:solidFill>
             <a:schemeClr val="tx1"/>
           </a:solidFill>
@@ -2239,12 +5157,15 @@
         </a:defRPr>
       </a:lvl3pPr>
       <a:lvl4pPr marL="1600200" indent="-228600" algn="l" defTabSz="914400" rtl="0" eaLnBrk="1" latinLnBrk="0" hangingPunct="1">
+        <a:lnSpc>
+          <a:spcPct val="90000"/>
+        </a:lnSpc>
         <a:spcBef>
-          <a:spcPct val="20000"/>
+          <a:spcPts val="500"/>
         </a:spcBef>
-        <a:buFont typeface="Arial" pitchFamily="34" charset="0"/>
-        <a:buChar char="–"/>
-        <a:defRPr sz="2000" kern="1200">
+        <a:buFont typeface="Arial" panose="020B0604020202020204" pitchFamily="34" charset="0"/>
+        <a:buChar char="•"/>
+        <a:defRPr sz="1800" kern="1200">
           <a:solidFill>
             <a:schemeClr val="tx1"/>
           </a:solidFill>
@@ -2254,12 +5175,15 @@
         </a:defRPr>
       </a:lvl4pPr>
       <a:lvl5pPr marL="2057400" indent="-228600" algn="l" defTabSz="914400" rtl="0" eaLnBrk="1" latinLnBrk="0" hangingPunct="1">
+        <a:lnSpc>
+          <a:spcPct val="90000"/>
+        </a:lnSpc>
         <a:spcBef>
-          <a:spcPct val="20000"/>
+          <a:spcPts val="500"/>
         </a:spcBef>
-        <a:buFont typeface="Arial" pitchFamily="34" charset="0"/>
-        <a:buChar char="»"/>
-        <a:defRPr sz="2000" kern="1200">
+        <a:buFont typeface="Arial" panose="020B0604020202020204" pitchFamily="34" charset="0"/>
+        <a:buChar char="•"/>
+        <a:defRPr sz="1800" kern="1200">
           <a:solidFill>
             <a:schemeClr val="tx1"/>
           </a:solidFill>
@@ -2269,12 +5193,15 @@
         </a:defRPr>
       </a:lvl5pPr>
       <a:lvl6pPr marL="2514600" indent="-228600" algn="l" defTabSz="914400" rtl="0" eaLnBrk="1" latinLnBrk="0" hangingPunct="1">
+        <a:lnSpc>
+          <a:spcPct val="90000"/>
+        </a:lnSpc>
         <a:spcBef>
-          <a:spcPct val="20000"/>
+          <a:spcPts val="500"/>
         </a:spcBef>
-        <a:buFont typeface="Arial" pitchFamily="34" charset="0"/>
+        <a:buFont typeface="Arial" panose="020B0604020202020204" pitchFamily="34" charset="0"/>
         <a:buChar char="•"/>
-        <a:defRPr sz="2000" kern="1200">
+        <a:defRPr sz="1800" kern="1200">
           <a:solidFill>
             <a:schemeClr val="tx1"/>
           </a:solidFill>
@@ -2284,12 +5211,15 @@
         </a:defRPr>
       </a:lvl6pPr>
       <a:lvl7pPr marL="2971800" indent="-228600" algn="l" defTabSz="914400" rtl="0" eaLnBrk="1" latinLnBrk="0" hangingPunct="1">
+        <a:lnSpc>
+          <a:spcPct val="90000"/>
+        </a:lnSpc>
         <a:spcBef>
-          <a:spcPct val="20000"/>
+          <a:spcPts val="500"/>
         </a:spcBef>
-        <a:buFont typeface="Arial" pitchFamily="34" charset="0"/>
+        <a:buFont typeface="Arial" panose="020B0604020202020204" pitchFamily="34" charset="0"/>
         <a:buChar char="•"/>
-        <a:defRPr sz="2000" kern="1200">
+        <a:defRPr sz="1800" kern="1200">
           <a:solidFill>
             <a:schemeClr val="tx1"/>
           </a:solidFill>
@@ -2299,12 +5229,15 @@
         </a:defRPr>
       </a:lvl7pPr>
       <a:lvl8pPr marL="3429000" indent="-228600" algn="l" defTabSz="914400" rtl="0" eaLnBrk="1" latinLnBrk="0" hangingPunct="1">
+        <a:lnSpc>
+          <a:spcPct val="90000"/>
+        </a:lnSpc>
         <a:spcBef>
-          <a:spcPct val="20000"/>
+          <a:spcPts val="500"/>
         </a:spcBef>
-        <a:buFont typeface="Arial" pitchFamily="34" charset="0"/>
+        <a:buFont typeface="Arial" panose="020B0604020202020204" pitchFamily="34" charset="0"/>
         <a:buChar char="•"/>
-        <a:defRPr sz="2000" kern="1200">
+        <a:defRPr sz="1800" kern="1200">
           <a:solidFill>
             <a:schemeClr val="tx1"/>
           </a:solidFill>
@@ -2314,12 +5247,15 @@
         </a:defRPr>
       </a:lvl8pPr>
       <a:lvl9pPr marL="3886200" indent="-228600" algn="l" defTabSz="914400" rtl="0" eaLnBrk="1" latinLnBrk="0" hangingPunct="1">
+        <a:lnSpc>
+          <a:spcPct val="90000"/>
+        </a:lnSpc>
         <a:spcBef>
-          <a:spcPct val="20000"/>
+          <a:spcPts val="500"/>
         </a:spcBef>
-        <a:buFont typeface="Arial" pitchFamily="34" charset="0"/>
+        <a:buFont typeface="Arial" panose="020B0604020202020204" pitchFamily="34" charset="0"/>
         <a:buChar char="•"/>
-        <a:defRPr sz="2000" kern="1200">
+        <a:defRPr sz="1800" kern="1200">
           <a:solidFill>
             <a:schemeClr val="tx1"/>
           </a:solidFill>
@@ -2611,15 +5547,10 @@
               </a:rPr>
               <a:t>Systems Analysis</a:t>
             </a:r>
-            <a:endParaRPr lang="en-US" sz="4800" dirty="0"/>
-          </a:p>
-          <a:p>
-            <a:pPr marL="0" indent="0">
-              <a:lnSpc>
-                <a:spcPct val="105000"/>
-              </a:lnSpc>
-              <a:buNone/>
-            </a:pPr>
+            <a:r>
+              <a:rPr lang="en-US" sz="4800" dirty="0"/>
+              <a:t> </a:t>
+            </a:r>
             <a:r>
               <a:rPr lang="en-US" sz="4800" b="1" dirty="0">
                 <a:solidFill>
@@ -2811,7 +5742,7 @@
         </p:nvSpPr>
         <p:spPr>
           <a:xfrm>
-            <a:off x="548640" y="658368"/>
+            <a:off x="548640" y="522011"/>
             <a:ext cx="10972800" cy="640080"/>
           </a:xfrm>
           <a:prstGeom prst="rect">
@@ -2839,41 +5770,6 @@
               <a:t>A Continuum, Not a Phase</a:t>
             </a:r>
             <a:endParaRPr lang="en-US" sz="2800" dirty="0"/>
-          </a:p>
-        </p:txBody>
-      </p:sp>
-      <p:sp>
-        <p:nvSpPr>
-          <p:cNvPr id="28" name="Shape 26">
-            <a:extLst>
-              <a:ext uri="{FF2B5EF4-FFF2-40B4-BE49-F238E27FC236}">
-                <a16:creationId xmlns:a16="http://schemas.microsoft.com/office/drawing/2014/main" id="{9AA6C269-55C1-CFEE-F5B7-E31FEAD5DF77}"/>
-              </a:ext>
-            </a:extLst>
-          </p:cNvPr>
-          <p:cNvSpPr/>
-          <p:nvPr/>
-        </p:nvSpPr>
-        <p:spPr>
-          <a:xfrm>
-            <a:off x="822960" y="1298447"/>
-            <a:ext cx="10515600" cy="5041967"/>
-          </a:xfrm>
-          <a:prstGeom prst="roundRect">
-            <a:avLst>
-              <a:gd name="adj" fmla="val 9091"/>
-            </a:avLst>
-          </a:prstGeom>
-          <a:solidFill>
-            <a:srgbClr val="072B41"/>
-          </a:solidFill>
-          <a:ln/>
-        </p:spPr>
-        <p:txBody>
-          <a:bodyPr/>
-          <a:lstStyle/>
-          <a:p>
-            <a:endParaRPr lang="en-US"/>
           </a:p>
         </p:txBody>
       </p:sp>
@@ -2891,8 +5787,8 @@
         </p:nvSpPr>
         <p:spPr>
           <a:xfrm>
-            <a:off x="1051560" y="1591056"/>
-            <a:ext cx="9966960" cy="4608576"/>
+            <a:off x="414608" y="1347056"/>
+            <a:ext cx="11362784" cy="4855464"/>
           </a:xfrm>
           <a:prstGeom prst="rect">
             <a:avLst/>
@@ -2911,10 +5807,7 @@
               <a:buNone/>
             </a:pPr>
             <a:r>
-              <a:rPr lang="en-US" sz="1400" i="1" dirty="0">
-                <a:solidFill>
-                  <a:srgbClr val="CADCFC"/>
-                </a:solidFill>
+              <a:rPr lang="en-US" sz="1600" i="1" dirty="0">
                 <a:latin typeface="Calibri" pitchFamily="34" charset="0"/>
                 <a:ea typeface="Calibri" pitchFamily="34" charset="-122"/>
                 <a:cs typeface="Calibri" pitchFamily="34" charset="-120"/>
@@ -2931,10 +5824,7 @@
               <a:buChar char="•"/>
             </a:pPr>
             <a:r>
-              <a:rPr lang="en-US" sz="1400" i="1" dirty="0">
-                <a:solidFill>
-                  <a:srgbClr val="CADCFC"/>
-                </a:solidFill>
+              <a:rPr lang="en-US" sz="1600" i="1" dirty="0">
                 <a:latin typeface="Calibri" pitchFamily="34" charset="0"/>
                 <a:ea typeface="Calibri" pitchFamily="34" charset="-122"/>
                 <a:cs typeface="Calibri" pitchFamily="34" charset="-120"/>
@@ -2951,10 +5841,7 @@
               <a:buChar char="•"/>
             </a:pPr>
             <a:r>
-              <a:rPr lang="en-US" sz="1400" i="1" dirty="0">
-                <a:solidFill>
-                  <a:srgbClr val="CADCFC"/>
-                </a:solidFill>
+              <a:rPr lang="en-US" sz="1600" i="1" dirty="0">
                 <a:latin typeface="Calibri" pitchFamily="34" charset="0"/>
                 <a:ea typeface="Calibri" pitchFamily="34" charset="-122"/>
                 <a:cs typeface="Calibri" pitchFamily="34" charset="-120"/>
@@ -2971,10 +5858,7 @@
               <a:buChar char="•"/>
             </a:pPr>
             <a:r>
-              <a:rPr lang="en-US" sz="1400" i="1" dirty="0">
-                <a:solidFill>
-                  <a:srgbClr val="CADCFC"/>
-                </a:solidFill>
+              <a:rPr lang="en-US" sz="1600" i="1" dirty="0">
                 <a:latin typeface="Calibri" pitchFamily="34" charset="0"/>
                 <a:ea typeface="Calibri" pitchFamily="34" charset="-122"/>
                 <a:cs typeface="Calibri" pitchFamily="34" charset="-120"/>
@@ -2982,10 +5866,7 @@
               <a:t>Build — The code gets compiled and packaged automatically whenever it's pushed. This is where CI (continuous integration) tools like Jenkins, GitHub Actions, or </a:t>
             </a:r>
             <a:r>
-              <a:rPr lang="en-US" sz="1400" i="1" dirty="0" err="1">
-                <a:solidFill>
-                  <a:srgbClr val="CADCFC"/>
-                </a:solidFill>
+              <a:rPr lang="en-US" sz="1600" i="1" dirty="0" err="1">
                 <a:latin typeface="Calibri" pitchFamily="34" charset="0"/>
                 <a:ea typeface="Calibri" pitchFamily="34" charset="-122"/>
                 <a:cs typeface="Calibri" pitchFamily="34" charset="-120"/>
@@ -2993,10 +5874,7 @@
               <a:t>CircleCI</a:t>
             </a:r>
             <a:r>
-              <a:rPr lang="en-US" sz="1400" i="1" dirty="0">
-                <a:solidFill>
-                  <a:srgbClr val="CADCFC"/>
-                </a:solidFill>
+              <a:rPr lang="en-US" sz="1600" i="1" dirty="0">
                 <a:latin typeface="Calibri" pitchFamily="34" charset="0"/>
                 <a:ea typeface="Calibri" pitchFamily="34" charset="-122"/>
                 <a:cs typeface="Calibri" pitchFamily="34" charset="-120"/>
@@ -3013,10 +5891,7 @@
               <a:buChar char="•"/>
             </a:pPr>
             <a:r>
-              <a:rPr lang="en-US" sz="1400" i="1" dirty="0">
-                <a:solidFill>
-                  <a:srgbClr val="CADCFC"/>
-                </a:solidFill>
+              <a:rPr lang="en-US" sz="1600" i="1" dirty="0">
                 <a:latin typeface="Calibri" pitchFamily="34" charset="0"/>
                 <a:ea typeface="Calibri" pitchFamily="34" charset="-122"/>
                 <a:cs typeface="Calibri" pitchFamily="34" charset="-120"/>
@@ -3033,10 +5908,7 @@
               <a:buChar char="•"/>
             </a:pPr>
             <a:r>
-              <a:rPr lang="en-US" sz="1400" i="1" dirty="0">
-                <a:solidFill>
-                  <a:srgbClr val="CADCFC"/>
-                </a:solidFill>
+              <a:rPr lang="en-US" sz="1600" i="1" dirty="0">
                 <a:latin typeface="Calibri" pitchFamily="34" charset="0"/>
                 <a:ea typeface="Calibri" pitchFamily="34" charset="-122"/>
                 <a:cs typeface="Calibri" pitchFamily="34" charset="-120"/>
@@ -3053,10 +5925,7 @@
               <a:buChar char="•"/>
             </a:pPr>
             <a:r>
-              <a:rPr lang="en-US" sz="1400" i="1" dirty="0">
-                <a:solidFill>
-                  <a:srgbClr val="CADCFC"/>
-                </a:solidFill>
+              <a:rPr lang="en-US" sz="1600" i="1" dirty="0">
                 <a:latin typeface="Calibri" pitchFamily="34" charset="0"/>
                 <a:ea typeface="Calibri" pitchFamily="34" charset="-122"/>
                 <a:cs typeface="Calibri" pitchFamily="34" charset="-120"/>
@@ -3064,10 +5933,7 @@
               <a:t>Deploy — The release ships to production, often via automated pipelines using tools like </a:t>
             </a:r>
             <a:r>
-              <a:rPr lang="en-US" sz="1400" i="1" dirty="0" err="1">
-                <a:solidFill>
-                  <a:srgbClr val="CADCFC"/>
-                </a:solidFill>
+              <a:rPr lang="en-US" sz="1600" i="1" dirty="0" err="1">
                 <a:latin typeface="Calibri" pitchFamily="34" charset="0"/>
                 <a:ea typeface="Calibri" pitchFamily="34" charset="-122"/>
                 <a:cs typeface="Calibri" pitchFamily="34" charset="-120"/>
@@ -3075,10 +5941,7 @@
               <a:t>ArgoCD</a:t>
             </a:r>
             <a:r>
-              <a:rPr lang="en-US" sz="1400" i="1" dirty="0">
-                <a:solidFill>
-                  <a:srgbClr val="CADCFC"/>
-                </a:solidFill>
+              <a:rPr lang="en-US" sz="1600" i="1" dirty="0">
                 <a:latin typeface="Calibri" pitchFamily="34" charset="0"/>
                 <a:ea typeface="Calibri" pitchFamily="34" charset="-122"/>
                 <a:cs typeface="Calibri" pitchFamily="34" charset="-120"/>
@@ -3095,10 +5958,7 @@
               <a:buChar char="•"/>
             </a:pPr>
             <a:r>
-              <a:rPr lang="en-US" sz="1400" i="1" dirty="0">
-                <a:solidFill>
-                  <a:srgbClr val="CADCFC"/>
-                </a:solidFill>
+              <a:rPr lang="en-US" sz="1600" i="1" dirty="0">
                 <a:latin typeface="Calibri" pitchFamily="34" charset="0"/>
                 <a:ea typeface="Calibri" pitchFamily="34" charset="-122"/>
                 <a:cs typeface="Calibri" pitchFamily="34" charset="-120"/>
@@ -3115,10 +5975,7 @@
               <a:buChar char="•"/>
             </a:pPr>
             <a:r>
-              <a:rPr lang="en-US" sz="1400" i="1" dirty="0">
-                <a:solidFill>
-                  <a:srgbClr val="CADCFC"/>
-                </a:solidFill>
+              <a:rPr lang="en-US" sz="1600" i="1" dirty="0">
                 <a:latin typeface="Calibri" pitchFamily="34" charset="0"/>
                 <a:ea typeface="Calibri" pitchFamily="34" charset="-122"/>
                 <a:cs typeface="Calibri" pitchFamily="34" charset="-120"/>
@@ -3132,10 +5989,7 @@
                 <a:spcPct val="120000"/>
               </a:lnSpc>
             </a:pPr>
-            <a:endParaRPr lang="en-US" sz="1400" i="1" dirty="0">
-              <a:solidFill>
-                <a:srgbClr val="CADCFC"/>
-              </a:solidFill>
+            <a:endParaRPr lang="en-US" sz="1600" i="1" dirty="0">
               <a:latin typeface="Calibri" pitchFamily="34" charset="0"/>
               <a:ea typeface="Calibri" pitchFamily="34" charset="-122"/>
               <a:cs typeface="Calibri" pitchFamily="34" charset="-120"/>
@@ -3149,62 +6003,14 @@
               <a:buNone/>
             </a:pPr>
             <a:r>
-              <a:rPr lang="en-US" sz="1400" i="1" dirty="0">
-                <a:solidFill>
-                  <a:srgbClr val="CADCFC"/>
-                </a:solidFill>
+              <a:rPr lang="en-US" sz="1600" i="1" dirty="0">
                 <a:latin typeface="Calibri" pitchFamily="34" charset="0"/>
                 <a:ea typeface="Calibri" pitchFamily="34" charset="-122"/>
                 <a:cs typeface="Calibri" pitchFamily="34" charset="-120"/>
               </a:rPr>
               <a:t>The whole point of DevOps is collapsing the wall between "Dev" (the top half) and "Ops" (the bottom half) — instead of throwing code over a fence to operations, the same team owns it end-to-end, with automation gluing every handoff together. </a:t>
             </a:r>
-            <a:endParaRPr lang="en-US" sz="1400" dirty="0"/>
-          </a:p>
-        </p:txBody>
-      </p:sp>
-      <p:sp>
-        <p:nvSpPr>
-          <p:cNvPr id="30" name="Text 28">
-            <a:extLst>
-              <a:ext uri="{FF2B5EF4-FFF2-40B4-BE49-F238E27FC236}">
-                <a16:creationId xmlns:a16="http://schemas.microsoft.com/office/drawing/2014/main" id="{C38FC092-08A5-C861-9D18-85CDFA3F106D}"/>
-              </a:ext>
-            </a:extLst>
-          </p:cNvPr>
-          <p:cNvSpPr/>
-          <p:nvPr/>
-        </p:nvSpPr>
-        <p:spPr>
-          <a:xfrm>
-            <a:off x="457200" y="6446520"/>
-            <a:ext cx="6400800" cy="274320"/>
-          </a:xfrm>
-          <a:prstGeom prst="rect">
-            <a:avLst/>
-          </a:prstGeom>
-          <a:noFill/>
-          <a:ln/>
-        </p:spPr>
-        <p:txBody>
-          <a:bodyPr wrap="square" lIns="0" tIns="0" rIns="0" bIns="0" rtlCol="0" anchor="ctr"/>
-          <a:lstStyle/>
-          <a:p>
-            <a:pPr marL="0" indent="0" algn="l">
-              <a:buNone/>
-            </a:pPr>
-            <a:r>
-              <a:rPr lang="en-US" sz="1000" dirty="0">
-                <a:solidFill>
-                  <a:srgbClr val="8A9BA8"/>
-                </a:solidFill>
-                <a:latin typeface="Calibri" pitchFamily="34" charset="0"/>
-                <a:ea typeface="Calibri" pitchFamily="34" charset="-122"/>
-                <a:cs typeface="Calibri" pitchFamily="34" charset="-120"/>
-              </a:rPr>
-              <a:t>Systems Analysis &amp; Design  |  Week 1</a:t>
-            </a:r>
-            <a:endParaRPr lang="en-US" sz="1000" dirty="0"/>
+            <a:endParaRPr lang="en-US" sz="1600" dirty="0"/>
           </a:p>
         </p:txBody>
       </p:sp>
@@ -3394,7 +6200,7 @@
               <a:buNone/>
             </a:pPr>
             <a:r>
-              <a:rPr lang="en-US" sz="1350" i="1" dirty="0">
+              <a:rPr lang="en-US" i="1" dirty="0">
                 <a:solidFill>
                   <a:srgbClr val="596A78"/>
                 </a:solidFill>
@@ -3404,7 +6210,7 @@
               </a:rPr>
               <a:t>The CALMS framework captures what separates real DevOps adoption from "we bought a CI/CD tool."</a:t>
             </a:r>
-            <a:endParaRPr lang="en-US" sz="1350" dirty="0"/>
+            <a:endParaRPr lang="en-US" dirty="0"/>
           </a:p>
         </p:txBody>
       </p:sp>
@@ -3433,7 +6239,7 @@
           <a:bodyPr/>
           <a:lstStyle/>
           <a:p>
-            <a:endParaRPr lang="en-US"/>
+            <a:endParaRPr lang="en-US" sz="2800"/>
           </a:p>
         </p:txBody>
       </p:sp>
@@ -3460,7 +6266,7 @@
           <a:bodyPr/>
           <a:lstStyle/>
           <a:p>
-            <a:endParaRPr lang="en-US"/>
+            <a:endParaRPr lang="en-US" sz="2800"/>
           </a:p>
         </p:txBody>
       </p:sp>
@@ -3489,7 +6295,7 @@
               <a:buNone/>
             </a:pPr>
             <a:r>
-              <a:rPr lang="en-US" sz="2400" b="1" dirty="0">
+              <a:rPr lang="en-US" sz="3600" b="1" dirty="0">
                 <a:solidFill>
                   <a:srgbClr val="FFFFFF"/>
                 </a:solidFill>
@@ -3499,7 +6305,7 @@
               </a:rPr>
               <a:t>C</a:t>
             </a:r>
-            <a:endParaRPr lang="en-US" sz="2400" dirty="0"/>
+            <a:endParaRPr lang="en-US" sz="3600" dirty="0"/>
           </a:p>
         </p:txBody>
       </p:sp>
@@ -3528,7 +6334,7 @@
               <a:buNone/>
             </a:pPr>
             <a:r>
-              <a:rPr lang="en-US" sz="1400" b="1" dirty="0">
+              <a:rPr lang="en-US" sz="2000" b="1" dirty="0">
                 <a:solidFill>
                   <a:srgbClr val="072B41"/>
                 </a:solidFill>
@@ -3538,7 +6344,7 @@
               </a:rPr>
               <a:t>Culture</a:t>
             </a:r>
-            <a:endParaRPr lang="en-US" sz="1400" dirty="0"/>
+            <a:endParaRPr lang="en-US" sz="2000" dirty="0"/>
           </a:p>
         </p:txBody>
       </p:sp>
@@ -3570,7 +6376,7 @@
               <a:buNone/>
             </a:pPr>
             <a:r>
-              <a:rPr lang="en-US" sz="1050" dirty="0">
+              <a:rPr lang="en-US" sz="1400" dirty="0">
                 <a:solidFill>
                   <a:srgbClr val="596A78"/>
                 </a:solidFill>
@@ -3580,7 +6386,7 @@
               </a:rPr>
               <a:t>Shared ownership across dev &amp; ops; blameless postmortems, not silos</a:t>
             </a:r>
-            <a:endParaRPr lang="en-US" sz="1050" dirty="0"/>
+            <a:endParaRPr lang="en-US" sz="1400" dirty="0"/>
           </a:p>
         </p:txBody>
       </p:sp>
@@ -3609,7 +6415,7 @@
           <a:bodyPr/>
           <a:lstStyle/>
           <a:p>
-            <a:endParaRPr lang="en-US"/>
+            <a:endParaRPr lang="en-US" sz="2800"/>
           </a:p>
         </p:txBody>
       </p:sp>
@@ -3636,7 +6442,7 @@
           <a:bodyPr/>
           <a:lstStyle/>
           <a:p>
-            <a:endParaRPr lang="en-US"/>
+            <a:endParaRPr lang="en-US" sz="2800"/>
           </a:p>
         </p:txBody>
       </p:sp>
@@ -3665,7 +6471,7 @@
               <a:buNone/>
             </a:pPr>
             <a:r>
-              <a:rPr lang="en-US" sz="2400" b="1" dirty="0">
+              <a:rPr lang="en-US" sz="3600" b="1" dirty="0">
                 <a:solidFill>
                   <a:srgbClr val="FFFFFF"/>
                 </a:solidFill>
@@ -3675,7 +6481,7 @@
               </a:rPr>
               <a:t>A</a:t>
             </a:r>
-            <a:endParaRPr lang="en-US" sz="2400" dirty="0"/>
+            <a:endParaRPr lang="en-US" sz="3600" dirty="0"/>
           </a:p>
         </p:txBody>
       </p:sp>
@@ -3704,7 +6510,7 @@
               <a:buNone/>
             </a:pPr>
             <a:r>
-              <a:rPr lang="en-US" sz="1400" b="1" dirty="0">
+              <a:rPr lang="en-US" sz="2000" b="1" dirty="0">
                 <a:solidFill>
                   <a:srgbClr val="072B41"/>
                 </a:solidFill>
@@ -3714,7 +6520,7 @@
               </a:rPr>
               <a:t>Automation</a:t>
             </a:r>
-            <a:endParaRPr lang="en-US" sz="1400" dirty="0"/>
+            <a:endParaRPr lang="en-US" sz="2000" dirty="0"/>
           </a:p>
         </p:txBody>
       </p:sp>
@@ -3746,7 +6552,7 @@
               <a:buNone/>
             </a:pPr>
             <a:r>
-              <a:rPr lang="en-US" sz="1050" dirty="0">
+              <a:rPr lang="en-US" sz="1400" dirty="0">
                 <a:solidFill>
                   <a:srgbClr val="596A78"/>
                 </a:solidFill>
@@ -3756,7 +6562,7 @@
               </a:rPr>
               <a:t>Remove manual, error-prone steps from build, test, and release</a:t>
             </a:r>
-            <a:endParaRPr lang="en-US" sz="1050" dirty="0"/>
+            <a:endParaRPr lang="en-US" sz="1400" dirty="0"/>
           </a:p>
         </p:txBody>
       </p:sp>
@@ -3785,7 +6591,7 @@
           <a:bodyPr/>
           <a:lstStyle/>
           <a:p>
-            <a:endParaRPr lang="en-US"/>
+            <a:endParaRPr lang="en-US" sz="2800"/>
           </a:p>
         </p:txBody>
       </p:sp>
@@ -3812,7 +6618,7 @@
           <a:bodyPr/>
           <a:lstStyle/>
           <a:p>
-            <a:endParaRPr lang="en-US"/>
+            <a:endParaRPr lang="en-US" sz="2800"/>
           </a:p>
         </p:txBody>
       </p:sp>
@@ -3841,7 +6647,7 @@
               <a:buNone/>
             </a:pPr>
             <a:r>
-              <a:rPr lang="en-US" sz="2400" b="1" dirty="0">
+              <a:rPr lang="en-US" sz="3600" b="1" dirty="0">
                 <a:solidFill>
                   <a:srgbClr val="FFFFFF"/>
                 </a:solidFill>
@@ -3851,7 +6657,7 @@
               </a:rPr>
               <a:t>L</a:t>
             </a:r>
-            <a:endParaRPr lang="en-US" sz="2400" dirty="0"/>
+            <a:endParaRPr lang="en-US" sz="3600" dirty="0"/>
           </a:p>
         </p:txBody>
       </p:sp>
@@ -3880,7 +6686,7 @@
               <a:buNone/>
             </a:pPr>
             <a:r>
-              <a:rPr lang="en-US" sz="1400" b="1" dirty="0">
+              <a:rPr lang="en-US" sz="2000" b="1" dirty="0">
                 <a:solidFill>
                   <a:srgbClr val="072B41"/>
                 </a:solidFill>
@@ -3890,7 +6696,7 @@
               </a:rPr>
               <a:t>Lean</a:t>
             </a:r>
-            <a:endParaRPr lang="en-US" sz="1400" dirty="0"/>
+            <a:endParaRPr lang="en-US" sz="2000" dirty="0"/>
           </a:p>
         </p:txBody>
       </p:sp>
@@ -3922,7 +6728,7 @@
               <a:buNone/>
             </a:pPr>
             <a:r>
-              <a:rPr lang="en-US" sz="1050" dirty="0">
+              <a:rPr lang="en-US" sz="1400" dirty="0">
                 <a:solidFill>
                   <a:srgbClr val="596A78"/>
                 </a:solidFill>
@@ -3932,7 +6738,7 @@
               </a:rPr>
               <a:t>Small batches, fast feedback loops, eliminate work-in-progress waste</a:t>
             </a:r>
-            <a:endParaRPr lang="en-US" sz="1050" dirty="0"/>
+            <a:endParaRPr lang="en-US" sz="1400" dirty="0"/>
           </a:p>
         </p:txBody>
       </p:sp>
@@ -3961,7 +6767,7 @@
           <a:bodyPr/>
           <a:lstStyle/>
           <a:p>
-            <a:endParaRPr lang="en-US"/>
+            <a:endParaRPr lang="en-US" sz="2800"/>
           </a:p>
         </p:txBody>
       </p:sp>
@@ -3988,7 +6794,7 @@
           <a:bodyPr/>
           <a:lstStyle/>
           <a:p>
-            <a:endParaRPr lang="en-US"/>
+            <a:endParaRPr lang="en-US" sz="2800"/>
           </a:p>
         </p:txBody>
       </p:sp>
@@ -4017,7 +6823,7 @@
               <a:buNone/>
             </a:pPr>
             <a:r>
-              <a:rPr lang="en-US" sz="2400" b="1" dirty="0">
+              <a:rPr lang="en-US" sz="3600" b="1" dirty="0">
                 <a:solidFill>
                   <a:srgbClr val="FFFFFF"/>
                 </a:solidFill>
@@ -4027,7 +6833,7 @@
               </a:rPr>
               <a:t>M</a:t>
             </a:r>
-            <a:endParaRPr lang="en-US" sz="2400" dirty="0"/>
+            <a:endParaRPr lang="en-US" sz="3600" dirty="0"/>
           </a:p>
         </p:txBody>
       </p:sp>
@@ -4056,7 +6862,7 @@
               <a:buNone/>
             </a:pPr>
             <a:r>
-              <a:rPr lang="en-US" sz="1400" b="1" dirty="0">
+              <a:rPr lang="en-US" sz="2000" b="1" dirty="0">
                 <a:solidFill>
                   <a:srgbClr val="072B41"/>
                 </a:solidFill>
@@ -4066,7 +6872,7 @@
               </a:rPr>
               <a:t>Measurement</a:t>
             </a:r>
-            <a:endParaRPr lang="en-US" sz="1400" dirty="0"/>
+            <a:endParaRPr lang="en-US" sz="2000" dirty="0"/>
           </a:p>
         </p:txBody>
       </p:sp>
@@ -4098,7 +6904,7 @@
               <a:buNone/>
             </a:pPr>
             <a:r>
-              <a:rPr lang="en-US" sz="1050" dirty="0">
+              <a:rPr lang="en-US" sz="1400" dirty="0">
                 <a:solidFill>
                   <a:srgbClr val="596A78"/>
                 </a:solidFill>
@@ -4108,7 +6914,7 @@
               </a:rPr>
               <a:t>Instrument everything — decisions follow metrics, not opinions</a:t>
             </a:r>
-            <a:endParaRPr lang="en-US" sz="1050" dirty="0"/>
+            <a:endParaRPr lang="en-US" sz="1400" dirty="0"/>
           </a:p>
         </p:txBody>
       </p:sp>
@@ -4137,7 +6943,7 @@
           <a:bodyPr/>
           <a:lstStyle/>
           <a:p>
-            <a:endParaRPr lang="en-US"/>
+            <a:endParaRPr lang="en-US" sz="2800"/>
           </a:p>
         </p:txBody>
       </p:sp>
@@ -4164,7 +6970,7 @@
           <a:bodyPr/>
           <a:lstStyle/>
           <a:p>
-            <a:endParaRPr lang="en-US"/>
+            <a:endParaRPr lang="en-US" sz="2800"/>
           </a:p>
         </p:txBody>
       </p:sp>
@@ -4193,7 +6999,7 @@
               <a:buNone/>
             </a:pPr>
             <a:r>
-              <a:rPr lang="en-US" sz="2400" b="1" dirty="0">
+              <a:rPr lang="en-US" sz="3600" b="1" dirty="0">
                 <a:solidFill>
                   <a:srgbClr val="FFFFFF"/>
                 </a:solidFill>
@@ -4203,7 +7009,7 @@
               </a:rPr>
               <a:t>S</a:t>
             </a:r>
-            <a:endParaRPr lang="en-US" sz="2400" dirty="0"/>
+            <a:endParaRPr lang="en-US" sz="3600" dirty="0"/>
           </a:p>
         </p:txBody>
       </p:sp>
@@ -4232,7 +7038,7 @@
               <a:buNone/>
             </a:pPr>
             <a:r>
-              <a:rPr lang="en-US" sz="1400" b="1" dirty="0">
+              <a:rPr lang="en-US" sz="2000" b="1" dirty="0">
                 <a:solidFill>
                   <a:srgbClr val="072B41"/>
                 </a:solidFill>
@@ -4242,7 +7048,7 @@
               </a:rPr>
               <a:t>Sharing</a:t>
             </a:r>
-            <a:endParaRPr lang="en-US" sz="1400" dirty="0"/>
+            <a:endParaRPr lang="en-US" sz="2000" dirty="0"/>
           </a:p>
         </p:txBody>
       </p:sp>
@@ -4274,7 +7080,7 @@
               <a:buNone/>
             </a:pPr>
             <a:r>
-              <a:rPr lang="en-US" sz="1050" dirty="0">
+              <a:rPr lang="en-US" sz="1400" dirty="0">
                 <a:solidFill>
                   <a:srgbClr val="596A78"/>
                 </a:solidFill>
@@ -4284,36 +7090,36 @@
               </a:rPr>
               <a:t>Knowledge, tooling, and incident learnings flow freely across teams</a:t>
             </a:r>
-            <a:endParaRPr lang="en-US" sz="1050" dirty="0"/>
-          </a:p>
-        </p:txBody>
-      </p:sp>
-      <p:sp>
-        <p:nvSpPr>
-          <p:cNvPr id="30" name="Text 28"/>
-          <p:cNvSpPr/>
-          <p:nvPr/>
-        </p:nvSpPr>
-        <p:spPr>
-          <a:xfrm>
-            <a:off x="457200" y="6446520"/>
-            <a:ext cx="6400800" cy="274320"/>
-          </a:xfrm>
-          <a:prstGeom prst="rect">
-            <a:avLst/>
-          </a:prstGeom>
-          <a:noFill/>
-          <a:ln/>
-        </p:spPr>
-        <p:txBody>
-          <a:bodyPr wrap="square" lIns="0" tIns="0" rIns="0" bIns="0" rtlCol="0" anchor="ctr"/>
-          <a:lstStyle/>
-          <a:p>
-            <a:pPr marL="0" indent="0" algn="l">
-              <a:buNone/>
-            </a:pPr>
-            <a:r>
-              <a:rPr lang="en-US" sz="1000" dirty="0">
+            <a:endParaRPr lang="en-US" sz="1400" dirty="0"/>
+          </a:p>
+        </p:txBody>
+      </p:sp>
+      <p:sp>
+        <p:nvSpPr>
+          <p:cNvPr id="31" name="Text 29"/>
+          <p:cNvSpPr/>
+          <p:nvPr/>
+        </p:nvSpPr>
+        <p:spPr>
+          <a:xfrm>
+            <a:off x="11274552" y="6446520"/>
+            <a:ext cx="457200" cy="274320"/>
+          </a:xfrm>
+          <a:prstGeom prst="rect">
+            <a:avLst/>
+          </a:prstGeom>
+          <a:noFill/>
+          <a:ln/>
+        </p:spPr>
+        <p:txBody>
+          <a:bodyPr wrap="square" lIns="0" tIns="0" rIns="0" bIns="0" rtlCol="0" anchor="ctr"/>
+          <a:lstStyle/>
+          <a:p>
+            <a:pPr marL="0" indent="0" algn="r">
+              <a:buNone/>
+            </a:pPr>
+            <a:r>
+              <a:rPr lang="en-US" sz="1200" dirty="0">
                 <a:solidFill>
                   <a:srgbClr val="8A9BA8"/>
                 </a:solidFill>
@@ -4321,48 +7127,9 @@
                 <a:ea typeface="Calibri" pitchFamily="34" charset="-122"/>
                 <a:cs typeface="Calibri" pitchFamily="34" charset="-120"/>
               </a:rPr>
-              <a:t>Systems Analysis &amp; Design  |  Week 1</a:t>
-            </a:r>
-            <a:endParaRPr lang="en-US" sz="1000" dirty="0"/>
-          </a:p>
-        </p:txBody>
-      </p:sp>
-      <p:sp>
-        <p:nvSpPr>
-          <p:cNvPr id="31" name="Text 29"/>
-          <p:cNvSpPr/>
-          <p:nvPr/>
-        </p:nvSpPr>
-        <p:spPr>
-          <a:xfrm>
-            <a:off x="11274552" y="6446520"/>
-            <a:ext cx="457200" cy="274320"/>
-          </a:xfrm>
-          <a:prstGeom prst="rect">
-            <a:avLst/>
-          </a:prstGeom>
-          <a:noFill/>
-          <a:ln/>
-        </p:spPr>
-        <p:txBody>
-          <a:bodyPr wrap="square" lIns="0" tIns="0" rIns="0" bIns="0" rtlCol="0" anchor="ctr"/>
-          <a:lstStyle/>
-          <a:p>
-            <a:pPr marL="0" indent="0" algn="r">
-              <a:buNone/>
-            </a:pPr>
-            <a:r>
-              <a:rPr lang="en-US" sz="1000" dirty="0">
-                <a:solidFill>
-                  <a:srgbClr val="8A9BA8"/>
-                </a:solidFill>
-                <a:latin typeface="Calibri" pitchFamily="34" charset="0"/>
-                <a:ea typeface="Calibri" pitchFamily="34" charset="-122"/>
-                <a:cs typeface="Calibri" pitchFamily="34" charset="-120"/>
-              </a:rPr>
               <a:t>11</a:t>
             </a:r>
-            <a:endParaRPr lang="en-US" sz="1000" dirty="0"/>
+            <a:endParaRPr lang="en-US" sz="1200" dirty="0"/>
           </a:p>
         </p:txBody>
       </p:sp>
@@ -4502,7 +7269,8 @@
           <a:bodyPr/>
           <a:lstStyle/>
           <a:p>
-            <a:endParaRPr lang="en-US"/>
+            <a:pPr algn="ctr"/>
+            <a:endParaRPr lang="en-US" sz="3200"/>
           </a:p>
         </p:txBody>
       </p:sp>
@@ -4527,11 +7295,11 @@
           <a:bodyPr wrap="square" lIns="0" tIns="0" rIns="0" bIns="0" rtlCol="0" anchor="ctr"/>
           <a:lstStyle/>
           <a:p>
-            <a:pPr marL="0" indent="0">
-              <a:buNone/>
-            </a:pPr>
-            <a:r>
-              <a:rPr lang="en-US" sz="1500" b="1" dirty="0">
+            <a:pPr marL="0" indent="0" algn="ctr">
+              <a:buNone/>
+            </a:pPr>
+            <a:r>
+              <a:rPr lang="en-US" sz="2400" b="1" dirty="0">
                 <a:solidFill>
                   <a:srgbClr val="FFFFFF"/>
                 </a:solidFill>
@@ -4541,7 +7309,7 @@
               </a:rPr>
               <a:t>Plan</a:t>
             </a:r>
-            <a:endParaRPr lang="en-US" sz="1500" dirty="0"/>
+            <a:endParaRPr lang="en-US" sz="2400" dirty="0"/>
           </a:p>
         </p:txBody>
       </p:sp>
@@ -4566,14 +7334,14 @@
           <a:bodyPr wrap="square" lIns="0" tIns="0" rIns="0" bIns="0" rtlCol="0" anchor="ctr"/>
           <a:lstStyle/>
           <a:p>
-            <a:pPr marL="0" indent="0">
+            <a:pPr marL="0" indent="0" algn="ctr">
               <a:lnSpc>
                 <a:spcPct val="120000"/>
               </a:lnSpc>
               <a:buNone/>
             </a:pPr>
             <a:r>
-              <a:rPr lang="en-US" sz="1100" dirty="0">
+              <a:rPr lang="en-US" dirty="0">
                 <a:solidFill>
                   <a:srgbClr val="CADCFC"/>
                 </a:solidFill>
@@ -4583,7 +7351,7 @@
               </a:rPr>
               <a:t>Jira · Azure Boards · Linear</a:t>
             </a:r>
-            <a:endParaRPr lang="en-US" sz="1100" dirty="0"/>
+            <a:endParaRPr lang="en-US" dirty="0"/>
           </a:p>
         </p:txBody>
       </p:sp>
@@ -4612,7 +7380,8 @@
           <a:bodyPr/>
           <a:lstStyle/>
           <a:p>
-            <a:endParaRPr lang="en-US"/>
+            <a:pPr algn="ctr"/>
+            <a:endParaRPr lang="en-US" sz="3200"/>
           </a:p>
         </p:txBody>
       </p:sp>
@@ -4637,11 +7406,11 @@
           <a:bodyPr wrap="square" lIns="0" tIns="0" rIns="0" bIns="0" rtlCol="0" anchor="ctr"/>
           <a:lstStyle/>
           <a:p>
-            <a:pPr marL="0" indent="0">
-              <a:buNone/>
-            </a:pPr>
-            <a:r>
-              <a:rPr lang="en-US" sz="1500" b="1" dirty="0">
+            <a:pPr marL="0" indent="0" algn="ctr">
+              <a:buNone/>
+            </a:pPr>
+            <a:r>
+              <a:rPr lang="en-US" sz="2400" b="1" dirty="0">
                 <a:solidFill>
                   <a:srgbClr val="FFFFFF"/>
                 </a:solidFill>
@@ -4651,7 +7420,7 @@
               </a:rPr>
               <a:t>Code</a:t>
             </a:r>
-            <a:endParaRPr lang="en-US" sz="1500" dirty="0"/>
+            <a:endParaRPr lang="en-US" sz="2400" dirty="0"/>
           </a:p>
         </p:txBody>
       </p:sp>
@@ -4676,14 +7445,14 @@
           <a:bodyPr wrap="square" lIns="0" tIns="0" rIns="0" bIns="0" rtlCol="0" anchor="ctr"/>
           <a:lstStyle/>
           <a:p>
-            <a:pPr marL="0" indent="0">
+            <a:pPr marL="0" indent="0" algn="ctr">
               <a:lnSpc>
                 <a:spcPct val="120000"/>
               </a:lnSpc>
               <a:buNone/>
             </a:pPr>
             <a:r>
-              <a:rPr lang="en-US" sz="1100" dirty="0">
+              <a:rPr lang="en-US" dirty="0">
                 <a:solidFill>
                   <a:srgbClr val="CADCFC"/>
                 </a:solidFill>
@@ -4693,7 +7462,7 @@
               </a:rPr>
               <a:t>Git · GitHub · GitLab</a:t>
             </a:r>
-            <a:endParaRPr lang="en-US" sz="1100" dirty="0"/>
+            <a:endParaRPr lang="en-US" dirty="0"/>
           </a:p>
         </p:txBody>
       </p:sp>
@@ -4722,7 +7491,8 @@
           <a:bodyPr/>
           <a:lstStyle/>
           <a:p>
-            <a:endParaRPr lang="en-US"/>
+            <a:pPr algn="ctr"/>
+            <a:endParaRPr lang="en-US" sz="3200"/>
           </a:p>
         </p:txBody>
       </p:sp>
@@ -4747,11 +7517,11 @@
           <a:bodyPr wrap="square" lIns="0" tIns="0" rIns="0" bIns="0" rtlCol="0" anchor="ctr"/>
           <a:lstStyle/>
           <a:p>
-            <a:pPr marL="0" indent="0">
-              <a:buNone/>
-            </a:pPr>
-            <a:r>
-              <a:rPr lang="en-US" sz="1500" b="1" dirty="0">
+            <a:pPr marL="0" indent="0" algn="ctr">
+              <a:buNone/>
+            </a:pPr>
+            <a:r>
+              <a:rPr lang="en-US" sz="2400" b="1" dirty="0">
                 <a:solidFill>
                   <a:srgbClr val="FFFFFF"/>
                 </a:solidFill>
@@ -4761,7 +7531,7 @@
               </a:rPr>
               <a:t>Build</a:t>
             </a:r>
-            <a:endParaRPr lang="en-US" sz="1500" dirty="0"/>
+            <a:endParaRPr lang="en-US" sz="2400" dirty="0"/>
           </a:p>
         </p:txBody>
       </p:sp>
@@ -4786,14 +7556,14 @@
           <a:bodyPr wrap="square" lIns="0" tIns="0" rIns="0" bIns="0" rtlCol="0" anchor="ctr"/>
           <a:lstStyle/>
           <a:p>
-            <a:pPr marL="0" indent="0">
+            <a:pPr marL="0" indent="0" algn="ctr">
               <a:lnSpc>
                 <a:spcPct val="120000"/>
               </a:lnSpc>
               <a:buNone/>
             </a:pPr>
             <a:r>
-              <a:rPr lang="en-US" sz="1100" dirty="0">
+              <a:rPr lang="en-US" dirty="0">
                 <a:solidFill>
                   <a:srgbClr val="CADCFC"/>
                 </a:solidFill>
@@ -4803,7 +7573,7 @@
               </a:rPr>
               <a:t>Maven · Gradle · npm</a:t>
             </a:r>
-            <a:endParaRPr lang="en-US" sz="1100" dirty="0"/>
+            <a:endParaRPr lang="en-US" dirty="0"/>
           </a:p>
         </p:txBody>
       </p:sp>
@@ -4832,7 +7602,8 @@
           <a:bodyPr/>
           <a:lstStyle/>
           <a:p>
-            <a:endParaRPr lang="en-US"/>
+            <a:pPr algn="ctr"/>
+            <a:endParaRPr lang="en-US" sz="3200"/>
           </a:p>
         </p:txBody>
       </p:sp>
@@ -4857,11 +7628,11 @@
           <a:bodyPr wrap="square" lIns="0" tIns="0" rIns="0" bIns="0" rtlCol="0" anchor="ctr"/>
           <a:lstStyle/>
           <a:p>
-            <a:pPr marL="0" indent="0">
-              <a:buNone/>
-            </a:pPr>
-            <a:r>
-              <a:rPr lang="en-US" sz="1500" b="1" dirty="0">
+            <a:pPr marL="0" indent="0" algn="ctr">
+              <a:buNone/>
+            </a:pPr>
+            <a:r>
+              <a:rPr lang="en-US" sz="2400" b="1" dirty="0">
                 <a:solidFill>
                   <a:srgbClr val="FFFFFF"/>
                 </a:solidFill>
@@ -4871,7 +7642,7 @@
               </a:rPr>
               <a:t>Test</a:t>
             </a:r>
-            <a:endParaRPr lang="en-US" sz="1500" dirty="0"/>
+            <a:endParaRPr lang="en-US" sz="2400" dirty="0"/>
           </a:p>
         </p:txBody>
       </p:sp>
@@ -4896,14 +7667,14 @@
           <a:bodyPr wrap="square" lIns="0" tIns="0" rIns="0" bIns="0" rtlCol="0" anchor="ctr"/>
           <a:lstStyle/>
           <a:p>
-            <a:pPr marL="0" indent="0">
+            <a:pPr marL="0" indent="0" algn="ctr">
               <a:lnSpc>
                 <a:spcPct val="120000"/>
               </a:lnSpc>
               <a:buNone/>
             </a:pPr>
             <a:r>
-              <a:rPr lang="en-US" sz="1100" dirty="0">
+              <a:rPr lang="en-US" dirty="0">
                 <a:solidFill>
                   <a:srgbClr val="CADCFC"/>
                 </a:solidFill>
@@ -4913,7 +7684,7 @@
               </a:rPr>
               <a:t>JUnit · Selenium · Cypress</a:t>
             </a:r>
-            <a:endParaRPr lang="en-US" sz="1100" dirty="0"/>
+            <a:endParaRPr lang="en-US" dirty="0"/>
           </a:p>
         </p:txBody>
       </p:sp>
@@ -4942,7 +7713,8 @@
           <a:bodyPr/>
           <a:lstStyle/>
           <a:p>
-            <a:endParaRPr lang="en-US"/>
+            <a:pPr algn="ctr"/>
+            <a:endParaRPr lang="en-US" sz="3200"/>
           </a:p>
         </p:txBody>
       </p:sp>
@@ -4967,11 +7739,11 @@
           <a:bodyPr wrap="square" lIns="0" tIns="0" rIns="0" bIns="0" rtlCol="0" anchor="ctr"/>
           <a:lstStyle/>
           <a:p>
-            <a:pPr marL="0" indent="0">
-              <a:buNone/>
-            </a:pPr>
-            <a:r>
-              <a:rPr lang="en-US" sz="1500" b="1" dirty="0">
+            <a:pPr marL="0" indent="0" algn="ctr">
+              <a:buNone/>
+            </a:pPr>
+            <a:r>
+              <a:rPr lang="en-US" sz="2400" b="1" dirty="0">
                 <a:solidFill>
                   <a:srgbClr val="FFFFFF"/>
                 </a:solidFill>
@@ -4981,7 +7753,7 @@
               </a:rPr>
               <a:t>Release</a:t>
             </a:r>
-            <a:endParaRPr lang="en-US" sz="1500" dirty="0"/>
+            <a:endParaRPr lang="en-US" sz="2400" dirty="0"/>
           </a:p>
         </p:txBody>
       </p:sp>
@@ -5006,14 +7778,14 @@
           <a:bodyPr wrap="square" lIns="0" tIns="0" rIns="0" bIns="0" rtlCol="0" anchor="ctr"/>
           <a:lstStyle/>
           <a:p>
-            <a:pPr marL="0" indent="0">
+            <a:pPr marL="0" indent="0" algn="ctr">
               <a:lnSpc>
                 <a:spcPct val="120000"/>
               </a:lnSpc>
               <a:buNone/>
             </a:pPr>
             <a:r>
-              <a:rPr lang="en-US" sz="1100" dirty="0">
+              <a:rPr lang="en-US" dirty="0">
                 <a:solidFill>
                   <a:srgbClr val="CADCFC"/>
                 </a:solidFill>
@@ -5023,7 +7795,7 @@
               </a:rPr>
               <a:t>Jenkins · GitHub Actions · CircleCI</a:t>
             </a:r>
-            <a:endParaRPr lang="en-US" sz="1100" dirty="0"/>
+            <a:endParaRPr lang="en-US" dirty="0"/>
           </a:p>
         </p:txBody>
       </p:sp>
@@ -5052,7 +7824,8 @@
           <a:bodyPr/>
           <a:lstStyle/>
           <a:p>
-            <a:endParaRPr lang="en-US"/>
+            <a:pPr algn="ctr"/>
+            <a:endParaRPr lang="en-US" sz="3200"/>
           </a:p>
         </p:txBody>
       </p:sp>
@@ -5077,11 +7850,11 @@
           <a:bodyPr wrap="square" lIns="0" tIns="0" rIns="0" bIns="0" rtlCol="0" anchor="ctr"/>
           <a:lstStyle/>
           <a:p>
-            <a:pPr marL="0" indent="0">
-              <a:buNone/>
-            </a:pPr>
-            <a:r>
-              <a:rPr lang="en-US" sz="1500" b="1" dirty="0">
+            <a:pPr marL="0" indent="0" algn="ctr">
+              <a:buNone/>
+            </a:pPr>
+            <a:r>
+              <a:rPr lang="en-US" sz="2400" b="1" dirty="0">
                 <a:solidFill>
                   <a:srgbClr val="FFFFFF"/>
                 </a:solidFill>
@@ -5091,7 +7864,7 @@
               </a:rPr>
               <a:t>Deploy</a:t>
             </a:r>
-            <a:endParaRPr lang="en-US" sz="1500" dirty="0"/>
+            <a:endParaRPr lang="en-US" sz="2400" dirty="0"/>
           </a:p>
         </p:txBody>
       </p:sp>
@@ -5116,14 +7889,14 @@
           <a:bodyPr wrap="square" lIns="0" tIns="0" rIns="0" bIns="0" rtlCol="0" anchor="ctr"/>
           <a:lstStyle/>
           <a:p>
-            <a:pPr marL="0" indent="0">
+            <a:pPr marL="0" indent="0" algn="ctr">
               <a:lnSpc>
                 <a:spcPct val="120000"/>
               </a:lnSpc>
               <a:buNone/>
             </a:pPr>
             <a:r>
-              <a:rPr lang="en-US" sz="1100" dirty="0">
+              <a:rPr lang="en-US" dirty="0">
                 <a:solidFill>
                   <a:srgbClr val="CADCFC"/>
                 </a:solidFill>
@@ -5133,7 +7906,7 @@
               </a:rPr>
               <a:t>Kubernetes · Helm · ArgoCD</a:t>
             </a:r>
-            <a:endParaRPr lang="en-US" sz="1100" dirty="0"/>
+            <a:endParaRPr lang="en-US" dirty="0"/>
           </a:p>
         </p:txBody>
       </p:sp>
@@ -5162,7 +7935,8 @@
           <a:bodyPr/>
           <a:lstStyle/>
           <a:p>
-            <a:endParaRPr lang="en-US"/>
+            <a:pPr algn="ctr"/>
+            <a:endParaRPr lang="en-US" sz="3200"/>
           </a:p>
         </p:txBody>
       </p:sp>
@@ -5187,11 +7961,11 @@
           <a:bodyPr wrap="square" lIns="0" tIns="0" rIns="0" bIns="0" rtlCol="0" anchor="ctr"/>
           <a:lstStyle/>
           <a:p>
-            <a:pPr marL="0" indent="0">
-              <a:buNone/>
-            </a:pPr>
-            <a:r>
-              <a:rPr lang="en-US" sz="1500" b="1" dirty="0">
+            <a:pPr marL="0" indent="0" algn="ctr">
+              <a:buNone/>
+            </a:pPr>
+            <a:r>
+              <a:rPr lang="en-US" sz="2400" b="1" dirty="0">
                 <a:solidFill>
                   <a:srgbClr val="FFFFFF"/>
                 </a:solidFill>
@@ -5201,7 +7975,7 @@
               </a:rPr>
               <a:t>Operate</a:t>
             </a:r>
-            <a:endParaRPr lang="en-US" sz="1500" dirty="0"/>
+            <a:endParaRPr lang="en-US" sz="2400" dirty="0"/>
           </a:p>
         </p:txBody>
       </p:sp>
@@ -5226,14 +8000,14 @@
           <a:bodyPr wrap="square" lIns="0" tIns="0" rIns="0" bIns="0" rtlCol="0" anchor="ctr"/>
           <a:lstStyle/>
           <a:p>
-            <a:pPr marL="0" indent="0">
+            <a:pPr marL="0" indent="0" algn="ctr">
               <a:lnSpc>
                 <a:spcPct val="120000"/>
               </a:lnSpc>
               <a:buNone/>
             </a:pPr>
             <a:r>
-              <a:rPr lang="en-US" sz="1100" dirty="0">
+              <a:rPr lang="en-US" dirty="0">
                 <a:solidFill>
                   <a:srgbClr val="CADCFC"/>
                 </a:solidFill>
@@ -5243,7 +8017,7 @@
               </a:rPr>
               <a:t>Terraform · Ansible · Docker</a:t>
             </a:r>
-            <a:endParaRPr lang="en-US" sz="1100" dirty="0"/>
+            <a:endParaRPr lang="en-US" dirty="0"/>
           </a:p>
         </p:txBody>
       </p:sp>
@@ -5272,7 +8046,8 @@
           <a:bodyPr/>
           <a:lstStyle/>
           <a:p>
-            <a:endParaRPr lang="en-US"/>
+            <a:pPr algn="ctr"/>
+            <a:endParaRPr lang="en-US" sz="3200"/>
           </a:p>
         </p:txBody>
       </p:sp>
@@ -5297,11 +8072,11 @@
           <a:bodyPr wrap="square" lIns="0" tIns="0" rIns="0" bIns="0" rtlCol="0" anchor="ctr"/>
           <a:lstStyle/>
           <a:p>
-            <a:pPr marL="0" indent="0">
-              <a:buNone/>
-            </a:pPr>
-            <a:r>
-              <a:rPr lang="en-US" sz="1500" b="1" dirty="0">
+            <a:pPr marL="0" indent="0" algn="ctr">
+              <a:buNone/>
+            </a:pPr>
+            <a:r>
+              <a:rPr lang="en-US" sz="2400" b="1" dirty="0">
                 <a:solidFill>
                   <a:srgbClr val="FFFFFF"/>
                 </a:solidFill>
@@ -5311,7 +8086,7 @@
               </a:rPr>
               <a:t>Monitor</a:t>
             </a:r>
-            <a:endParaRPr lang="en-US" sz="1500" dirty="0"/>
+            <a:endParaRPr lang="en-US" sz="2400" dirty="0"/>
           </a:p>
         </p:txBody>
       </p:sp>
@@ -5336,14 +8111,14 @@
           <a:bodyPr wrap="square" lIns="0" tIns="0" rIns="0" bIns="0" rtlCol="0" anchor="ctr"/>
           <a:lstStyle/>
           <a:p>
-            <a:pPr marL="0" indent="0">
+            <a:pPr marL="0" indent="0" algn="ctr">
               <a:lnSpc>
                 <a:spcPct val="120000"/>
               </a:lnSpc>
               <a:buNone/>
             </a:pPr>
             <a:r>
-              <a:rPr lang="en-US" sz="1100" dirty="0">
+              <a:rPr lang="en-US" dirty="0">
                 <a:solidFill>
                   <a:srgbClr val="CADCFC"/>
                 </a:solidFill>
@@ -5353,7 +8128,7 @@
               </a:rPr>
               <a:t>Prometheus · Grafana · Datadog</a:t>
             </a:r>
-            <a:endParaRPr lang="en-US" sz="1100" dirty="0"/>
+            <a:endParaRPr lang="en-US" dirty="0"/>
           </a:p>
         </p:txBody>
       </p:sp>
@@ -5378,11 +8153,11 @@
           <a:bodyPr wrap="square" lIns="0" tIns="0" rIns="0" bIns="0" rtlCol="0" anchor="ctr"/>
           <a:lstStyle/>
           <a:p>
-            <a:pPr marL="0" indent="0">
-              <a:buNone/>
-            </a:pPr>
-            <a:r>
-              <a:rPr lang="en-US" sz="1150" i="1" dirty="0">
+            <a:pPr marL="0" indent="0" algn="ctr">
+              <a:buNone/>
+            </a:pPr>
+            <a:r>
+              <a:rPr lang="en-US" i="1" dirty="0">
                 <a:solidFill>
                   <a:srgbClr val="7C8A96"/>
                 </a:solidFill>
@@ -5392,36 +8167,36 @@
               </a:rPr>
               <a:t>Example tools shown for illustration — teams choose based on cloud provider, scale, and existing stack.</a:t>
             </a:r>
-            <a:endParaRPr lang="en-US" sz="1150" dirty="0"/>
-          </a:p>
-        </p:txBody>
-      </p:sp>
-      <p:sp>
-        <p:nvSpPr>
-          <p:cNvPr id="29" name="Text 27"/>
-          <p:cNvSpPr/>
-          <p:nvPr/>
-        </p:nvSpPr>
-        <p:spPr>
-          <a:xfrm>
-            <a:off x="457200" y="6446520"/>
-            <a:ext cx="6400800" cy="274320"/>
-          </a:xfrm>
-          <a:prstGeom prst="rect">
-            <a:avLst/>
-          </a:prstGeom>
-          <a:noFill/>
-          <a:ln/>
-        </p:spPr>
-        <p:txBody>
-          <a:bodyPr wrap="square" lIns="0" tIns="0" rIns="0" bIns="0" rtlCol="0" anchor="ctr"/>
-          <a:lstStyle/>
-          <a:p>
-            <a:pPr marL="0" indent="0" algn="l">
-              <a:buNone/>
-            </a:pPr>
-            <a:r>
-              <a:rPr lang="en-US" sz="1000" dirty="0">
+            <a:endParaRPr lang="en-US" dirty="0"/>
+          </a:p>
+        </p:txBody>
+      </p:sp>
+      <p:sp>
+        <p:nvSpPr>
+          <p:cNvPr id="30" name="Text 28"/>
+          <p:cNvSpPr/>
+          <p:nvPr/>
+        </p:nvSpPr>
+        <p:spPr>
+          <a:xfrm>
+            <a:off x="11274552" y="6446520"/>
+            <a:ext cx="457200" cy="274320"/>
+          </a:xfrm>
+          <a:prstGeom prst="rect">
+            <a:avLst/>
+          </a:prstGeom>
+          <a:noFill/>
+          <a:ln/>
+        </p:spPr>
+        <p:txBody>
+          <a:bodyPr wrap="square" lIns="0" tIns="0" rIns="0" bIns="0" rtlCol="0" anchor="ctr"/>
+          <a:lstStyle/>
+          <a:p>
+            <a:pPr marL="0" indent="0" algn="ctr">
+              <a:buNone/>
+            </a:pPr>
+            <a:r>
+              <a:rPr lang="en-US" sz="1400" dirty="0">
                 <a:solidFill>
                   <a:srgbClr val="8A9BA8"/>
                 </a:solidFill>
@@ -5429,48 +8204,9 @@
                 <a:ea typeface="Calibri" pitchFamily="34" charset="-122"/>
                 <a:cs typeface="Calibri" pitchFamily="34" charset="-120"/>
               </a:rPr>
-              <a:t>Systems Analysis &amp; Design  |  Week 1</a:t>
-            </a:r>
-            <a:endParaRPr lang="en-US" sz="1000" dirty="0"/>
-          </a:p>
-        </p:txBody>
-      </p:sp>
-      <p:sp>
-        <p:nvSpPr>
-          <p:cNvPr id="30" name="Text 28"/>
-          <p:cNvSpPr/>
-          <p:nvPr/>
-        </p:nvSpPr>
-        <p:spPr>
-          <a:xfrm>
-            <a:off x="11274552" y="6446520"/>
-            <a:ext cx="457200" cy="274320"/>
-          </a:xfrm>
-          <a:prstGeom prst="rect">
-            <a:avLst/>
-          </a:prstGeom>
-          <a:noFill/>
-          <a:ln/>
-        </p:spPr>
-        <p:txBody>
-          <a:bodyPr wrap="square" lIns="0" tIns="0" rIns="0" bIns="0" rtlCol="0" anchor="ctr"/>
-          <a:lstStyle/>
-          <a:p>
-            <a:pPr marL="0" indent="0" algn="r">
-              <a:buNone/>
-            </a:pPr>
-            <a:r>
-              <a:rPr lang="en-US" sz="1000" dirty="0">
-                <a:solidFill>
-                  <a:srgbClr val="8A9BA8"/>
-                </a:solidFill>
-                <a:latin typeface="Calibri" pitchFamily="34" charset="0"/>
-                <a:ea typeface="Calibri" pitchFamily="34" charset="-122"/>
-                <a:cs typeface="Calibri" pitchFamily="34" charset="-120"/>
-              </a:rPr>
               <a:t>12</a:t>
             </a:r>
-            <a:endParaRPr lang="en-US" sz="1000" dirty="0"/>
+            <a:endParaRPr lang="en-US" sz="1400" dirty="0"/>
           </a:p>
         </p:txBody>
       </p:sp>
@@ -5610,7 +8346,8 @@
           <a:bodyPr/>
           <a:lstStyle/>
           <a:p>
-            <a:endParaRPr lang="en-US"/>
+            <a:pPr algn="ctr"/>
+            <a:endParaRPr lang="en-US" sz="3200"/>
           </a:p>
         </p:txBody>
       </p:sp>
@@ -5635,11 +8372,11 @@
           <a:bodyPr wrap="square" lIns="0" tIns="0" rIns="0" bIns="0" rtlCol="0" anchor="ctr"/>
           <a:lstStyle/>
           <a:p>
-            <a:pPr marL="0" indent="0">
-              <a:buNone/>
-            </a:pPr>
-            <a:r>
-              <a:rPr lang="en-US" sz="1550" b="1" dirty="0">
+            <a:pPr marL="0" indent="0" algn="ctr">
+              <a:buNone/>
+            </a:pPr>
+            <a:r>
+              <a:rPr lang="en-US" sz="2400" b="1" dirty="0">
                 <a:solidFill>
                   <a:srgbClr val="F2A93B"/>
                 </a:solidFill>
@@ -5649,7 +8386,7 @@
               </a:rPr>
               <a:t>Deployment Frequency</a:t>
             </a:r>
-            <a:endParaRPr lang="en-US" sz="1550" dirty="0"/>
+            <a:endParaRPr lang="en-US" sz="2400" dirty="0"/>
           </a:p>
         </p:txBody>
       </p:sp>
@@ -5674,14 +8411,14 @@
           <a:bodyPr wrap="square" lIns="0" tIns="0" rIns="0" bIns="0" rtlCol="0" anchor="ctr"/>
           <a:lstStyle/>
           <a:p>
-            <a:pPr marL="0" indent="0">
+            <a:pPr marL="0" indent="0" algn="ctr">
               <a:lnSpc>
                 <a:spcPct val="125000"/>
               </a:lnSpc>
               <a:buNone/>
             </a:pPr>
             <a:r>
-              <a:rPr lang="en-US" sz="1250" dirty="0">
+              <a:rPr lang="en-US" sz="2000" dirty="0">
                 <a:solidFill>
                   <a:srgbClr val="CADCFC"/>
                 </a:solidFill>
@@ -5691,7 +8428,7 @@
               </a:rPr>
               <a:t>How often an organization successfully releases to production</a:t>
             </a:r>
-            <a:endParaRPr lang="en-US" sz="1250" dirty="0"/>
+            <a:endParaRPr lang="en-US" sz="2000" dirty="0"/>
           </a:p>
         </p:txBody>
       </p:sp>
@@ -5720,7 +8457,8 @@
           <a:bodyPr/>
           <a:lstStyle/>
           <a:p>
-            <a:endParaRPr lang="en-US"/>
+            <a:pPr algn="ctr"/>
+            <a:endParaRPr lang="en-US" sz="3200"/>
           </a:p>
         </p:txBody>
       </p:sp>
@@ -5745,11 +8483,11 @@
           <a:bodyPr wrap="square" lIns="0" tIns="0" rIns="0" bIns="0" rtlCol="0" anchor="ctr"/>
           <a:lstStyle/>
           <a:p>
-            <a:pPr marL="0" indent="0">
-              <a:buNone/>
-            </a:pPr>
-            <a:r>
-              <a:rPr lang="en-US" sz="1550" b="1" dirty="0">
+            <a:pPr marL="0" indent="0" algn="ctr">
+              <a:buNone/>
+            </a:pPr>
+            <a:r>
+              <a:rPr lang="en-US" sz="2400" b="1" dirty="0">
                 <a:solidFill>
                   <a:srgbClr val="F2A93B"/>
                 </a:solidFill>
@@ -5759,7 +8497,7 @@
               </a:rPr>
               <a:t>Lead Time for Changes</a:t>
             </a:r>
-            <a:endParaRPr lang="en-US" sz="1550" dirty="0"/>
+            <a:endParaRPr lang="en-US" sz="2400" dirty="0"/>
           </a:p>
         </p:txBody>
       </p:sp>
@@ -5784,14 +8522,14 @@
           <a:bodyPr wrap="square" lIns="0" tIns="0" rIns="0" bIns="0" rtlCol="0" anchor="ctr"/>
           <a:lstStyle/>
           <a:p>
-            <a:pPr marL="0" indent="0">
+            <a:pPr marL="0" indent="0" algn="ctr">
               <a:lnSpc>
                 <a:spcPct val="125000"/>
               </a:lnSpc>
               <a:buNone/>
             </a:pPr>
             <a:r>
-              <a:rPr lang="en-US" sz="1250" dirty="0">
+              <a:rPr lang="en-US" sz="2000" dirty="0">
                 <a:solidFill>
                   <a:srgbClr val="CADCFC"/>
                 </a:solidFill>
@@ -5801,7 +8539,7 @@
               </a:rPr>
               <a:t>Time from code commit to that code running in production</a:t>
             </a:r>
-            <a:endParaRPr lang="en-US" sz="1250" dirty="0"/>
+            <a:endParaRPr lang="en-US" sz="2000" dirty="0"/>
           </a:p>
         </p:txBody>
       </p:sp>
@@ -5830,7 +8568,8 @@
           <a:bodyPr/>
           <a:lstStyle/>
           <a:p>
-            <a:endParaRPr lang="en-US"/>
+            <a:pPr algn="ctr"/>
+            <a:endParaRPr lang="en-US" sz="3200"/>
           </a:p>
         </p:txBody>
       </p:sp>
@@ -5855,11 +8594,11 @@
           <a:bodyPr wrap="square" lIns="0" tIns="0" rIns="0" bIns="0" rtlCol="0" anchor="ctr"/>
           <a:lstStyle/>
           <a:p>
-            <a:pPr marL="0" indent="0">
-              <a:buNone/>
-            </a:pPr>
-            <a:r>
-              <a:rPr lang="en-US" sz="1550" b="1" dirty="0">
+            <a:pPr marL="0" indent="0" algn="ctr">
+              <a:buNone/>
+            </a:pPr>
+            <a:r>
+              <a:rPr lang="en-US" sz="2400" b="1" dirty="0">
                 <a:solidFill>
                   <a:srgbClr val="F2A93B"/>
                 </a:solidFill>
@@ -5869,7 +8608,7 @@
               </a:rPr>
               <a:t>Change Failure Rate</a:t>
             </a:r>
-            <a:endParaRPr lang="en-US" sz="1550" dirty="0"/>
+            <a:endParaRPr lang="en-US" sz="2400" dirty="0"/>
           </a:p>
         </p:txBody>
       </p:sp>
@@ -5894,14 +8633,14 @@
           <a:bodyPr wrap="square" lIns="0" tIns="0" rIns="0" bIns="0" rtlCol="0" anchor="ctr"/>
           <a:lstStyle/>
           <a:p>
-            <a:pPr marL="0" indent="0">
+            <a:pPr marL="0" indent="0" algn="ctr">
               <a:lnSpc>
                 <a:spcPct val="125000"/>
               </a:lnSpc>
               <a:buNone/>
             </a:pPr>
             <a:r>
-              <a:rPr lang="en-US" sz="1250" dirty="0">
+              <a:rPr lang="en-US" sz="2000" dirty="0">
                 <a:solidFill>
                   <a:srgbClr val="CADCFC"/>
                 </a:solidFill>
@@ -5911,7 +8650,7 @@
               </a:rPr>
               <a:t>Share of deployments that cause a failure in production</a:t>
             </a:r>
-            <a:endParaRPr lang="en-US" sz="1250" dirty="0"/>
+            <a:endParaRPr lang="en-US" sz="2000" dirty="0"/>
           </a:p>
         </p:txBody>
       </p:sp>
@@ -5940,7 +8679,8 @@
           <a:bodyPr/>
           <a:lstStyle/>
           <a:p>
-            <a:endParaRPr lang="en-US"/>
+            <a:pPr algn="ctr"/>
+            <a:endParaRPr lang="en-US" sz="3200"/>
           </a:p>
         </p:txBody>
       </p:sp>
@@ -5965,11 +8705,11 @@
           <a:bodyPr wrap="square" lIns="0" tIns="0" rIns="0" bIns="0" rtlCol="0" anchor="ctr"/>
           <a:lstStyle/>
           <a:p>
-            <a:pPr marL="0" indent="0">
-              <a:buNone/>
-            </a:pPr>
-            <a:r>
-              <a:rPr lang="en-US" sz="1550" b="1" dirty="0">
+            <a:pPr marL="0" indent="0" algn="ctr">
+              <a:buNone/>
+            </a:pPr>
+            <a:r>
+              <a:rPr lang="en-US" sz="2400" b="1" dirty="0">
                 <a:solidFill>
                   <a:srgbClr val="F2A93B"/>
                 </a:solidFill>
@@ -5979,7 +8719,7 @@
               </a:rPr>
               <a:t>Time to Restore Service</a:t>
             </a:r>
-            <a:endParaRPr lang="en-US" sz="1550" dirty="0"/>
+            <a:endParaRPr lang="en-US" sz="2400" dirty="0"/>
           </a:p>
         </p:txBody>
       </p:sp>
@@ -6004,14 +8744,14 @@
           <a:bodyPr wrap="square" lIns="0" tIns="0" rIns="0" bIns="0" rtlCol="0" anchor="ctr"/>
           <a:lstStyle/>
           <a:p>
-            <a:pPr marL="0" indent="0">
+            <a:pPr marL="0" indent="0" algn="ctr">
               <a:lnSpc>
                 <a:spcPct val="125000"/>
               </a:lnSpc>
               <a:buNone/>
             </a:pPr>
             <a:r>
-              <a:rPr lang="en-US" sz="1250" dirty="0">
+              <a:rPr lang="en-US" sz="2000" dirty="0">
                 <a:solidFill>
                   <a:srgbClr val="CADCFC"/>
                 </a:solidFill>
@@ -6021,7 +8761,7 @@
               </a:rPr>
               <a:t>How quickly the team recovers when an incident occurs</a:t>
             </a:r>
-            <a:endParaRPr lang="en-US" sz="1250" dirty="0"/>
+            <a:endParaRPr lang="en-US" sz="2000" dirty="0"/>
           </a:p>
         </p:txBody>
       </p:sp>
@@ -6046,14 +8786,14 @@
           <a:bodyPr wrap="square" lIns="0" tIns="0" rIns="0" bIns="0" rtlCol="0" anchor="ctr"/>
           <a:lstStyle/>
           <a:p>
-            <a:pPr marL="0" indent="0">
+            <a:pPr marL="0" indent="0" algn="ctr">
               <a:lnSpc>
                 <a:spcPct val="125000"/>
               </a:lnSpc>
               <a:buNone/>
             </a:pPr>
             <a:r>
-              <a:rPr lang="en-US" sz="1250" i="1" dirty="0">
+              <a:rPr lang="en-US" sz="2000" i="1" dirty="0">
                 <a:solidFill>
                   <a:srgbClr val="9FB6C7"/>
                 </a:solidFill>
@@ -6063,36 +8803,36 @@
               </a:rPr>
               <a:t>These four metrics — popularized by DORA (DevOps Research and Assessment) — show that speed and stability move together for high-performing teams, not against each other.</a:t>
             </a:r>
-            <a:endParaRPr lang="en-US" sz="1250" dirty="0"/>
-          </a:p>
-        </p:txBody>
-      </p:sp>
-      <p:sp>
-        <p:nvSpPr>
-          <p:cNvPr id="17" name="Text 15"/>
-          <p:cNvSpPr/>
-          <p:nvPr/>
-        </p:nvSpPr>
-        <p:spPr>
-          <a:xfrm>
-            <a:off x="548640" y="6400800"/>
-            <a:ext cx="5486400" cy="274320"/>
-          </a:xfrm>
-          <a:prstGeom prst="rect">
-            <a:avLst/>
-          </a:prstGeom>
-          <a:noFill/>
-          <a:ln/>
-        </p:spPr>
-        <p:txBody>
-          <a:bodyPr wrap="square" lIns="0" tIns="0" rIns="0" bIns="0" rtlCol="0" anchor="ctr"/>
-          <a:lstStyle/>
-          <a:p>
-            <a:pPr marL="0" indent="0">
-              <a:buNone/>
-            </a:pPr>
-            <a:r>
-              <a:rPr lang="en-US" sz="1000" dirty="0">
+            <a:endParaRPr lang="en-US" sz="2000" dirty="0"/>
+          </a:p>
+        </p:txBody>
+      </p:sp>
+      <p:sp>
+        <p:nvSpPr>
+          <p:cNvPr id="18" name="Text 16"/>
+          <p:cNvSpPr/>
+          <p:nvPr/>
+        </p:nvSpPr>
+        <p:spPr>
+          <a:xfrm>
+            <a:off x="11274552" y="6400800"/>
+            <a:ext cx="457200" cy="274320"/>
+          </a:xfrm>
+          <a:prstGeom prst="rect">
+            <a:avLst/>
+          </a:prstGeom>
+          <a:noFill/>
+          <a:ln/>
+        </p:spPr>
+        <p:txBody>
+          <a:bodyPr wrap="square" lIns="0" tIns="0" rIns="0" bIns="0" rtlCol="0" anchor="ctr"/>
+          <a:lstStyle/>
+          <a:p>
+            <a:pPr marL="0" indent="0" algn="ctr">
+              <a:buNone/>
+            </a:pPr>
+            <a:r>
+              <a:rPr lang="en-US" sz="1400" dirty="0">
                 <a:solidFill>
                   <a:srgbClr val="6E8394"/>
                 </a:solidFill>
@@ -6100,48 +8840,9 @@
                 <a:ea typeface="Calibri" pitchFamily="34" charset="-122"/>
                 <a:cs typeface="Calibri" pitchFamily="34" charset="-120"/>
               </a:rPr>
-              <a:t>Systems Analysis &amp; Design  |  Week 1</a:t>
-            </a:r>
-            <a:endParaRPr lang="en-US" sz="1000" dirty="0"/>
-          </a:p>
-        </p:txBody>
-      </p:sp>
-      <p:sp>
-        <p:nvSpPr>
-          <p:cNvPr id="18" name="Text 16"/>
-          <p:cNvSpPr/>
-          <p:nvPr/>
-        </p:nvSpPr>
-        <p:spPr>
-          <a:xfrm>
-            <a:off x="11274552" y="6400800"/>
-            <a:ext cx="457200" cy="274320"/>
-          </a:xfrm>
-          <a:prstGeom prst="rect">
-            <a:avLst/>
-          </a:prstGeom>
-          <a:noFill/>
-          <a:ln/>
-        </p:spPr>
-        <p:txBody>
-          <a:bodyPr wrap="square" lIns="0" tIns="0" rIns="0" bIns="0" rtlCol="0" anchor="ctr"/>
-          <a:lstStyle/>
-          <a:p>
-            <a:pPr marL="0" indent="0" algn="r">
-              <a:buNone/>
-            </a:pPr>
-            <a:r>
-              <a:rPr lang="en-US" sz="1000" dirty="0">
-                <a:solidFill>
-                  <a:srgbClr val="6E8394"/>
-                </a:solidFill>
-                <a:latin typeface="Calibri" pitchFamily="34" charset="0"/>
-                <a:ea typeface="Calibri" pitchFamily="34" charset="-122"/>
-                <a:cs typeface="Calibri" pitchFamily="34" charset="-120"/>
-              </a:rPr>
               <a:t>13</a:t>
             </a:r>
-            <a:endParaRPr lang="en-US" sz="1000" dirty="0"/>
+            <a:endParaRPr lang="en-US" sz="1400" dirty="0"/>
           </a:p>
         </p:txBody>
       </p:sp>
@@ -6279,7 +8980,7 @@
           <a:bodyPr/>
           <a:lstStyle/>
           <a:p>
-            <a:endParaRPr lang="en-US"/>
+            <a:endParaRPr lang="en-US" sz="3200"/>
           </a:p>
         </p:txBody>
       </p:sp>
@@ -6308,7 +9009,7 @@
               <a:buNone/>
             </a:pPr>
             <a:r>
-              <a:rPr lang="en-US" sz="2000" b="1" dirty="0">
+              <a:rPr lang="en-US" sz="3600" b="1" dirty="0">
                 <a:solidFill>
                   <a:srgbClr val="FFFFFF"/>
                 </a:solidFill>
@@ -6318,7 +9019,7 @@
               </a:rPr>
               <a:t>1</a:t>
             </a:r>
-            <a:endParaRPr lang="en-US" sz="2000" dirty="0"/>
+            <a:endParaRPr lang="en-US" sz="3600" dirty="0"/>
           </a:p>
         </p:txBody>
       </p:sp>
@@ -6347,7 +9048,7 @@
               <a:buNone/>
             </a:pPr>
             <a:r>
-              <a:rPr lang="en-US" sz="1600" b="1" dirty="0">
+              <a:rPr lang="en-US" sz="2800" b="1" dirty="0">
                 <a:solidFill>
                   <a:srgbClr val="072B41"/>
                 </a:solidFill>
@@ -6357,7 +9058,7 @@
               </a:rPr>
               <a:t>Internal Developer Platforms</a:t>
             </a:r>
-            <a:endParaRPr lang="en-US" sz="1600" dirty="0"/>
+            <a:endParaRPr lang="en-US" sz="2800" dirty="0"/>
           </a:p>
         </p:txBody>
       </p:sp>
@@ -6386,7 +9087,7 @@
               <a:buNone/>
             </a:pPr>
             <a:r>
-              <a:rPr lang="en-US" sz="1300" dirty="0">
+              <a:rPr lang="en-US" sz="2000" dirty="0">
                 <a:solidFill>
                   <a:srgbClr val="596A78"/>
                 </a:solidFill>
@@ -6396,7 +9097,7 @@
               </a:rPr>
               <a:t>Self-service infrastructure so teams ship without waiting on tickets</a:t>
             </a:r>
-            <a:endParaRPr lang="en-US" sz="1300" dirty="0"/>
+            <a:endParaRPr lang="en-US" sz="2000" dirty="0"/>
           </a:p>
         </p:txBody>
       </p:sp>
@@ -6423,7 +9124,7 @@
           <a:bodyPr/>
           <a:lstStyle/>
           <a:p>
-            <a:endParaRPr lang="en-US"/>
+            <a:endParaRPr lang="en-US" sz="3200"/>
           </a:p>
         </p:txBody>
       </p:sp>
@@ -6452,7 +9153,7 @@
               <a:buNone/>
             </a:pPr>
             <a:r>
-              <a:rPr lang="en-US" sz="2000" b="1" dirty="0">
+              <a:rPr lang="en-US" sz="3600" b="1" dirty="0">
                 <a:solidFill>
                   <a:srgbClr val="FFFFFF"/>
                 </a:solidFill>
@@ -6462,7 +9163,7 @@
               </a:rPr>
               <a:t>2</a:t>
             </a:r>
-            <a:endParaRPr lang="en-US" sz="2000" dirty="0"/>
+            <a:endParaRPr lang="en-US" sz="3600" dirty="0"/>
           </a:p>
         </p:txBody>
       </p:sp>
@@ -6491,7 +9192,7 @@
               <a:buNone/>
             </a:pPr>
             <a:r>
-              <a:rPr lang="en-US" sz="1600" b="1" dirty="0">
+              <a:rPr lang="en-US" sz="2800" b="1" dirty="0">
                 <a:solidFill>
                   <a:srgbClr val="072B41"/>
                 </a:solidFill>
@@ -6501,7 +9202,7 @@
               </a:rPr>
               <a:t>Golden Paths</a:t>
             </a:r>
-            <a:endParaRPr lang="en-US" sz="1600" dirty="0"/>
+            <a:endParaRPr lang="en-US" sz="2800" dirty="0"/>
           </a:p>
         </p:txBody>
       </p:sp>
@@ -6530,7 +9231,7 @@
               <a:buNone/>
             </a:pPr>
             <a:r>
-              <a:rPr lang="en-US" sz="1300" dirty="0">
+              <a:rPr lang="en-US" sz="2000" dirty="0">
                 <a:solidFill>
                   <a:srgbClr val="596A78"/>
                 </a:solidFill>
@@ -6540,7 +9241,7 @@
               </a:rPr>
               <a:t>Opinionated, paved-road templates for common architectures</a:t>
             </a:r>
-            <a:endParaRPr lang="en-US" sz="1300" dirty="0"/>
+            <a:endParaRPr lang="en-US" sz="2000" dirty="0"/>
           </a:p>
         </p:txBody>
       </p:sp>
@@ -6567,7 +9268,7 @@
           <a:bodyPr/>
           <a:lstStyle/>
           <a:p>
-            <a:endParaRPr lang="en-US"/>
+            <a:endParaRPr lang="en-US" sz="3200"/>
           </a:p>
         </p:txBody>
       </p:sp>
@@ -6596,7 +9297,7 @@
               <a:buNone/>
             </a:pPr>
             <a:r>
-              <a:rPr lang="en-US" sz="2000" b="1" dirty="0">
+              <a:rPr lang="en-US" sz="3600" b="1" dirty="0">
                 <a:solidFill>
                   <a:srgbClr val="FFFFFF"/>
                 </a:solidFill>
@@ -6606,7 +9307,7 @@
               </a:rPr>
               <a:t>3</a:t>
             </a:r>
-            <a:endParaRPr lang="en-US" sz="2000" dirty="0"/>
+            <a:endParaRPr lang="en-US" sz="3600" dirty="0"/>
           </a:p>
         </p:txBody>
       </p:sp>
@@ -6635,7 +9336,7 @@
               <a:buNone/>
             </a:pPr>
             <a:r>
-              <a:rPr lang="en-US" sz="1600" b="1" dirty="0">
+              <a:rPr lang="en-US" sz="2800" b="1" dirty="0">
                 <a:solidFill>
                   <a:srgbClr val="072B41"/>
                 </a:solidFill>
@@ -6645,7 +9346,7 @@
               </a:rPr>
               <a:t>Reduced Cognitive Load</a:t>
             </a:r>
-            <a:endParaRPr lang="en-US" sz="1600" dirty="0"/>
+            <a:endParaRPr lang="en-US" sz="2800" dirty="0"/>
           </a:p>
         </p:txBody>
       </p:sp>
@@ -6674,7 +9375,7 @@
               <a:buNone/>
             </a:pPr>
             <a:r>
-              <a:rPr lang="en-US" sz="1300" dirty="0">
+              <a:rPr lang="en-US" sz="2000" dirty="0">
                 <a:solidFill>
                   <a:srgbClr val="596A78"/>
                 </a:solidFill>
@@ -6682,9 +9383,9 @@
                 <a:ea typeface="Calibri" pitchFamily="34" charset="-122"/>
                 <a:cs typeface="Calibri" pitchFamily="34" charset="-120"/>
               </a:rPr>
-              <a:t>Platform teams absorb complexity so product teams focus on business logic</a:t>
-            </a:r>
-            <a:endParaRPr lang="en-US" sz="1300" dirty="0"/>
+              <a:t>Platform teams absorb complexity, so product teams focus on business logic</a:t>
+            </a:r>
+            <a:endParaRPr lang="en-US" sz="2000" dirty="0"/>
           </a:p>
         </p:txBody>
       </p:sp>
@@ -6713,7 +9414,7 @@
           <a:bodyPr/>
           <a:lstStyle/>
           <a:p>
-            <a:endParaRPr lang="en-US"/>
+            <a:endParaRPr lang="en-US" sz="3200"/>
           </a:p>
         </p:txBody>
       </p:sp>
@@ -6742,7 +9443,7 @@
               <a:buNone/>
             </a:pPr>
             <a:r>
-              <a:rPr lang="en-US" sz="1300" i="1" dirty="0">
+              <a:rPr lang="en-US" sz="2000" i="1" dirty="0">
                 <a:solidFill>
                   <a:srgbClr val="072B41"/>
                 </a:solidFill>
@@ -6752,36 +9453,36 @@
               </a:rPr>
               <a:t>Design implication: analysts must design not just the system, but the paths teams take to build it.</a:t>
             </a:r>
-            <a:endParaRPr lang="en-US" sz="1300" dirty="0"/>
-          </a:p>
-        </p:txBody>
-      </p:sp>
-      <p:sp>
-        <p:nvSpPr>
-          <p:cNvPr id="18" name="Text 16"/>
-          <p:cNvSpPr/>
-          <p:nvPr/>
-        </p:nvSpPr>
-        <p:spPr>
-          <a:xfrm>
-            <a:off x="457200" y="6446520"/>
-            <a:ext cx="6400800" cy="274320"/>
-          </a:xfrm>
-          <a:prstGeom prst="rect">
-            <a:avLst/>
-          </a:prstGeom>
-          <a:noFill/>
-          <a:ln/>
-        </p:spPr>
-        <p:txBody>
-          <a:bodyPr wrap="square" lIns="0" tIns="0" rIns="0" bIns="0" rtlCol="0" anchor="ctr"/>
-          <a:lstStyle/>
-          <a:p>
-            <a:pPr marL="0" indent="0" algn="l">
-              <a:buNone/>
-            </a:pPr>
-            <a:r>
-              <a:rPr lang="en-US" sz="1000" dirty="0">
+            <a:endParaRPr lang="en-US" sz="2000" dirty="0"/>
+          </a:p>
+        </p:txBody>
+      </p:sp>
+      <p:sp>
+        <p:nvSpPr>
+          <p:cNvPr id="19" name="Text 17"/>
+          <p:cNvSpPr/>
+          <p:nvPr/>
+        </p:nvSpPr>
+        <p:spPr>
+          <a:xfrm>
+            <a:off x="11274552" y="6446520"/>
+            <a:ext cx="457200" cy="274320"/>
+          </a:xfrm>
+          <a:prstGeom prst="rect">
+            <a:avLst/>
+          </a:prstGeom>
+          <a:noFill/>
+          <a:ln/>
+        </p:spPr>
+        <p:txBody>
+          <a:bodyPr wrap="square" lIns="0" tIns="0" rIns="0" bIns="0" rtlCol="0" anchor="ctr"/>
+          <a:lstStyle/>
+          <a:p>
+            <a:pPr marL="0" indent="0" algn="r">
+              <a:buNone/>
+            </a:pPr>
+            <a:r>
+              <a:rPr lang="en-US" sz="1400" dirty="0">
                 <a:solidFill>
                   <a:srgbClr val="8A9BA8"/>
                 </a:solidFill>
@@ -6789,48 +9490,9 @@
                 <a:ea typeface="Calibri" pitchFamily="34" charset="-122"/>
                 <a:cs typeface="Calibri" pitchFamily="34" charset="-120"/>
               </a:rPr>
-              <a:t>Systems Analysis &amp; Design  |  Week 1</a:t>
-            </a:r>
-            <a:endParaRPr lang="en-US" sz="1000" dirty="0"/>
-          </a:p>
-        </p:txBody>
-      </p:sp>
-      <p:sp>
-        <p:nvSpPr>
-          <p:cNvPr id="19" name="Text 17"/>
-          <p:cNvSpPr/>
-          <p:nvPr/>
-        </p:nvSpPr>
-        <p:spPr>
-          <a:xfrm>
-            <a:off x="11274552" y="6446520"/>
-            <a:ext cx="457200" cy="274320"/>
-          </a:xfrm>
-          <a:prstGeom prst="rect">
-            <a:avLst/>
-          </a:prstGeom>
-          <a:noFill/>
-          <a:ln/>
-        </p:spPr>
-        <p:txBody>
-          <a:bodyPr wrap="square" lIns="0" tIns="0" rIns="0" bIns="0" rtlCol="0" anchor="ctr"/>
-          <a:lstStyle/>
-          <a:p>
-            <a:pPr marL="0" indent="0" algn="r">
-              <a:buNone/>
-            </a:pPr>
-            <a:r>
-              <a:rPr lang="en-US" sz="1000" dirty="0">
-                <a:solidFill>
-                  <a:srgbClr val="8A9BA8"/>
-                </a:solidFill>
-                <a:latin typeface="Calibri" pitchFamily="34" charset="0"/>
-                <a:ea typeface="Calibri" pitchFamily="34" charset="-122"/>
-                <a:cs typeface="Calibri" pitchFamily="34" charset="-120"/>
-              </a:rPr>
               <a:t>14</a:t>
             </a:r>
-            <a:endParaRPr lang="en-US" sz="1000" dirty="0"/>
+            <a:endParaRPr lang="en-US" sz="1400" dirty="0"/>
           </a:p>
         </p:txBody>
       </p:sp>
@@ -6968,7 +9630,7 @@
           <a:bodyPr/>
           <a:lstStyle/>
           <a:p>
-            <a:endParaRPr lang="en-US"/>
+            <a:endParaRPr lang="en-US" sz="3200"/>
           </a:p>
         </p:txBody>
       </p:sp>
@@ -6997,7 +9659,7 @@
               <a:buNone/>
             </a:pPr>
             <a:r>
-              <a:rPr lang="en-US" sz="2000" b="1" dirty="0">
+              <a:rPr lang="en-US" sz="3600" b="1" dirty="0">
                 <a:solidFill>
                   <a:srgbClr val="FFFFFF"/>
                 </a:solidFill>
@@ -7007,7 +9669,7 @@
               </a:rPr>
               <a:t>1</a:t>
             </a:r>
-            <a:endParaRPr lang="en-US" sz="2000" dirty="0"/>
+            <a:endParaRPr lang="en-US" sz="3600" dirty="0"/>
           </a:p>
         </p:txBody>
       </p:sp>
@@ -7036,7 +9698,7 @@
               <a:buNone/>
             </a:pPr>
             <a:r>
-              <a:rPr lang="en-US" sz="1600" b="1" dirty="0">
+              <a:rPr lang="en-US" sz="2800" b="1" dirty="0">
                 <a:solidFill>
                   <a:srgbClr val="072B41"/>
                 </a:solidFill>
@@ -7046,7 +9708,7 @@
               </a:rPr>
               <a:t>Requirements &amp; Review</a:t>
             </a:r>
-            <a:endParaRPr lang="en-US" sz="1600" dirty="0"/>
+            <a:endParaRPr lang="en-US" sz="2800" dirty="0"/>
           </a:p>
         </p:txBody>
       </p:sp>
@@ -7075,7 +9737,7 @@
               <a:buNone/>
             </a:pPr>
             <a:r>
-              <a:rPr lang="en-US" sz="1300" dirty="0">
+              <a:rPr lang="en-US" sz="2000" dirty="0">
                 <a:solidFill>
                   <a:srgbClr val="596A78"/>
                 </a:solidFill>
@@ -7085,7 +9747,7 @@
               </a:rPr>
               <a:t>LLMs assist elicitation, ambiguity detection, and spec review</a:t>
             </a:r>
-            <a:endParaRPr lang="en-US" sz="1300" dirty="0"/>
+            <a:endParaRPr lang="en-US" sz="2000" dirty="0"/>
           </a:p>
         </p:txBody>
       </p:sp>
@@ -7112,7 +9774,7 @@
           <a:bodyPr/>
           <a:lstStyle/>
           <a:p>
-            <a:endParaRPr lang="en-US"/>
+            <a:endParaRPr lang="en-US" sz="3200"/>
           </a:p>
         </p:txBody>
       </p:sp>
@@ -7141,7 +9803,7 @@
               <a:buNone/>
             </a:pPr>
             <a:r>
-              <a:rPr lang="en-US" sz="2000" b="1" dirty="0">
+              <a:rPr lang="en-US" sz="3600" b="1" dirty="0">
                 <a:solidFill>
                   <a:srgbClr val="FFFFFF"/>
                 </a:solidFill>
@@ -7151,7 +9813,7 @@
               </a:rPr>
               <a:t>2</a:t>
             </a:r>
-            <a:endParaRPr lang="en-US" sz="2000" dirty="0"/>
+            <a:endParaRPr lang="en-US" sz="3600" dirty="0"/>
           </a:p>
         </p:txBody>
       </p:sp>
@@ -7180,7 +9842,7 @@
               <a:buNone/>
             </a:pPr>
             <a:r>
-              <a:rPr lang="en-US" sz="1600" b="1" dirty="0">
+              <a:rPr lang="en-US" sz="2800" b="1" dirty="0">
                 <a:solidFill>
                   <a:srgbClr val="072B41"/>
                 </a:solidFill>
@@ -7190,7 +9852,7 @@
               </a:rPr>
               <a:t>Code &amp; Test Generation</a:t>
             </a:r>
-            <a:endParaRPr lang="en-US" sz="1600" dirty="0"/>
+            <a:endParaRPr lang="en-US" sz="2800" dirty="0"/>
           </a:p>
         </p:txBody>
       </p:sp>
@@ -7219,7 +9881,7 @@
               <a:buNone/>
             </a:pPr>
             <a:r>
-              <a:rPr lang="en-US" sz="1300" dirty="0">
+              <a:rPr lang="en-US" sz="2000" dirty="0">
                 <a:solidFill>
                   <a:srgbClr val="596A78"/>
                 </a:solidFill>
@@ -7229,7 +9891,7 @@
               </a:rPr>
               <a:t>AI-assisted scaffolding, refactoring, and test-case generation</a:t>
             </a:r>
-            <a:endParaRPr lang="en-US" sz="1300" dirty="0"/>
+            <a:endParaRPr lang="en-US" sz="2000" dirty="0"/>
           </a:p>
         </p:txBody>
       </p:sp>
@@ -7256,7 +9918,7 @@
           <a:bodyPr/>
           <a:lstStyle/>
           <a:p>
-            <a:endParaRPr lang="en-US"/>
+            <a:endParaRPr lang="en-US" sz="3200"/>
           </a:p>
         </p:txBody>
       </p:sp>
@@ -7285,7 +9947,7 @@
               <a:buNone/>
             </a:pPr>
             <a:r>
-              <a:rPr lang="en-US" sz="2000" b="1" dirty="0">
+              <a:rPr lang="en-US" sz="3600" b="1" dirty="0">
                 <a:solidFill>
                   <a:srgbClr val="FFFFFF"/>
                 </a:solidFill>
@@ -7295,7 +9957,7 @@
               </a:rPr>
               <a:t>3</a:t>
             </a:r>
-            <a:endParaRPr lang="en-US" sz="2000" dirty="0"/>
+            <a:endParaRPr lang="en-US" sz="3600" dirty="0"/>
           </a:p>
         </p:txBody>
       </p:sp>
@@ -7324,7 +9986,7 @@
               <a:buNone/>
             </a:pPr>
             <a:r>
-              <a:rPr lang="en-US" sz="1600" b="1" dirty="0">
+              <a:rPr lang="en-US" sz="2800" b="1" dirty="0">
                 <a:solidFill>
                   <a:srgbClr val="072B41"/>
                 </a:solidFill>
@@ -7334,7 +9996,7 @@
               </a:rPr>
               <a:t>Design-Time Guardrails</a:t>
             </a:r>
-            <a:endParaRPr lang="en-US" sz="1600" dirty="0"/>
+            <a:endParaRPr lang="en-US" sz="2800" dirty="0"/>
           </a:p>
         </p:txBody>
       </p:sp>
@@ -7363,7 +10025,7 @@
               <a:buNone/>
             </a:pPr>
             <a:r>
-              <a:rPr lang="en-US" sz="1300" dirty="0">
+              <a:rPr lang="en-US" sz="2000" dirty="0">
                 <a:solidFill>
                   <a:srgbClr val="596A78"/>
                 </a:solidFill>
@@ -7373,7 +10035,7 @@
               </a:rPr>
               <a:t>Human review, evaluation pipelines, and traceability stay mandatory</a:t>
             </a:r>
-            <a:endParaRPr lang="en-US" sz="1300" dirty="0"/>
+            <a:endParaRPr lang="en-US" sz="2000" dirty="0"/>
           </a:p>
         </p:txBody>
       </p:sp>
@@ -7402,7 +10064,7 @@
           <a:bodyPr/>
           <a:lstStyle/>
           <a:p>
-            <a:endParaRPr lang="en-US"/>
+            <a:endParaRPr lang="en-US" sz="3200"/>
           </a:p>
         </p:txBody>
       </p:sp>
@@ -7431,7 +10093,7 @@
               <a:buNone/>
             </a:pPr>
             <a:r>
-              <a:rPr lang="en-US" sz="1300" i="1" dirty="0">
+              <a:rPr lang="en-US" sz="2000" i="1" dirty="0">
                 <a:solidFill>
                   <a:srgbClr val="072B41"/>
                 </a:solidFill>
@@ -7441,36 +10103,36 @@
               </a:rPr>
               <a:t>This course treats AI as a design-time collaborator, not a replacement for analysis judgment — Week 12 goes deep on this.</a:t>
             </a:r>
-            <a:endParaRPr lang="en-US" sz="1300" dirty="0"/>
-          </a:p>
-        </p:txBody>
-      </p:sp>
-      <p:sp>
-        <p:nvSpPr>
-          <p:cNvPr id="18" name="Text 16"/>
-          <p:cNvSpPr/>
-          <p:nvPr/>
-        </p:nvSpPr>
-        <p:spPr>
-          <a:xfrm>
-            <a:off x="457200" y="6446520"/>
-            <a:ext cx="6400800" cy="274320"/>
-          </a:xfrm>
-          <a:prstGeom prst="rect">
-            <a:avLst/>
-          </a:prstGeom>
-          <a:noFill/>
-          <a:ln/>
-        </p:spPr>
-        <p:txBody>
-          <a:bodyPr wrap="square" lIns="0" tIns="0" rIns="0" bIns="0" rtlCol="0" anchor="ctr"/>
-          <a:lstStyle/>
-          <a:p>
-            <a:pPr marL="0" indent="0" algn="l">
-              <a:buNone/>
-            </a:pPr>
-            <a:r>
-              <a:rPr lang="en-US" sz="1000" dirty="0">
+            <a:endParaRPr lang="en-US" sz="2000" dirty="0"/>
+          </a:p>
+        </p:txBody>
+      </p:sp>
+      <p:sp>
+        <p:nvSpPr>
+          <p:cNvPr id="19" name="Text 17"/>
+          <p:cNvSpPr/>
+          <p:nvPr/>
+        </p:nvSpPr>
+        <p:spPr>
+          <a:xfrm>
+            <a:off x="11274552" y="6446520"/>
+            <a:ext cx="457200" cy="274320"/>
+          </a:xfrm>
+          <a:prstGeom prst="rect">
+            <a:avLst/>
+          </a:prstGeom>
+          <a:noFill/>
+          <a:ln/>
+        </p:spPr>
+        <p:txBody>
+          <a:bodyPr wrap="square" lIns="0" tIns="0" rIns="0" bIns="0" rtlCol="0" anchor="ctr"/>
+          <a:lstStyle/>
+          <a:p>
+            <a:pPr marL="0" indent="0" algn="r">
+              <a:buNone/>
+            </a:pPr>
+            <a:r>
+              <a:rPr lang="en-US" sz="1400" dirty="0">
                 <a:solidFill>
                   <a:srgbClr val="8A9BA8"/>
                 </a:solidFill>
@@ -7478,48 +10140,9 @@
                 <a:ea typeface="Calibri" pitchFamily="34" charset="-122"/>
                 <a:cs typeface="Calibri" pitchFamily="34" charset="-120"/>
               </a:rPr>
-              <a:t>Systems Analysis &amp; Design  |  Week 1</a:t>
-            </a:r>
-            <a:endParaRPr lang="en-US" sz="1000" dirty="0"/>
-          </a:p>
-        </p:txBody>
-      </p:sp>
-      <p:sp>
-        <p:nvSpPr>
-          <p:cNvPr id="19" name="Text 17"/>
-          <p:cNvSpPr/>
-          <p:nvPr/>
-        </p:nvSpPr>
-        <p:spPr>
-          <a:xfrm>
-            <a:off x="11274552" y="6446520"/>
-            <a:ext cx="457200" cy="274320"/>
-          </a:xfrm>
-          <a:prstGeom prst="rect">
-            <a:avLst/>
-          </a:prstGeom>
-          <a:noFill/>
-          <a:ln/>
-        </p:spPr>
-        <p:txBody>
-          <a:bodyPr wrap="square" lIns="0" tIns="0" rIns="0" bIns="0" rtlCol="0" anchor="ctr"/>
-          <a:lstStyle/>
-          <a:p>
-            <a:pPr marL="0" indent="0" algn="r">
-              <a:buNone/>
-            </a:pPr>
-            <a:r>
-              <a:rPr lang="en-US" sz="1000" dirty="0">
-                <a:solidFill>
-                  <a:srgbClr val="8A9BA8"/>
-                </a:solidFill>
-                <a:latin typeface="Calibri" pitchFamily="34" charset="0"/>
-                <a:ea typeface="Calibri" pitchFamily="34" charset="-122"/>
-                <a:cs typeface="Calibri" pitchFamily="34" charset="-120"/>
-              </a:rPr>
               <a:t>15</a:t>
             </a:r>
-            <a:endParaRPr lang="en-US" sz="1000" dirty="0"/>
+            <a:endParaRPr lang="en-US" sz="1400" dirty="0"/>
           </a:p>
         </p:txBody>
       </p:sp>
@@ -7558,33 +10181,6 @@
       </p:grpSpPr>
       <p:sp>
         <p:nvSpPr>
-          <p:cNvPr id="2" name="Shape 0"/>
-          <p:cNvSpPr/>
-          <p:nvPr/>
-        </p:nvSpPr>
-        <p:spPr>
-          <a:xfrm>
-            <a:off x="-1371600" y="4389120"/>
-            <a:ext cx="4572000" cy="4572000"/>
-          </a:xfrm>
-          <a:prstGeom prst="ellipse">
-            <a:avLst/>
-          </a:prstGeom>
-          <a:solidFill>
-            <a:srgbClr val="0B3D5C"/>
-          </a:solidFill>
-          <a:ln/>
-        </p:spPr>
-        <p:txBody>
-          <a:bodyPr/>
-          <a:lstStyle/>
-          <a:p>
-            <a:endParaRPr lang="en-US"/>
-          </a:p>
-        </p:txBody>
-      </p:sp>
-      <p:sp>
-        <p:nvSpPr>
           <p:cNvPr id="3" name="Text 1"/>
           <p:cNvSpPr/>
           <p:nvPr/>
@@ -7669,8 +10265,8 @@
         </p:nvSpPr>
         <p:spPr>
           <a:xfrm>
-            <a:off x="548640" y="1737360"/>
-            <a:ext cx="6675120" cy="2926080"/>
+            <a:off x="548640" y="1508760"/>
+            <a:ext cx="11057823" cy="2960571"/>
           </a:xfrm>
           <a:prstGeom prst="rect">
             <a:avLst/>
@@ -7693,7 +10289,7 @@
               <a:buChar char="▶"/>
             </a:pPr>
             <a:r>
-              <a:rPr lang="en-US" sz="1450" dirty="0">
+              <a:rPr lang="en-US" sz="2400" dirty="0">
                 <a:solidFill>
                   <a:srgbClr val="CADCFC"/>
                 </a:solidFill>
@@ -7703,7 +10299,7 @@
               </a:rPr>
               <a:t>The analyst's role has shifted from gatekeeper to embedded, continuous collaborator</a:t>
             </a:r>
-            <a:endParaRPr lang="en-US" sz="1450" dirty="0"/>
+            <a:endParaRPr lang="en-US" sz="2400" dirty="0"/>
           </a:p>
           <a:p>
             <a:pPr marL="342900" indent="-342900">
@@ -7717,7 +10313,7 @@
               <a:buChar char="▶"/>
             </a:pPr>
             <a:r>
-              <a:rPr lang="en-US" sz="1450" dirty="0">
+              <a:rPr lang="en-US" sz="2400" dirty="0">
                 <a:solidFill>
                   <a:srgbClr val="CADCFC"/>
                 </a:solidFill>
@@ -7727,7 +10323,7 @@
               </a:rPr>
               <a:t>No single SDLC model is "correct" — fit the model to risk, scale, and change tolerance</a:t>
             </a:r>
-            <a:endParaRPr lang="en-US" sz="1450" dirty="0"/>
+            <a:endParaRPr lang="en-US" sz="2400" dirty="0"/>
           </a:p>
           <a:p>
             <a:pPr marL="342900" indent="-342900">
@@ -7741,7 +10337,7 @@
               <a:buChar char="▶"/>
             </a:pPr>
             <a:r>
-              <a:rPr lang="en-US" sz="1450" dirty="0">
+              <a:rPr lang="en-US" sz="2400" dirty="0">
                 <a:solidFill>
                   <a:srgbClr val="CADCFC"/>
                 </a:solidFill>
@@ -7751,7 +10347,7 @@
               </a:rPr>
               <a:t>DevOps reframes delivery as a continuous loop, not a final phase</a:t>
             </a:r>
-            <a:endParaRPr lang="en-US" sz="1450" dirty="0"/>
+            <a:endParaRPr lang="en-US" sz="2400" dirty="0"/>
           </a:p>
           <a:p>
             <a:pPr marL="342900" indent="-342900">
@@ -7765,7 +10361,7 @@
               <a:buChar char="▶"/>
             </a:pPr>
             <a:r>
-              <a:rPr lang="en-US" sz="1450" dirty="0">
+              <a:rPr lang="en-US" sz="2400" dirty="0">
                 <a:solidFill>
                   <a:srgbClr val="CADCFC"/>
                 </a:solidFill>
@@ -7775,46 +10371,7 @@
               </a:rPr>
               <a:t>Platform engineering and AI tooling are now part of the analyst's design toolkit</a:t>
             </a:r>
-            <a:endParaRPr lang="en-US" sz="1450" dirty="0"/>
-          </a:p>
-        </p:txBody>
-      </p:sp>
-      <p:sp>
-        <p:nvSpPr>
-          <p:cNvPr id="10" name="Text 8"/>
-          <p:cNvSpPr/>
-          <p:nvPr/>
-        </p:nvSpPr>
-        <p:spPr>
-          <a:xfrm>
-            <a:off x="548640" y="6400800"/>
-            <a:ext cx="5486400" cy="274320"/>
-          </a:xfrm>
-          <a:prstGeom prst="rect">
-            <a:avLst/>
-          </a:prstGeom>
-          <a:noFill/>
-          <a:ln/>
-        </p:spPr>
-        <p:txBody>
-          <a:bodyPr wrap="square" lIns="0" tIns="0" rIns="0" bIns="0" rtlCol="0" anchor="ctr"/>
-          <a:lstStyle/>
-          <a:p>
-            <a:pPr marL="0" indent="0">
-              <a:buNone/>
-            </a:pPr>
-            <a:r>
-              <a:rPr lang="en-US" sz="1000" dirty="0">
-                <a:solidFill>
-                  <a:srgbClr val="6E8394"/>
-                </a:solidFill>
-                <a:latin typeface="Calibri" pitchFamily="34" charset="0"/>
-                <a:ea typeface="Calibri" pitchFamily="34" charset="-122"/>
-                <a:cs typeface="Calibri" pitchFamily="34" charset="-120"/>
-              </a:rPr>
-              <a:t>Systems Analysis &amp; Design  |  Week 1</a:t>
-            </a:r>
-            <a:endParaRPr lang="en-US" sz="1000" dirty="0"/>
+            <a:endParaRPr lang="en-US" sz="2400" dirty="0"/>
           </a:p>
         </p:txBody>
       </p:sp>
@@ -8020,7 +10577,7 @@
               <a:buNone/>
             </a:pPr>
             <a:r>
-              <a:rPr lang="en-US" sz="1700" b="1" dirty="0">
+              <a:rPr lang="en-US" sz="2400" b="1" dirty="0">
                 <a:solidFill>
                   <a:srgbClr val="072B41"/>
                 </a:solidFill>
@@ -8030,7 +10587,7 @@
               </a:rPr>
               <a:t>Welcome &amp; Course at a Glance</a:t>
             </a:r>
-            <a:endParaRPr lang="en-US" sz="1700" dirty="0"/>
+            <a:endParaRPr lang="en-US" sz="2400" dirty="0"/>
           </a:p>
         </p:txBody>
       </p:sp>
@@ -8059,7 +10616,7 @@
               <a:buNone/>
             </a:pPr>
             <a:r>
-              <a:rPr lang="en-US" sz="1250" dirty="0">
+              <a:rPr lang="en-US" dirty="0">
                 <a:solidFill>
                   <a:srgbClr val="596A78"/>
                 </a:solidFill>
@@ -8069,7 +10626,7 @@
               </a:rPr>
               <a:t>Objectives, structure, and what makes this course different</a:t>
             </a:r>
-            <a:endParaRPr lang="en-US" sz="1250" dirty="0"/>
+            <a:endParaRPr lang="en-US" dirty="0"/>
           </a:p>
         </p:txBody>
       </p:sp>
@@ -8164,7 +10721,7 @@
               <a:buNone/>
             </a:pPr>
             <a:r>
-              <a:rPr lang="en-US" sz="1700" b="1" dirty="0">
+              <a:rPr lang="en-US" sz="2400" b="1" dirty="0">
                 <a:solidFill>
                   <a:srgbClr val="072B41"/>
                 </a:solidFill>
@@ -8174,7 +10731,7 @@
               </a:rPr>
               <a:t>The Systems Analyst — Then &amp; Now</a:t>
             </a:r>
-            <a:endParaRPr lang="en-US" sz="1700" dirty="0"/>
+            <a:endParaRPr lang="en-US" sz="2400" dirty="0"/>
           </a:p>
         </p:txBody>
       </p:sp>
@@ -8203,7 +10760,7 @@
               <a:buNone/>
             </a:pPr>
             <a:r>
-              <a:rPr lang="en-US" sz="1250" dirty="0">
+              <a:rPr lang="en-US" dirty="0">
                 <a:solidFill>
                   <a:srgbClr val="596A78"/>
                 </a:solidFill>
@@ -8213,7 +10770,7 @@
               </a:rPr>
               <a:t>How the role has evolved with modern software practice</a:t>
             </a:r>
-            <a:endParaRPr lang="en-US" sz="1250" dirty="0"/>
+            <a:endParaRPr lang="en-US" dirty="0"/>
           </a:p>
         </p:txBody>
       </p:sp>
@@ -8308,7 +10865,7 @@
               <a:buNone/>
             </a:pPr>
             <a:r>
-              <a:rPr lang="en-US" sz="1700" b="1" dirty="0">
+              <a:rPr lang="en-US" sz="2400" b="1" dirty="0">
                 <a:solidFill>
                   <a:srgbClr val="072B41"/>
                 </a:solidFill>
@@ -8318,7 +10875,7 @@
               </a:rPr>
               <a:t>The SDLC Family of Models</a:t>
             </a:r>
-            <a:endParaRPr lang="en-US" sz="1700" dirty="0"/>
+            <a:endParaRPr lang="en-US" sz="2400" dirty="0"/>
           </a:p>
         </p:txBody>
       </p:sp>
@@ -8347,7 +10904,7 @@
               <a:buNone/>
             </a:pPr>
             <a:r>
-              <a:rPr lang="en-US" sz="1250" dirty="0">
+              <a:rPr lang="en-US" dirty="0">
                 <a:solidFill>
                   <a:srgbClr val="596A78"/>
                 </a:solidFill>
@@ -8357,7 +10914,7 @@
               </a:rPr>
               <a:t>Waterfall, iterative, spiral, agile, and DevOps as a continuum</a:t>
             </a:r>
-            <a:endParaRPr lang="en-US" sz="1250" dirty="0"/>
+            <a:endParaRPr lang="en-US" dirty="0"/>
           </a:p>
         </p:txBody>
       </p:sp>
@@ -8452,7 +11009,7 @@
               <a:buNone/>
             </a:pPr>
             <a:r>
-              <a:rPr lang="en-US" sz="1700" b="1" dirty="0">
+              <a:rPr lang="en-US" sz="2400" b="1" dirty="0">
                 <a:solidFill>
                   <a:srgbClr val="072B41"/>
                 </a:solidFill>
@@ -8462,7 +11019,7 @@
               </a:rPr>
               <a:t>Where the Advances Fit</a:t>
             </a:r>
-            <a:endParaRPr lang="en-US" sz="1700" dirty="0"/>
+            <a:endParaRPr lang="en-US" sz="2400" dirty="0"/>
           </a:p>
         </p:txBody>
       </p:sp>
@@ -8491,7 +11048,7 @@
               <a:buNone/>
             </a:pPr>
             <a:r>
-              <a:rPr lang="en-US" sz="1250" dirty="0">
+              <a:rPr lang="en-US" dirty="0">
                 <a:solidFill>
                   <a:srgbClr val="596A78"/>
                 </a:solidFill>
@@ -8501,7 +11058,7 @@
               </a:rPr>
               <a:t>Platform engineering &amp; AI-augmented development</a:t>
             </a:r>
-            <a:endParaRPr lang="en-US" sz="1250" dirty="0"/>
+            <a:endParaRPr lang="en-US" dirty="0"/>
           </a:p>
         </p:txBody>
       </p:sp>
@@ -8596,7 +11153,7 @@
               <a:buNone/>
             </a:pPr>
             <a:r>
-              <a:rPr lang="en-US" sz="1700" b="1" dirty="0">
+              <a:rPr lang="en-US" sz="2400" b="1" dirty="0">
                 <a:solidFill>
                   <a:srgbClr val="072B41"/>
                 </a:solidFill>
@@ -8606,7 +11163,7 @@
               </a:rPr>
               <a:t>Studio: Team Formation &amp; Project Charter</a:t>
             </a:r>
-            <a:endParaRPr lang="en-US" sz="1700" dirty="0"/>
+            <a:endParaRPr lang="en-US" sz="2400" dirty="0"/>
           </a:p>
         </p:txBody>
       </p:sp>
@@ -8635,7 +11192,7 @@
               <a:buNone/>
             </a:pPr>
             <a:r>
-              <a:rPr lang="en-US" sz="1250" dirty="0">
+              <a:rPr lang="en-US" dirty="0">
                 <a:solidFill>
                   <a:srgbClr val="596A78"/>
                 </a:solidFill>
@@ -8645,36 +11202,36 @@
               </a:rPr>
               <a:t>Hands-on lab to kick off the semester project</a:t>
             </a:r>
-            <a:endParaRPr lang="en-US" sz="1250" dirty="0"/>
-          </a:p>
-        </p:txBody>
-      </p:sp>
-      <p:sp>
-        <p:nvSpPr>
-          <p:cNvPr id="24" name="Text 22"/>
-          <p:cNvSpPr/>
-          <p:nvPr/>
-        </p:nvSpPr>
-        <p:spPr>
-          <a:xfrm>
-            <a:off x="457200" y="6446520"/>
-            <a:ext cx="6400800" cy="274320"/>
-          </a:xfrm>
-          <a:prstGeom prst="rect">
-            <a:avLst/>
-          </a:prstGeom>
-          <a:noFill/>
-          <a:ln/>
-        </p:spPr>
-        <p:txBody>
-          <a:bodyPr wrap="square" lIns="0" tIns="0" rIns="0" bIns="0" rtlCol="0" anchor="ctr"/>
-          <a:lstStyle/>
-          <a:p>
-            <a:pPr marL="0" indent="0" algn="l">
-              <a:buNone/>
-            </a:pPr>
-            <a:r>
-              <a:rPr lang="en-US" sz="1000" dirty="0">
+            <a:endParaRPr lang="en-US" dirty="0"/>
+          </a:p>
+        </p:txBody>
+      </p:sp>
+      <p:sp>
+        <p:nvSpPr>
+          <p:cNvPr id="25" name="Text 23"/>
+          <p:cNvSpPr/>
+          <p:nvPr/>
+        </p:nvSpPr>
+        <p:spPr>
+          <a:xfrm>
+            <a:off x="11274552" y="6446520"/>
+            <a:ext cx="457200" cy="274320"/>
+          </a:xfrm>
+          <a:prstGeom prst="rect">
+            <a:avLst/>
+          </a:prstGeom>
+          <a:noFill/>
+          <a:ln/>
+        </p:spPr>
+        <p:txBody>
+          <a:bodyPr wrap="square" lIns="0" tIns="0" rIns="0" bIns="0" rtlCol="0" anchor="ctr"/>
+          <a:lstStyle/>
+          <a:p>
+            <a:pPr marL="0" indent="0" algn="r">
+              <a:buNone/>
+            </a:pPr>
+            <a:r>
+              <a:rPr lang="en-US" sz="1200" dirty="0">
                 <a:solidFill>
                   <a:srgbClr val="8A9BA8"/>
                 </a:solidFill>
@@ -8682,48 +11239,9 @@
                 <a:ea typeface="Calibri" pitchFamily="34" charset="-122"/>
                 <a:cs typeface="Calibri" pitchFamily="34" charset="-120"/>
               </a:rPr>
-              <a:t>Systems Analysis &amp; Design  |  Week 1</a:t>
-            </a:r>
-            <a:endParaRPr lang="en-US" sz="1000" dirty="0"/>
-          </a:p>
-        </p:txBody>
-      </p:sp>
-      <p:sp>
-        <p:nvSpPr>
-          <p:cNvPr id="25" name="Text 23"/>
-          <p:cNvSpPr/>
-          <p:nvPr/>
-        </p:nvSpPr>
-        <p:spPr>
-          <a:xfrm>
-            <a:off x="11274552" y="6446520"/>
-            <a:ext cx="457200" cy="274320"/>
-          </a:xfrm>
-          <a:prstGeom prst="rect">
-            <a:avLst/>
-          </a:prstGeom>
-          <a:noFill/>
-          <a:ln/>
-        </p:spPr>
-        <p:txBody>
-          <a:bodyPr wrap="square" lIns="0" tIns="0" rIns="0" bIns="0" rtlCol="0" anchor="ctr"/>
-          <a:lstStyle/>
-          <a:p>
-            <a:pPr marL="0" indent="0" algn="r">
-              <a:buNone/>
-            </a:pPr>
-            <a:r>
-              <a:rPr lang="en-US" sz="1000" dirty="0">
-                <a:solidFill>
-                  <a:srgbClr val="8A9BA8"/>
-                </a:solidFill>
-                <a:latin typeface="Calibri" pitchFamily="34" charset="0"/>
-                <a:ea typeface="Calibri" pitchFamily="34" charset="-122"/>
-                <a:cs typeface="Calibri" pitchFamily="34" charset="-120"/>
-              </a:rPr>
               <a:t>2</a:t>
             </a:r>
-            <a:endParaRPr lang="en-US" sz="1000" dirty="0"/>
+            <a:endParaRPr lang="en-US" sz="1200" dirty="0"/>
           </a:p>
         </p:txBody>
       </p:sp>
@@ -8863,7 +11381,7 @@
           <a:bodyPr/>
           <a:lstStyle/>
           <a:p>
-            <a:endParaRPr lang="en-US"/>
+            <a:endParaRPr lang="en-US" sz="2800"/>
           </a:p>
         </p:txBody>
       </p:sp>
@@ -8892,7 +11410,7 @@
           <a:bodyPr/>
           <a:lstStyle/>
           <a:p>
-            <a:endParaRPr lang="en-US"/>
+            <a:endParaRPr lang="en-US" sz="2800"/>
           </a:p>
         </p:txBody>
       </p:sp>
@@ -8921,7 +11439,7 @@
               <a:buNone/>
             </a:pPr>
             <a:r>
-              <a:rPr lang="en-US" sz="1300" b="1" kern="0" spc="150" dirty="0">
+              <a:rPr lang="en-US" b="1" kern="0" spc="150" dirty="0">
                 <a:solidFill>
                   <a:srgbClr val="1C7293"/>
                 </a:solidFill>
@@ -8931,7 +11449,7 @@
               </a:rPr>
               <a:t>CLASSICAL ROLE</a:t>
             </a:r>
-            <a:endParaRPr lang="en-US" sz="1300" dirty="0"/>
+            <a:endParaRPr lang="en-US" dirty="0"/>
           </a:p>
         </p:txBody>
       </p:sp>
@@ -8960,7 +11478,7 @@
               <a:buNone/>
             </a:pPr>
             <a:r>
-              <a:rPr lang="en-US" sz="1300" b="1" kern="0" spc="150" dirty="0">
+              <a:rPr lang="en-US" b="1" kern="0" spc="150" dirty="0">
                 <a:solidFill>
                   <a:srgbClr val="F2A93B"/>
                 </a:solidFill>
@@ -8970,7 +11488,7 @@
               </a:rPr>
               <a:t>MODERN ROLE</a:t>
             </a:r>
-            <a:endParaRPr lang="en-US" sz="1300" dirty="0"/>
+            <a:endParaRPr lang="en-US" dirty="0"/>
           </a:p>
         </p:txBody>
       </p:sp>
@@ -9003,7 +11521,7 @@
               <a:buChar char="●"/>
             </a:pPr>
             <a:r>
-              <a:rPr lang="en-US" sz="1300" dirty="0">
+              <a:rPr lang="en-US" dirty="0">
                 <a:solidFill>
                   <a:srgbClr val="2B2B2B"/>
                 </a:solidFill>
@@ -9013,7 +11531,7 @@
               </a:rPr>
               <a:t>Gathers requirements via structured interviews &amp; documents</a:t>
             </a:r>
-            <a:endParaRPr lang="en-US" sz="1300" dirty="0"/>
+            <a:endParaRPr lang="en-US" dirty="0"/>
           </a:p>
           <a:p>
             <a:pPr marL="342900" indent="-342900">
@@ -9024,7 +11542,7 @@
               <a:buChar char="●"/>
             </a:pPr>
             <a:r>
-              <a:rPr lang="en-US" sz="1300" dirty="0">
+              <a:rPr lang="en-US" dirty="0">
                 <a:solidFill>
                   <a:srgbClr val="2B2B2B"/>
                 </a:solidFill>
@@ -9034,7 +11552,7 @@
               </a:rPr>
               <a:t>Produces detailed up-front specifications</a:t>
             </a:r>
-            <a:endParaRPr lang="en-US" sz="1300" dirty="0"/>
+            <a:endParaRPr lang="en-US" dirty="0"/>
           </a:p>
           <a:p>
             <a:pPr marL="342900" indent="-342900">
@@ -9045,7 +11563,7 @@
               <a:buChar char="●"/>
             </a:pPr>
             <a:r>
-              <a:rPr lang="en-US" sz="1300" dirty="0">
+              <a:rPr lang="en-US" dirty="0">
                 <a:solidFill>
                   <a:srgbClr val="2B2B2B"/>
                 </a:solidFill>
@@ -9055,7 +11573,7 @@
               </a:rPr>
               <a:t>Hands designs to a separate development team</a:t>
             </a:r>
-            <a:endParaRPr lang="en-US" sz="1300" dirty="0"/>
+            <a:endParaRPr lang="en-US" dirty="0"/>
           </a:p>
           <a:p>
             <a:pPr marL="342900" indent="-342900">
@@ -9066,7 +11584,7 @@
               <a:buChar char="●"/>
             </a:pPr>
             <a:r>
-              <a:rPr lang="en-US" sz="1300" dirty="0">
+              <a:rPr lang="en-US" dirty="0">
                 <a:solidFill>
                   <a:srgbClr val="2B2B2B"/>
                 </a:solidFill>
@@ -9076,7 +11594,7 @@
               </a:rPr>
               <a:t>Models with formal, static UML diagrams</a:t>
             </a:r>
-            <a:endParaRPr lang="en-US" sz="1300" dirty="0"/>
+            <a:endParaRPr lang="en-US" dirty="0"/>
           </a:p>
           <a:p>
             <a:pPr marL="342900" indent="-342900">
@@ -9087,7 +11605,7 @@
               <a:buChar char="●"/>
             </a:pPr>
             <a:r>
-              <a:rPr lang="en-US" sz="1300" dirty="0">
+              <a:rPr lang="en-US" dirty="0">
                 <a:solidFill>
                   <a:srgbClr val="2B2B2B"/>
                 </a:solidFill>
@@ -9097,7 +11615,7 @@
               </a:rPr>
               <a:t>Engages primarily at project start and end</a:t>
             </a:r>
-            <a:endParaRPr lang="en-US" sz="1300" dirty="0"/>
+            <a:endParaRPr lang="en-US" dirty="0"/>
           </a:p>
         </p:txBody>
       </p:sp>
@@ -9130,7 +11648,7 @@
               <a:buChar char="●"/>
             </a:pPr>
             <a:r>
-              <a:rPr lang="en-US" sz="1300" dirty="0">
+              <a:rPr lang="en-US" dirty="0">
                 <a:solidFill>
                   <a:srgbClr val="FFFFFF"/>
                 </a:solidFill>
@@ -9140,7 +11658,7 @@
               </a:rPr>
               <a:t>Co-creates requirements continuously with product &amp; users</a:t>
             </a:r>
-            <a:endParaRPr lang="en-US" sz="1300" dirty="0"/>
+            <a:endParaRPr lang="en-US" dirty="0"/>
           </a:p>
           <a:p>
             <a:pPr marL="342900" indent="-342900">
@@ -9151,7 +11669,7 @@
               <a:buChar char="●"/>
             </a:pPr>
             <a:r>
-              <a:rPr lang="en-US" sz="1300" dirty="0">
+              <a:rPr lang="en-US" dirty="0">
                 <a:solidFill>
                   <a:srgbClr val="FFFFFF"/>
                 </a:solidFill>
@@ -9161,7 +11679,7 @@
               </a:rPr>
               <a:t>Designs for change: modular, service-based architectures</a:t>
             </a:r>
-            <a:endParaRPr lang="en-US" sz="1300" dirty="0"/>
+            <a:endParaRPr lang="en-US" dirty="0"/>
           </a:p>
           <a:p>
             <a:pPr marL="342900" indent="-342900">
@@ -9172,7 +11690,7 @@
               <a:buChar char="●"/>
             </a:pPr>
             <a:r>
-              <a:rPr lang="en-US" sz="1300" dirty="0">
+              <a:rPr lang="en-US" dirty="0">
                 <a:solidFill>
                   <a:srgbClr val="FFFFFF"/>
                 </a:solidFill>
@@ -9182,7 +11700,7 @@
               </a:rPr>
               <a:t>Embedded across build, deploy, and operate</a:t>
             </a:r>
-            <a:endParaRPr lang="en-US" sz="1300" dirty="0"/>
+            <a:endParaRPr lang="en-US" dirty="0"/>
           </a:p>
           <a:p>
             <a:pPr marL="342900" indent="-342900">
@@ -9193,7 +11711,7 @@
               <a:buChar char="●"/>
             </a:pPr>
             <a:r>
-              <a:rPr lang="en-US" sz="1300" dirty="0">
+              <a:rPr lang="en-US" dirty="0">
                 <a:solidFill>
                   <a:srgbClr val="FFFFFF"/>
                 </a:solidFill>
@@ -9203,7 +11721,7 @@
               </a:rPr>
               <a:t>Uses lightweight modeling (C4, event storming) + AI tools</a:t>
             </a:r>
-            <a:endParaRPr lang="en-US" sz="1300" dirty="0"/>
+            <a:endParaRPr lang="en-US" dirty="0"/>
           </a:p>
           <a:p>
             <a:pPr marL="342900" indent="-342900">
@@ -9214,7 +11732,7 @@
               <a:buChar char="●"/>
             </a:pPr>
             <a:r>
-              <a:rPr lang="en-US" sz="1300" dirty="0">
+              <a:rPr lang="en-US" dirty="0">
                 <a:solidFill>
                   <a:srgbClr val="FFFFFF"/>
                 </a:solidFill>
@@ -9224,36 +11742,36 @@
               </a:rPr>
               <a:t>Owns quality attributes: security, scalability, observability</a:t>
             </a:r>
-            <a:endParaRPr lang="en-US" sz="1300" dirty="0"/>
-          </a:p>
-        </p:txBody>
-      </p:sp>
-      <p:sp>
-        <p:nvSpPr>
-          <p:cNvPr id="10" name="Text 8"/>
-          <p:cNvSpPr/>
-          <p:nvPr/>
-        </p:nvSpPr>
-        <p:spPr>
-          <a:xfrm>
-            <a:off x="457200" y="6446520"/>
-            <a:ext cx="6400800" cy="274320"/>
-          </a:xfrm>
-          <a:prstGeom prst="rect">
-            <a:avLst/>
-          </a:prstGeom>
-          <a:noFill/>
-          <a:ln/>
-        </p:spPr>
-        <p:txBody>
-          <a:bodyPr wrap="square" lIns="0" tIns="0" rIns="0" bIns="0" rtlCol="0" anchor="ctr"/>
-          <a:lstStyle/>
-          <a:p>
-            <a:pPr marL="0" indent="0" algn="l">
-              <a:buNone/>
-            </a:pPr>
-            <a:r>
-              <a:rPr lang="en-US" sz="1000" dirty="0">
+            <a:endParaRPr lang="en-US" dirty="0"/>
+          </a:p>
+        </p:txBody>
+      </p:sp>
+      <p:sp>
+        <p:nvSpPr>
+          <p:cNvPr id="11" name="Text 9"/>
+          <p:cNvSpPr/>
+          <p:nvPr/>
+        </p:nvSpPr>
+        <p:spPr>
+          <a:xfrm>
+            <a:off x="11274552" y="6446520"/>
+            <a:ext cx="457200" cy="274320"/>
+          </a:xfrm>
+          <a:prstGeom prst="rect">
+            <a:avLst/>
+          </a:prstGeom>
+          <a:noFill/>
+          <a:ln/>
+        </p:spPr>
+        <p:txBody>
+          <a:bodyPr wrap="square" lIns="0" tIns="0" rIns="0" bIns="0" rtlCol="0" anchor="ctr"/>
+          <a:lstStyle/>
+          <a:p>
+            <a:pPr marL="0" indent="0" algn="r">
+              <a:buNone/>
+            </a:pPr>
+            <a:r>
+              <a:rPr lang="en-US" sz="1200" dirty="0">
                 <a:solidFill>
                   <a:srgbClr val="8A9BA8"/>
                 </a:solidFill>
@@ -9261,48 +11779,9 @@
                 <a:ea typeface="Calibri" pitchFamily="34" charset="-122"/>
                 <a:cs typeface="Calibri" pitchFamily="34" charset="-120"/>
               </a:rPr>
-              <a:t>Systems Analysis &amp; Design  |  Week 1</a:t>
-            </a:r>
-            <a:endParaRPr lang="en-US" sz="1000" dirty="0"/>
-          </a:p>
-        </p:txBody>
-      </p:sp>
-      <p:sp>
-        <p:nvSpPr>
-          <p:cNvPr id="11" name="Text 9"/>
-          <p:cNvSpPr/>
-          <p:nvPr/>
-        </p:nvSpPr>
-        <p:spPr>
-          <a:xfrm>
-            <a:off x="11274552" y="6446520"/>
-            <a:ext cx="457200" cy="274320"/>
-          </a:xfrm>
-          <a:prstGeom prst="rect">
-            <a:avLst/>
-          </a:prstGeom>
-          <a:noFill/>
-          <a:ln/>
-        </p:spPr>
-        <p:txBody>
-          <a:bodyPr wrap="square" lIns="0" tIns="0" rIns="0" bIns="0" rtlCol="0" anchor="ctr"/>
-          <a:lstStyle/>
-          <a:p>
-            <a:pPr marL="0" indent="0" algn="r">
-              <a:buNone/>
-            </a:pPr>
-            <a:r>
-              <a:rPr lang="en-US" sz="1000" dirty="0">
-                <a:solidFill>
-                  <a:srgbClr val="8A9BA8"/>
-                </a:solidFill>
-                <a:latin typeface="Calibri" pitchFamily="34" charset="0"/>
-                <a:ea typeface="Calibri" pitchFamily="34" charset="-122"/>
-                <a:cs typeface="Calibri" pitchFamily="34" charset="-120"/>
-              </a:rPr>
               <a:t>4</a:t>
             </a:r>
-            <a:endParaRPr lang="en-US" sz="1000" dirty="0"/>
+            <a:endParaRPr lang="en-US" sz="1200" dirty="0"/>
           </a:p>
         </p:txBody>
       </p:sp>
@@ -9426,7 +11905,7 @@
         <p:spPr>
           <a:xfrm>
             <a:off x="548640" y="1691640"/>
-            <a:ext cx="6492240" cy="2377440"/>
+            <a:ext cx="10058400" cy="2377440"/>
           </a:xfrm>
           <a:prstGeom prst="rect">
             <a:avLst/>
@@ -9445,7 +11924,7 @@
               <a:buNone/>
             </a:pPr>
             <a:r>
-              <a:rPr lang="en-US" sz="1500" dirty="0">
+              <a:rPr lang="en-US" sz="2400" dirty="0">
                 <a:solidFill>
                   <a:srgbClr val="CADCFC"/>
                 </a:solidFill>
@@ -9455,7 +11934,7 @@
               </a:rPr>
               <a:t>Most SA&amp;D texts were written for an era of monoliths and annual releases. Today's systems are built on microservices, deployed continuously, secured by design, and increasingly assembled with AI assistance. </a:t>
             </a:r>
-            <a:endParaRPr lang="en-US" sz="1500" dirty="0"/>
+            <a:endParaRPr lang="en-US" sz="2400" dirty="0"/>
           </a:p>
         </p:txBody>
       </p:sp>
@@ -9489,7 +11968,7 @@
           <a:bodyPr/>
           <a:lstStyle/>
           <a:p>
-            <a:endParaRPr lang="en-US"/>
+            <a:endParaRPr lang="en-US" sz="3200"/>
           </a:p>
         </p:txBody>
       </p:sp>
@@ -9518,7 +11997,7 @@
               <a:buNone/>
             </a:pPr>
             <a:r>
-              <a:rPr lang="en-US" sz="1150" dirty="0">
+              <a:rPr lang="en-US" dirty="0">
                 <a:solidFill>
                   <a:srgbClr val="CADCFC"/>
                 </a:solidFill>
@@ -9528,7 +12007,7 @@
               </a:rPr>
               <a:t>Cloud-native</a:t>
             </a:r>
-            <a:endParaRPr lang="en-US" sz="1150" dirty="0"/>
+            <a:endParaRPr lang="en-US" dirty="0"/>
           </a:p>
         </p:txBody>
       </p:sp>
@@ -9562,7 +12041,7 @@
           <a:bodyPr/>
           <a:lstStyle/>
           <a:p>
-            <a:endParaRPr lang="en-US"/>
+            <a:endParaRPr lang="en-US" sz="3200"/>
           </a:p>
         </p:txBody>
       </p:sp>
@@ -9591,7 +12070,7 @@
               <a:buNone/>
             </a:pPr>
             <a:r>
-              <a:rPr lang="en-US" sz="1150" dirty="0">
+              <a:rPr lang="en-US" dirty="0">
                 <a:solidFill>
                   <a:srgbClr val="CADCFC"/>
                 </a:solidFill>
@@ -9601,7 +12080,7 @@
               </a:rPr>
               <a:t>DevSecOps</a:t>
             </a:r>
-            <a:endParaRPr lang="en-US" sz="1150" dirty="0"/>
+            <a:endParaRPr lang="en-US" dirty="0"/>
           </a:p>
         </p:txBody>
       </p:sp>
@@ -9635,7 +12114,7 @@
           <a:bodyPr/>
           <a:lstStyle/>
           <a:p>
-            <a:endParaRPr lang="en-US"/>
+            <a:endParaRPr lang="en-US" sz="3200"/>
           </a:p>
         </p:txBody>
       </p:sp>
@@ -9664,7 +12143,7 @@
               <a:buNone/>
             </a:pPr>
             <a:r>
-              <a:rPr lang="en-US" sz="1150" dirty="0">
+              <a:rPr lang="en-US" dirty="0">
                 <a:solidFill>
                   <a:srgbClr val="CADCFC"/>
                 </a:solidFill>
@@ -9674,7 +12153,7 @@
               </a:rPr>
               <a:t>AI-assisted SDLC</a:t>
             </a:r>
-            <a:endParaRPr lang="en-US" sz="1150" dirty="0"/>
+            <a:endParaRPr lang="en-US" dirty="0"/>
           </a:p>
         </p:txBody>
       </p:sp>
@@ -9708,7 +12187,7 @@
           <a:bodyPr/>
           <a:lstStyle/>
           <a:p>
-            <a:endParaRPr lang="en-US"/>
+            <a:endParaRPr lang="en-US" sz="3200"/>
           </a:p>
         </p:txBody>
       </p:sp>
@@ -9737,7 +12216,7 @@
               <a:buNone/>
             </a:pPr>
             <a:r>
-              <a:rPr lang="en-US" sz="1150" dirty="0">
+              <a:rPr lang="en-US" dirty="0">
                 <a:solidFill>
                   <a:srgbClr val="CADCFC"/>
                 </a:solidFill>
@@ -9747,7 +12226,7 @@
               </a:rPr>
               <a:t>Event-driven</a:t>
             </a:r>
-            <a:endParaRPr lang="en-US" sz="1150" dirty="0"/>
+            <a:endParaRPr lang="en-US" dirty="0"/>
           </a:p>
         </p:txBody>
       </p:sp>
@@ -9781,7 +12260,7 @@
           <a:bodyPr/>
           <a:lstStyle/>
           <a:p>
-            <a:endParaRPr lang="en-US"/>
+            <a:endParaRPr lang="en-US" sz="3200"/>
           </a:p>
         </p:txBody>
       </p:sp>
@@ -9810,7 +12289,7 @@
               <a:buNone/>
             </a:pPr>
             <a:r>
-              <a:rPr lang="en-US" sz="1150" dirty="0">
+              <a:rPr lang="en-US" dirty="0">
                 <a:solidFill>
                   <a:srgbClr val="CADCFC"/>
                 </a:solidFill>
@@ -9820,46 +12299,7 @@
               </a:rPr>
               <a:t>Platform engineering</a:t>
             </a:r>
-            <a:endParaRPr lang="en-US" sz="1150" dirty="0"/>
-          </a:p>
-        </p:txBody>
-      </p:sp>
-      <p:sp>
-        <p:nvSpPr>
-          <p:cNvPr id="15" name="Text 13"/>
-          <p:cNvSpPr/>
-          <p:nvPr/>
-        </p:nvSpPr>
-        <p:spPr>
-          <a:xfrm>
-            <a:off x="548640" y="6400800"/>
-            <a:ext cx="5486400" cy="274320"/>
-          </a:xfrm>
-          <a:prstGeom prst="rect">
-            <a:avLst/>
-          </a:prstGeom>
-          <a:noFill/>
-          <a:ln/>
-        </p:spPr>
-        <p:txBody>
-          <a:bodyPr wrap="square" lIns="0" tIns="0" rIns="0" bIns="0" rtlCol="0" anchor="ctr"/>
-          <a:lstStyle/>
-          <a:p>
-            <a:pPr marL="0" indent="0">
-              <a:buNone/>
-            </a:pPr>
-            <a:r>
-              <a:rPr lang="en-US" sz="1000" dirty="0">
-                <a:solidFill>
-                  <a:srgbClr val="5C7386"/>
-                </a:solidFill>
-                <a:latin typeface="Calibri" pitchFamily="34" charset="0"/>
-                <a:ea typeface="Calibri" pitchFamily="34" charset="-122"/>
-                <a:cs typeface="Calibri" pitchFamily="34" charset="-120"/>
-              </a:rPr>
-              <a:t>Systems Analysis &amp; Design  |  Week 1</a:t>
-            </a:r>
-            <a:endParaRPr lang="en-US" sz="1000" dirty="0"/>
+            <a:endParaRPr lang="en-US" dirty="0"/>
           </a:p>
         </p:txBody>
       </p:sp>
@@ -9999,7 +12439,7 @@
               <a:buNone/>
             </a:pPr>
             <a:r>
-              <a:rPr lang="en-US" sz="1350" i="1" dirty="0">
+              <a:rPr lang="en-US" sz="2000" i="1" dirty="0">
                 <a:solidFill>
                   <a:srgbClr val="596A78"/>
                 </a:solidFill>
@@ -10009,7 +12449,7 @@
               </a:rPr>
               <a:t>Each generation of process models solved the failures of the one before it.</a:t>
             </a:r>
-            <a:endParaRPr lang="en-US" sz="1350" dirty="0"/>
+            <a:endParaRPr lang="en-US" sz="2000" dirty="0"/>
           </a:p>
         </p:txBody>
       </p:sp>
@@ -10039,7 +12479,7 @@
           <a:bodyPr/>
           <a:lstStyle/>
           <a:p>
-            <a:endParaRPr lang="en-US"/>
+            <a:endParaRPr lang="en-US" sz="3200"/>
           </a:p>
         </p:txBody>
       </p:sp>
@@ -10071,7 +12511,7 @@
           <a:bodyPr/>
           <a:lstStyle/>
           <a:p>
-            <a:endParaRPr lang="en-US"/>
+            <a:endParaRPr lang="en-US" sz="3200"/>
           </a:p>
         </p:txBody>
       </p:sp>
@@ -10100,7 +12540,7 @@
               <a:buNone/>
             </a:pPr>
             <a:r>
-              <a:rPr lang="en-US" sz="1400" b="1" dirty="0">
+              <a:rPr lang="en-US" sz="2400" b="1" dirty="0">
                 <a:solidFill>
                   <a:srgbClr val="072B41"/>
                 </a:solidFill>
@@ -10110,7 +12550,7 @@
               </a:rPr>
               <a:t>Waterfall</a:t>
             </a:r>
-            <a:endParaRPr lang="en-US" sz="1400" dirty="0"/>
+            <a:endParaRPr lang="en-US" sz="2400" dirty="0"/>
           </a:p>
         </p:txBody>
       </p:sp>
@@ -10139,7 +12579,7 @@
               <a:buNone/>
             </a:pPr>
             <a:r>
-              <a:rPr lang="en-US" sz="1200" dirty="0">
+              <a:rPr lang="en-US" sz="2000" dirty="0">
                 <a:solidFill>
                   <a:srgbClr val="7C8A96"/>
                 </a:solidFill>
@@ -10149,7 +12589,7 @@
               </a:rPr>
               <a:t>1970s</a:t>
             </a:r>
-            <a:endParaRPr lang="en-US" sz="1200" dirty="0"/>
+            <a:endParaRPr lang="en-US" sz="2000" dirty="0"/>
           </a:p>
         </p:txBody>
       </p:sp>
@@ -10181,7 +12621,7 @@
           <a:bodyPr/>
           <a:lstStyle/>
           <a:p>
-            <a:endParaRPr lang="en-US"/>
+            <a:endParaRPr lang="en-US" sz="3200"/>
           </a:p>
         </p:txBody>
       </p:sp>
@@ -10210,7 +12650,7 @@
               <a:buNone/>
             </a:pPr>
             <a:r>
-              <a:rPr lang="en-US" sz="1400" b="1" dirty="0">
+              <a:rPr lang="en-US" sz="2400" b="1" dirty="0">
                 <a:solidFill>
                   <a:srgbClr val="072B41"/>
                 </a:solidFill>
@@ -10220,7 +12660,7 @@
               </a:rPr>
               <a:t>Iterative</a:t>
             </a:r>
-            <a:endParaRPr lang="en-US" sz="1400" dirty="0"/>
+            <a:endParaRPr lang="en-US" sz="2400" dirty="0"/>
           </a:p>
         </p:txBody>
       </p:sp>
@@ -10249,7 +12689,7 @@
               <a:buNone/>
             </a:pPr>
             <a:r>
-              <a:rPr lang="en-US" sz="1200" dirty="0">
+              <a:rPr lang="en-US" sz="2000" dirty="0">
                 <a:solidFill>
                   <a:srgbClr val="7C8A96"/>
                 </a:solidFill>
@@ -10259,7 +12699,7 @@
               </a:rPr>
               <a:t>1980s</a:t>
             </a:r>
-            <a:endParaRPr lang="en-US" sz="1200" dirty="0"/>
+            <a:endParaRPr lang="en-US" sz="2000" dirty="0"/>
           </a:p>
         </p:txBody>
       </p:sp>
@@ -10291,7 +12731,7 @@
           <a:bodyPr/>
           <a:lstStyle/>
           <a:p>
-            <a:endParaRPr lang="en-US"/>
+            <a:endParaRPr lang="en-US" sz="3200"/>
           </a:p>
         </p:txBody>
       </p:sp>
@@ -10320,7 +12760,7 @@
               <a:buNone/>
             </a:pPr>
             <a:r>
-              <a:rPr lang="en-US" sz="1400" b="1" dirty="0">
+              <a:rPr lang="en-US" sz="2400" b="1" dirty="0">
                 <a:solidFill>
                   <a:srgbClr val="072B41"/>
                 </a:solidFill>
@@ -10330,7 +12770,7 @@
               </a:rPr>
               <a:t>Spiral</a:t>
             </a:r>
-            <a:endParaRPr lang="en-US" sz="1400" dirty="0"/>
+            <a:endParaRPr lang="en-US" sz="2400" dirty="0"/>
           </a:p>
         </p:txBody>
       </p:sp>
@@ -10359,7 +12799,7 @@
               <a:buNone/>
             </a:pPr>
             <a:r>
-              <a:rPr lang="en-US" sz="1200" dirty="0">
+              <a:rPr lang="en-US" sz="2000" dirty="0">
                 <a:solidFill>
                   <a:srgbClr val="7C8A96"/>
                 </a:solidFill>
@@ -10369,7 +12809,7 @@
               </a:rPr>
               <a:t>1988</a:t>
             </a:r>
-            <a:endParaRPr lang="en-US" sz="1200" dirty="0"/>
+            <a:endParaRPr lang="en-US" sz="2000" dirty="0"/>
           </a:p>
         </p:txBody>
       </p:sp>
@@ -10401,7 +12841,7 @@
           <a:bodyPr/>
           <a:lstStyle/>
           <a:p>
-            <a:endParaRPr lang="en-US"/>
+            <a:endParaRPr lang="en-US" sz="3200"/>
           </a:p>
         </p:txBody>
       </p:sp>
@@ -10430,7 +12870,7 @@
               <a:buNone/>
             </a:pPr>
             <a:r>
-              <a:rPr lang="en-US" sz="1400" b="1" dirty="0">
+              <a:rPr lang="en-US" sz="2400" b="1" dirty="0">
                 <a:solidFill>
                   <a:srgbClr val="072B41"/>
                 </a:solidFill>
@@ -10440,7 +12880,7 @@
               </a:rPr>
               <a:t>Agile</a:t>
             </a:r>
-            <a:endParaRPr lang="en-US" sz="1400" dirty="0"/>
+            <a:endParaRPr lang="en-US" sz="2400" dirty="0"/>
           </a:p>
         </p:txBody>
       </p:sp>
@@ -10469,7 +12909,7 @@
               <a:buNone/>
             </a:pPr>
             <a:r>
-              <a:rPr lang="en-US" sz="1200" dirty="0">
+              <a:rPr lang="en-US" sz="2000" dirty="0">
                 <a:solidFill>
                   <a:srgbClr val="7C8A96"/>
                 </a:solidFill>
@@ -10479,7 +12919,7 @@
               </a:rPr>
               <a:t>2001</a:t>
             </a:r>
-            <a:endParaRPr lang="en-US" sz="1200" dirty="0"/>
+            <a:endParaRPr lang="en-US" sz="2000" dirty="0"/>
           </a:p>
         </p:txBody>
       </p:sp>
@@ -10511,7 +12951,7 @@
           <a:bodyPr/>
           <a:lstStyle/>
           <a:p>
-            <a:endParaRPr lang="en-US"/>
+            <a:endParaRPr lang="en-US" sz="3200"/>
           </a:p>
         </p:txBody>
       </p:sp>
@@ -10540,7 +12980,7 @@
               <a:buNone/>
             </a:pPr>
             <a:r>
-              <a:rPr lang="en-US" sz="1400" b="1" dirty="0">
+              <a:rPr lang="en-US" sz="2400" b="1" dirty="0">
                 <a:solidFill>
                   <a:srgbClr val="072B41"/>
                 </a:solidFill>
@@ -10550,7 +12990,7 @@
               </a:rPr>
               <a:t>DevOps</a:t>
             </a:r>
-            <a:endParaRPr lang="en-US" sz="1400" dirty="0"/>
+            <a:endParaRPr lang="en-US" sz="2400" dirty="0"/>
           </a:p>
         </p:txBody>
       </p:sp>
@@ -10579,7 +13019,7 @@
               <a:buNone/>
             </a:pPr>
             <a:r>
-              <a:rPr lang="en-US" sz="1200" dirty="0">
+              <a:rPr lang="en-US" sz="2000" dirty="0">
                 <a:solidFill>
                   <a:srgbClr val="7C8A96"/>
                 </a:solidFill>
@@ -10589,7 +13029,7 @@
               </a:rPr>
               <a:t>2009→now</a:t>
             </a:r>
-            <a:endParaRPr lang="en-US" sz="1200" dirty="0"/>
+            <a:endParaRPr lang="en-US" sz="2000" dirty="0"/>
           </a:p>
         </p:txBody>
       </p:sp>
@@ -10601,8 +13041,8 @@
         </p:nvSpPr>
         <p:spPr>
           <a:xfrm>
-            <a:off x="1188720" y="5212080"/>
-            <a:ext cx="9784080" cy="548640"/>
+            <a:off x="548640" y="5212080"/>
+            <a:ext cx="10881360" cy="548640"/>
           </a:xfrm>
           <a:prstGeom prst="rect">
             <a:avLst/>
@@ -10618,7 +13058,7 @@
               <a:buNone/>
             </a:pPr>
             <a:r>
-              <a:rPr lang="en-US" sz="1300" i="1" dirty="0">
+              <a:rPr lang="en-US" sz="2000" i="1" dirty="0">
                 <a:solidFill>
                   <a:srgbClr val="1C7293"/>
                 </a:solidFill>
@@ -10628,36 +13068,36 @@
               </a:rPr>
               <a:t>DevOps isn't a phase that ends — it's a continuum of build, deploy, operate, and learn that never stops.</a:t>
             </a:r>
-            <a:endParaRPr lang="en-US" sz="1300" dirty="0"/>
-          </a:p>
-        </p:txBody>
-      </p:sp>
-      <p:sp>
-        <p:nvSpPr>
-          <p:cNvPr id="22" name="Text 20"/>
-          <p:cNvSpPr/>
-          <p:nvPr/>
-        </p:nvSpPr>
-        <p:spPr>
-          <a:xfrm>
-            <a:off x="457200" y="6446520"/>
-            <a:ext cx="6400800" cy="274320"/>
-          </a:xfrm>
-          <a:prstGeom prst="rect">
-            <a:avLst/>
-          </a:prstGeom>
-          <a:noFill/>
-          <a:ln/>
-        </p:spPr>
-        <p:txBody>
-          <a:bodyPr wrap="square" lIns="0" tIns="0" rIns="0" bIns="0" rtlCol="0" anchor="ctr"/>
-          <a:lstStyle/>
-          <a:p>
-            <a:pPr marL="0" indent="0" algn="l">
-              <a:buNone/>
-            </a:pPr>
-            <a:r>
-              <a:rPr lang="en-US" sz="1000" dirty="0">
+            <a:endParaRPr lang="en-US" sz="2000" dirty="0"/>
+          </a:p>
+        </p:txBody>
+      </p:sp>
+      <p:sp>
+        <p:nvSpPr>
+          <p:cNvPr id="23" name="Text 21"/>
+          <p:cNvSpPr/>
+          <p:nvPr/>
+        </p:nvSpPr>
+        <p:spPr>
+          <a:xfrm>
+            <a:off x="11274552" y="6446520"/>
+            <a:ext cx="457200" cy="274320"/>
+          </a:xfrm>
+          <a:prstGeom prst="rect">
+            <a:avLst/>
+          </a:prstGeom>
+          <a:noFill/>
+          <a:ln/>
+        </p:spPr>
+        <p:txBody>
+          <a:bodyPr wrap="square" lIns="0" tIns="0" rIns="0" bIns="0" rtlCol="0" anchor="ctr"/>
+          <a:lstStyle/>
+          <a:p>
+            <a:pPr marL="0" indent="0" algn="r">
+              <a:buNone/>
+            </a:pPr>
+            <a:r>
+              <a:rPr lang="en-US" sz="1400" dirty="0">
                 <a:solidFill>
                   <a:srgbClr val="8A9BA8"/>
                 </a:solidFill>
@@ -10665,48 +13105,9 @@
                 <a:ea typeface="Calibri" pitchFamily="34" charset="-122"/>
                 <a:cs typeface="Calibri" pitchFamily="34" charset="-120"/>
               </a:rPr>
-              <a:t>Systems Analysis &amp; Design  |  Week 1</a:t>
-            </a:r>
-            <a:endParaRPr lang="en-US" sz="1000" dirty="0"/>
-          </a:p>
-        </p:txBody>
-      </p:sp>
-      <p:sp>
-        <p:nvSpPr>
-          <p:cNvPr id="23" name="Text 21"/>
-          <p:cNvSpPr/>
-          <p:nvPr/>
-        </p:nvSpPr>
-        <p:spPr>
-          <a:xfrm>
-            <a:off x="11274552" y="6446520"/>
-            <a:ext cx="457200" cy="274320"/>
-          </a:xfrm>
-          <a:prstGeom prst="rect">
-            <a:avLst/>
-          </a:prstGeom>
-          <a:noFill/>
-          <a:ln/>
-        </p:spPr>
-        <p:txBody>
-          <a:bodyPr wrap="square" lIns="0" tIns="0" rIns="0" bIns="0" rtlCol="0" anchor="ctr"/>
-          <a:lstStyle/>
-          <a:p>
-            <a:pPr marL="0" indent="0" algn="r">
-              <a:buNone/>
-            </a:pPr>
-            <a:r>
-              <a:rPr lang="en-US" sz="1000" dirty="0">
-                <a:solidFill>
-                  <a:srgbClr val="8A9BA8"/>
-                </a:solidFill>
-                <a:latin typeface="Calibri" pitchFamily="34" charset="0"/>
-                <a:ea typeface="Calibri" pitchFamily="34" charset="-122"/>
-                <a:cs typeface="Calibri" pitchFamily="34" charset="-120"/>
-              </a:rPr>
               <a:t>6</a:t>
             </a:r>
-            <a:endParaRPr lang="en-US" sz="1000" dirty="0"/>
+            <a:endParaRPr lang="en-US" sz="1400" dirty="0"/>
           </a:p>
         </p:txBody>
       </p:sp>
@@ -10846,7 +13247,7 @@
           <a:bodyPr/>
           <a:lstStyle/>
           <a:p>
-            <a:endParaRPr lang="en-US"/>
+            <a:endParaRPr lang="en-US" sz="2800"/>
           </a:p>
         </p:txBody>
       </p:sp>
@@ -10875,7 +13276,7 @@
               <a:buNone/>
             </a:pPr>
             <a:r>
-              <a:rPr lang="en-US" sz="1300" b="1" dirty="0">
+              <a:rPr lang="en-US" b="1" dirty="0">
                 <a:solidFill>
                   <a:srgbClr val="FFFFFF"/>
                 </a:solidFill>
@@ -10885,7 +13286,7 @@
               </a:rPr>
               <a:t>Requirements</a:t>
             </a:r>
-            <a:endParaRPr lang="en-US" sz="1300" dirty="0"/>
+            <a:endParaRPr lang="en-US" dirty="0"/>
           </a:p>
         </p:txBody>
       </p:sp>
@@ -10912,7 +13313,7 @@
           <a:bodyPr/>
           <a:lstStyle/>
           <a:p>
-            <a:endParaRPr lang="en-US"/>
+            <a:endParaRPr lang="en-US" sz="2800"/>
           </a:p>
         </p:txBody>
       </p:sp>
@@ -10941,7 +13342,7 @@
           <a:bodyPr/>
           <a:lstStyle/>
           <a:p>
-            <a:endParaRPr lang="en-US"/>
+            <a:endParaRPr lang="en-US" sz="2800"/>
           </a:p>
         </p:txBody>
       </p:sp>
@@ -10970,7 +13371,7 @@
               <a:buNone/>
             </a:pPr>
             <a:r>
-              <a:rPr lang="en-US" sz="1300" b="1" dirty="0">
+              <a:rPr lang="en-US" b="1" dirty="0">
                 <a:solidFill>
                   <a:srgbClr val="FFFFFF"/>
                 </a:solidFill>
@@ -10980,7 +13381,7 @@
               </a:rPr>
               <a:t>Design</a:t>
             </a:r>
-            <a:endParaRPr lang="en-US" sz="1300" dirty="0"/>
+            <a:endParaRPr lang="en-US" dirty="0"/>
           </a:p>
         </p:txBody>
       </p:sp>
@@ -11007,7 +13408,7 @@
           <a:bodyPr/>
           <a:lstStyle/>
           <a:p>
-            <a:endParaRPr lang="en-US"/>
+            <a:endParaRPr lang="en-US" sz="2800"/>
           </a:p>
         </p:txBody>
       </p:sp>
@@ -11036,7 +13437,7 @@
           <a:bodyPr/>
           <a:lstStyle/>
           <a:p>
-            <a:endParaRPr lang="en-US"/>
+            <a:endParaRPr lang="en-US" sz="2800"/>
           </a:p>
         </p:txBody>
       </p:sp>
@@ -11065,7 +13466,7 @@
               <a:buNone/>
             </a:pPr>
             <a:r>
-              <a:rPr lang="en-US" sz="1300" b="1" dirty="0">
+              <a:rPr lang="en-US" b="1" dirty="0">
                 <a:solidFill>
                   <a:srgbClr val="FFFFFF"/>
                 </a:solidFill>
@@ -11075,7 +13476,7 @@
               </a:rPr>
               <a:t>Implementation</a:t>
             </a:r>
-            <a:endParaRPr lang="en-US" sz="1300" dirty="0"/>
+            <a:endParaRPr lang="en-US" dirty="0"/>
           </a:p>
         </p:txBody>
       </p:sp>
@@ -11102,7 +13503,7 @@
           <a:bodyPr/>
           <a:lstStyle/>
           <a:p>
-            <a:endParaRPr lang="en-US"/>
+            <a:endParaRPr lang="en-US" sz="2800"/>
           </a:p>
         </p:txBody>
       </p:sp>
@@ -11131,7 +13532,7 @@
           <a:bodyPr/>
           <a:lstStyle/>
           <a:p>
-            <a:endParaRPr lang="en-US"/>
+            <a:endParaRPr lang="en-US" sz="2800"/>
           </a:p>
         </p:txBody>
       </p:sp>
@@ -11160,7 +13561,7 @@
               <a:buNone/>
             </a:pPr>
             <a:r>
-              <a:rPr lang="en-US" sz="1300" b="1" dirty="0">
+              <a:rPr lang="en-US" b="1" dirty="0">
                 <a:solidFill>
                   <a:srgbClr val="FFFFFF"/>
                 </a:solidFill>
@@ -11170,7 +13571,7 @@
               </a:rPr>
               <a:t>Verification</a:t>
             </a:r>
-            <a:endParaRPr lang="en-US" sz="1300" dirty="0"/>
+            <a:endParaRPr lang="en-US" dirty="0"/>
           </a:p>
         </p:txBody>
       </p:sp>
@@ -11197,7 +13598,7 @@
           <a:bodyPr/>
           <a:lstStyle/>
           <a:p>
-            <a:endParaRPr lang="en-US"/>
+            <a:endParaRPr lang="en-US" sz="2800"/>
           </a:p>
         </p:txBody>
       </p:sp>
@@ -11226,7 +13627,7 @@
           <a:bodyPr/>
           <a:lstStyle/>
           <a:p>
-            <a:endParaRPr lang="en-US"/>
+            <a:endParaRPr lang="en-US" sz="2800"/>
           </a:p>
         </p:txBody>
       </p:sp>
@@ -11255,7 +13656,7 @@
               <a:buNone/>
             </a:pPr>
             <a:r>
-              <a:rPr lang="en-US" sz="1300" b="1" dirty="0">
+              <a:rPr lang="en-US" b="1" dirty="0">
                 <a:solidFill>
                   <a:srgbClr val="FFFFFF"/>
                 </a:solidFill>
@@ -11265,7 +13666,7 @@
               </a:rPr>
               <a:t>Maintenance</a:t>
             </a:r>
-            <a:endParaRPr lang="en-US" sz="1300" dirty="0"/>
+            <a:endParaRPr lang="en-US" dirty="0"/>
           </a:p>
         </p:txBody>
       </p:sp>
@@ -11278,7 +13679,7 @@
         <p:spPr>
           <a:xfrm>
             <a:off x="548640" y="3794760"/>
-            <a:ext cx="10607040" cy="1097280"/>
+            <a:ext cx="10725912" cy="1097280"/>
           </a:xfrm>
           <a:prstGeom prst="rect">
             <a:avLst/>
@@ -11297,7 +13698,7 @@
               <a:buNone/>
             </a:pPr>
             <a:r>
-              <a:rPr lang="en-US" sz="1400" dirty="0">
+              <a:rPr lang="en-US" sz="2000" dirty="0">
                 <a:solidFill>
                   <a:srgbClr val="2B2B2B"/>
                 </a:solidFill>
@@ -11307,7 +13708,7 @@
               </a:rPr>
               <a:t>Strength: predictable, easy to plan and document.</a:t>
             </a:r>
-            <a:endParaRPr lang="en-US" sz="1400" dirty="0"/>
+            <a:endParaRPr lang="en-US" sz="2000" dirty="0"/>
           </a:p>
           <a:p>
             <a:pPr marL="0" indent="0">
@@ -11317,7 +13718,7 @@
               <a:buNone/>
             </a:pPr>
             <a:r>
-              <a:rPr lang="en-US" sz="1400" dirty="0">
+              <a:rPr lang="en-US" sz="2000" dirty="0">
                 <a:solidFill>
                   <a:srgbClr val="2B2B2B"/>
                 </a:solidFill>
@@ -11327,7 +13728,7 @@
               </a:rPr>
               <a:t>Weakness: assumes requirements are known up front — costly to change direction once a phase closes.</a:t>
             </a:r>
-            <a:endParaRPr lang="en-US" sz="1400" dirty="0"/>
+            <a:endParaRPr lang="en-US" sz="2000" dirty="0"/>
           </a:p>
         </p:txBody>
       </p:sp>
@@ -11356,7 +13757,7 @@
           <a:bodyPr/>
           <a:lstStyle/>
           <a:p>
-            <a:endParaRPr lang="en-US"/>
+            <a:endParaRPr lang="en-US" sz="2800"/>
           </a:p>
         </p:txBody>
       </p:sp>
@@ -11385,7 +13786,7 @@
               <a:buNone/>
             </a:pPr>
             <a:r>
-              <a:rPr lang="en-US" sz="1300" i="1" dirty="0">
+              <a:rPr lang="en-US" i="1" dirty="0">
                 <a:solidFill>
                   <a:srgbClr val="072B41"/>
                 </a:solidFill>
@@ -11395,36 +13796,36 @@
               </a:rPr>
               <a:t>Still useful for: fixed-scope contracts, regulated/compliance-heavy systems, hardware-tied releases.</a:t>
             </a:r>
-            <a:endParaRPr lang="en-US" sz="1300" dirty="0"/>
-          </a:p>
-        </p:txBody>
-      </p:sp>
-      <p:sp>
-        <p:nvSpPr>
-          <p:cNvPr id="21" name="Text 19"/>
-          <p:cNvSpPr/>
-          <p:nvPr/>
-        </p:nvSpPr>
-        <p:spPr>
-          <a:xfrm>
-            <a:off x="457200" y="6446520"/>
-            <a:ext cx="6400800" cy="274320"/>
-          </a:xfrm>
-          <a:prstGeom prst="rect">
-            <a:avLst/>
-          </a:prstGeom>
-          <a:noFill/>
-          <a:ln/>
-        </p:spPr>
-        <p:txBody>
-          <a:bodyPr wrap="square" lIns="0" tIns="0" rIns="0" bIns="0" rtlCol="0" anchor="ctr"/>
-          <a:lstStyle/>
-          <a:p>
-            <a:pPr marL="0" indent="0" algn="l">
-              <a:buNone/>
-            </a:pPr>
-            <a:r>
-              <a:rPr lang="en-US" sz="1000" dirty="0">
+            <a:endParaRPr lang="en-US" dirty="0"/>
+          </a:p>
+        </p:txBody>
+      </p:sp>
+      <p:sp>
+        <p:nvSpPr>
+          <p:cNvPr id="22" name="Text 20"/>
+          <p:cNvSpPr/>
+          <p:nvPr/>
+        </p:nvSpPr>
+        <p:spPr>
+          <a:xfrm>
+            <a:off x="11274552" y="6446520"/>
+            <a:ext cx="457200" cy="274320"/>
+          </a:xfrm>
+          <a:prstGeom prst="rect">
+            <a:avLst/>
+          </a:prstGeom>
+          <a:noFill/>
+          <a:ln/>
+        </p:spPr>
+        <p:txBody>
+          <a:bodyPr wrap="square" lIns="0" tIns="0" rIns="0" bIns="0" rtlCol="0" anchor="ctr"/>
+          <a:lstStyle/>
+          <a:p>
+            <a:pPr marL="0" indent="0" algn="r">
+              <a:buNone/>
+            </a:pPr>
+            <a:r>
+              <a:rPr lang="en-US" sz="1200" dirty="0">
                 <a:solidFill>
                   <a:srgbClr val="8A9BA8"/>
                 </a:solidFill>
@@ -11432,48 +13833,9 @@
                 <a:ea typeface="Calibri" pitchFamily="34" charset="-122"/>
                 <a:cs typeface="Calibri" pitchFamily="34" charset="-120"/>
               </a:rPr>
-              <a:t>Systems Analysis &amp; Design  |  Week 1</a:t>
-            </a:r>
-            <a:endParaRPr lang="en-US" sz="1000" dirty="0"/>
-          </a:p>
-        </p:txBody>
-      </p:sp>
-      <p:sp>
-        <p:nvSpPr>
-          <p:cNvPr id="22" name="Text 20"/>
-          <p:cNvSpPr/>
-          <p:nvPr/>
-        </p:nvSpPr>
-        <p:spPr>
-          <a:xfrm>
-            <a:off x="11274552" y="6446520"/>
-            <a:ext cx="457200" cy="274320"/>
-          </a:xfrm>
-          <a:prstGeom prst="rect">
-            <a:avLst/>
-          </a:prstGeom>
-          <a:noFill/>
-          <a:ln/>
-        </p:spPr>
-        <p:txBody>
-          <a:bodyPr wrap="square" lIns="0" tIns="0" rIns="0" bIns="0" rtlCol="0" anchor="ctr"/>
-          <a:lstStyle/>
-          <a:p>
-            <a:pPr marL="0" indent="0" algn="r">
-              <a:buNone/>
-            </a:pPr>
-            <a:r>
-              <a:rPr lang="en-US" sz="1000" dirty="0">
-                <a:solidFill>
-                  <a:srgbClr val="8A9BA8"/>
-                </a:solidFill>
-                <a:latin typeface="Calibri" pitchFamily="34" charset="0"/>
-                <a:ea typeface="Calibri" pitchFamily="34" charset="-122"/>
-                <a:cs typeface="Calibri" pitchFamily="34" charset="-120"/>
-              </a:rPr>
               <a:t>7</a:t>
             </a:r>
-            <a:endParaRPr lang="en-US" sz="1000" dirty="0"/>
+            <a:endParaRPr lang="en-US" sz="1200" dirty="0"/>
           </a:p>
         </p:txBody>
       </p:sp>
@@ -11613,7 +13975,7 @@
           <a:bodyPr/>
           <a:lstStyle/>
           <a:p>
-            <a:endParaRPr lang="en-US"/>
+            <a:endParaRPr lang="en-US" sz="3200"/>
           </a:p>
         </p:txBody>
       </p:sp>
@@ -11642,7 +14004,7 @@
               <a:buNone/>
             </a:pPr>
             <a:r>
-              <a:rPr lang="en-US" sz="1300" b="1" kern="0" spc="150" dirty="0">
+              <a:rPr lang="en-US" sz="2000" b="1" kern="0" spc="150" dirty="0">
                 <a:solidFill>
                   <a:srgbClr val="1C7293"/>
                 </a:solidFill>
@@ -11652,7 +14014,7 @@
               </a:rPr>
               <a:t>ITERATIVE</a:t>
             </a:r>
-            <a:endParaRPr lang="en-US" sz="1300" dirty="0"/>
+            <a:endParaRPr lang="en-US" sz="2000" dirty="0"/>
           </a:p>
         </p:txBody>
       </p:sp>
@@ -11665,7 +14027,7 @@
         <p:spPr>
           <a:xfrm>
             <a:off x="868680" y="2240280"/>
-            <a:ext cx="4572000" cy="914400"/>
+            <a:ext cx="4736432" cy="914400"/>
           </a:xfrm>
           <a:prstGeom prst="rect">
             <a:avLst/>
@@ -11684,7 +14046,7 @@
               <a:buNone/>
             </a:pPr>
             <a:r>
-              <a:rPr lang="en-US" sz="1300" dirty="0">
+              <a:rPr lang="en-US" dirty="0">
                 <a:solidFill>
                   <a:srgbClr val="2B2B2B"/>
                 </a:solidFill>
@@ -11694,7 +14056,7 @@
               </a:rPr>
               <a:t>Build a small slice, learn from it, refine, repeat — each cycle adds working functionality.</a:t>
             </a:r>
-            <a:endParaRPr lang="en-US" sz="1300" dirty="0"/>
+            <a:endParaRPr lang="en-US" dirty="0"/>
           </a:p>
         </p:txBody>
       </p:sp>
@@ -11723,7 +14085,7 @@
           <a:bodyPr/>
           <a:lstStyle/>
           <a:p>
-            <a:endParaRPr lang="en-US"/>
+            <a:endParaRPr lang="en-US" sz="3200"/>
           </a:p>
         </p:txBody>
       </p:sp>
@@ -11752,7 +14114,7 @@
               <a:buNone/>
             </a:pPr>
             <a:r>
-              <a:rPr lang="en-US" sz="1200" b="1" dirty="0">
+              <a:rPr lang="en-US" sz="2000" b="1" dirty="0">
                 <a:solidFill>
                   <a:srgbClr val="FFFFFF"/>
                 </a:solidFill>
@@ -11762,7 +14124,7 @@
               </a:rPr>
               <a:t>Plan</a:t>
             </a:r>
-            <a:endParaRPr lang="en-US" sz="1200" dirty="0"/>
+            <a:endParaRPr lang="en-US" sz="2000" dirty="0"/>
           </a:p>
         </p:txBody>
       </p:sp>
@@ -11789,7 +14151,7 @@
           <a:bodyPr/>
           <a:lstStyle/>
           <a:p>
-            <a:endParaRPr lang="en-US"/>
+            <a:endParaRPr lang="en-US" sz="3200"/>
           </a:p>
         </p:txBody>
       </p:sp>
@@ -11818,7 +14180,7 @@
           <a:bodyPr/>
           <a:lstStyle/>
           <a:p>
-            <a:endParaRPr lang="en-US"/>
+            <a:endParaRPr lang="en-US" sz="3200"/>
           </a:p>
         </p:txBody>
       </p:sp>
@@ -11847,7 +14209,7 @@
               <a:buNone/>
             </a:pPr>
             <a:r>
-              <a:rPr lang="en-US" sz="1200" b="1" dirty="0">
+              <a:rPr lang="en-US" sz="2000" b="1" dirty="0">
                 <a:solidFill>
                   <a:srgbClr val="FFFFFF"/>
                 </a:solidFill>
@@ -11857,7 +14219,7 @@
               </a:rPr>
               <a:t>Build</a:t>
             </a:r>
-            <a:endParaRPr lang="en-US" sz="1200" dirty="0"/>
+            <a:endParaRPr lang="en-US" sz="2000" dirty="0"/>
           </a:p>
         </p:txBody>
       </p:sp>
@@ -11884,7 +14246,7 @@
           <a:bodyPr/>
           <a:lstStyle/>
           <a:p>
-            <a:endParaRPr lang="en-US"/>
+            <a:endParaRPr lang="en-US" sz="3200"/>
           </a:p>
         </p:txBody>
       </p:sp>
@@ -11913,7 +14275,7 @@
           <a:bodyPr/>
           <a:lstStyle/>
           <a:p>
-            <a:endParaRPr lang="en-US"/>
+            <a:endParaRPr lang="en-US" sz="3200"/>
           </a:p>
         </p:txBody>
       </p:sp>
@@ -11942,7 +14304,7 @@
               <a:buNone/>
             </a:pPr>
             <a:r>
-              <a:rPr lang="en-US" sz="1200" b="1" dirty="0">
+              <a:rPr lang="en-US" sz="2000" b="1" dirty="0">
                 <a:solidFill>
                   <a:srgbClr val="FFFFFF"/>
                 </a:solidFill>
@@ -11952,7 +14314,7 @@
               </a:rPr>
               <a:t>Evaluate</a:t>
             </a:r>
-            <a:endParaRPr lang="en-US" sz="1200" dirty="0"/>
+            <a:endParaRPr lang="en-US" sz="2000" dirty="0"/>
           </a:p>
         </p:txBody>
       </p:sp>
@@ -11981,7 +14343,7 @@
               <a:buNone/>
             </a:pPr>
             <a:r>
-              <a:rPr lang="en-US" sz="1150" i="1" dirty="0">
+              <a:rPr lang="en-US" i="1" dirty="0">
                 <a:solidFill>
                   <a:srgbClr val="596A78"/>
                 </a:solidFill>
@@ -11991,7 +14353,7 @@
               </a:rPr>
               <a:t>↻ repeats each cycle</a:t>
             </a:r>
-            <a:endParaRPr lang="en-US" sz="1150" dirty="0"/>
+            <a:endParaRPr lang="en-US" dirty="0"/>
           </a:p>
         </p:txBody>
       </p:sp>
@@ -12020,7 +14382,7 @@
           <a:bodyPr/>
           <a:lstStyle/>
           <a:p>
-            <a:endParaRPr lang="en-US"/>
+            <a:endParaRPr lang="en-US" sz="3200"/>
           </a:p>
         </p:txBody>
       </p:sp>
@@ -12049,7 +14411,7 @@
               <a:buNone/>
             </a:pPr>
             <a:r>
-              <a:rPr lang="en-US" sz="1300" b="1" kern="0" spc="150" dirty="0">
+              <a:rPr lang="en-US" sz="2000" b="1" kern="0" spc="150" dirty="0">
                 <a:solidFill>
                   <a:srgbClr val="F2A93B"/>
                 </a:solidFill>
@@ -12059,7 +14421,7 @@
               </a:rPr>
               <a:t>SPIRAL</a:t>
             </a:r>
-            <a:endParaRPr lang="en-US" sz="1300" dirty="0"/>
+            <a:endParaRPr lang="en-US" sz="2000" dirty="0"/>
           </a:p>
         </p:txBody>
       </p:sp>
@@ -12072,7 +14434,7 @@
         <p:spPr>
           <a:xfrm>
             <a:off x="6629400" y="2240280"/>
-            <a:ext cx="4572000" cy="777240"/>
+            <a:ext cx="4736432" cy="777240"/>
           </a:xfrm>
           <a:prstGeom prst="rect">
             <a:avLst/>
@@ -12091,7 +14453,7 @@
               <a:buNone/>
             </a:pPr>
             <a:r>
-              <a:rPr lang="en-US" sz="1300" dirty="0">
+              <a:rPr lang="en-US" dirty="0">
                 <a:solidFill>
                   <a:srgbClr val="CADCFC"/>
                 </a:solidFill>
@@ -12101,7 +14463,7 @@
               </a:rPr>
               <a:t>Each loop of the spiral repeats four activities, with explicit risk analysis before committing further.</a:t>
             </a:r>
-            <a:endParaRPr lang="en-US" sz="1300" dirty="0"/>
+            <a:endParaRPr lang="en-US" dirty="0"/>
           </a:p>
         </p:txBody>
       </p:sp>
@@ -12130,7 +14492,7 @@
           <a:bodyPr/>
           <a:lstStyle/>
           <a:p>
-            <a:endParaRPr lang="en-US"/>
+            <a:endParaRPr lang="en-US" sz="3200"/>
           </a:p>
         </p:txBody>
       </p:sp>
@@ -12159,7 +14521,7 @@
               <a:buNone/>
             </a:pPr>
             <a:r>
-              <a:rPr lang="en-US" sz="1050" b="1" dirty="0">
+              <a:rPr lang="en-US" sz="1600" b="1" dirty="0">
                 <a:solidFill>
                   <a:srgbClr val="FFFFFF"/>
                 </a:solidFill>
@@ -12169,14 +14531,14 @@
               </a:rPr>
               <a:t>1. Determine</a:t>
             </a:r>
-            <a:endParaRPr lang="en-US" sz="1050" dirty="0"/>
+            <a:endParaRPr lang="en-US" sz="1600" dirty="0"/>
           </a:p>
           <a:p>
             <a:pPr marL="0" indent="0" algn="ctr">
               <a:buNone/>
             </a:pPr>
             <a:r>
-              <a:rPr lang="en-US" sz="1050" b="1" dirty="0">
+              <a:rPr lang="en-US" sz="1600" b="1" dirty="0">
                 <a:solidFill>
                   <a:srgbClr val="FFFFFF"/>
                 </a:solidFill>
@@ -12186,7 +14548,7 @@
               </a:rPr>
               <a:t>Objectives</a:t>
             </a:r>
-            <a:endParaRPr lang="en-US" sz="1050" dirty="0"/>
+            <a:endParaRPr lang="en-US" sz="1600" dirty="0"/>
           </a:p>
         </p:txBody>
       </p:sp>
@@ -12215,7 +14577,7 @@
           <a:bodyPr/>
           <a:lstStyle/>
           <a:p>
-            <a:endParaRPr lang="en-US"/>
+            <a:endParaRPr lang="en-US" sz="3200"/>
           </a:p>
         </p:txBody>
       </p:sp>
@@ -12244,7 +14606,7 @@
               <a:buNone/>
             </a:pPr>
             <a:r>
-              <a:rPr lang="en-US" sz="1050" b="1" dirty="0">
+              <a:rPr lang="en-US" sz="1600" b="1" dirty="0">
                 <a:solidFill>
                   <a:srgbClr val="FFFFFF"/>
                 </a:solidFill>
@@ -12254,14 +14616,14 @@
               </a:rPr>
               <a:t>2. Identify &amp;</a:t>
             </a:r>
-            <a:endParaRPr lang="en-US" sz="1050" dirty="0"/>
+            <a:endParaRPr lang="en-US" sz="1600" dirty="0"/>
           </a:p>
           <a:p>
             <a:pPr marL="0" indent="0" algn="ctr">
               <a:buNone/>
             </a:pPr>
             <a:r>
-              <a:rPr lang="en-US" sz="1050" b="1" dirty="0">
+              <a:rPr lang="en-US" sz="1600" b="1" dirty="0">
                 <a:solidFill>
                   <a:srgbClr val="FFFFFF"/>
                 </a:solidFill>
@@ -12271,7 +14633,7 @@
               </a:rPr>
               <a:t>Resolve Risk</a:t>
             </a:r>
-            <a:endParaRPr lang="en-US" sz="1050" dirty="0"/>
+            <a:endParaRPr lang="en-US" sz="1600" dirty="0"/>
           </a:p>
         </p:txBody>
       </p:sp>
@@ -12300,7 +14662,7 @@
           <a:bodyPr/>
           <a:lstStyle/>
           <a:p>
-            <a:endParaRPr lang="en-US"/>
+            <a:endParaRPr lang="en-US" sz="3200"/>
           </a:p>
         </p:txBody>
       </p:sp>
@@ -12329,7 +14691,7 @@
               <a:buNone/>
             </a:pPr>
             <a:r>
-              <a:rPr lang="en-US" sz="1050" b="1" dirty="0">
+              <a:rPr lang="en-US" sz="1600" b="1" dirty="0">
                 <a:solidFill>
                   <a:srgbClr val="FFFFFF"/>
                 </a:solidFill>
@@ -12339,14 +14701,14 @@
               </a:rPr>
               <a:t>4. Plan Next</a:t>
             </a:r>
-            <a:endParaRPr lang="en-US" sz="1050" dirty="0"/>
+            <a:endParaRPr lang="en-US" sz="1600" dirty="0"/>
           </a:p>
           <a:p>
             <a:pPr marL="0" indent="0" algn="ctr">
               <a:buNone/>
             </a:pPr>
             <a:r>
-              <a:rPr lang="en-US" sz="1050" b="1" dirty="0">
+              <a:rPr lang="en-US" sz="1600" b="1" dirty="0">
                 <a:solidFill>
                   <a:srgbClr val="FFFFFF"/>
                 </a:solidFill>
@@ -12356,7 +14718,7 @@
               </a:rPr>
               <a:t>Iteration</a:t>
             </a:r>
-            <a:endParaRPr lang="en-US" sz="1050" dirty="0"/>
+            <a:endParaRPr lang="en-US" sz="1600" dirty="0"/>
           </a:p>
         </p:txBody>
       </p:sp>
@@ -12385,7 +14747,7 @@
           <a:bodyPr/>
           <a:lstStyle/>
           <a:p>
-            <a:endParaRPr lang="en-US"/>
+            <a:endParaRPr lang="en-US" sz="3200"/>
           </a:p>
         </p:txBody>
       </p:sp>
@@ -12414,7 +14776,7 @@
               <a:buNone/>
             </a:pPr>
             <a:r>
-              <a:rPr lang="en-US" sz="1050" b="1" dirty="0">
+              <a:rPr lang="en-US" sz="1600" b="1" dirty="0">
                 <a:solidFill>
                   <a:srgbClr val="FFFFFF"/>
                 </a:solidFill>
@@ -12424,14 +14786,14 @@
               </a:rPr>
               <a:t>3. Develop &amp;</a:t>
             </a:r>
-            <a:endParaRPr lang="en-US" sz="1050" dirty="0"/>
+            <a:endParaRPr lang="en-US" sz="1600" dirty="0"/>
           </a:p>
           <a:p>
             <a:pPr marL="0" indent="0" algn="ctr">
               <a:buNone/>
             </a:pPr>
             <a:r>
-              <a:rPr lang="en-US" sz="1050" b="1" dirty="0">
+              <a:rPr lang="en-US" sz="1600" b="1" dirty="0">
                 <a:solidFill>
                   <a:srgbClr val="FFFFFF"/>
                 </a:solidFill>
@@ -12441,36 +14803,36 @@
               </a:rPr>
               <a:t>Test</a:t>
             </a:r>
-            <a:endParaRPr lang="en-US" sz="1050" dirty="0"/>
-          </a:p>
-        </p:txBody>
-      </p:sp>
-      <p:sp>
-        <p:nvSpPr>
-          <p:cNvPr id="27" name="Text 25"/>
-          <p:cNvSpPr/>
-          <p:nvPr/>
-        </p:nvSpPr>
-        <p:spPr>
-          <a:xfrm>
-            <a:off x="457200" y="6446520"/>
-            <a:ext cx="6400800" cy="274320"/>
-          </a:xfrm>
-          <a:prstGeom prst="rect">
-            <a:avLst/>
-          </a:prstGeom>
-          <a:noFill/>
-          <a:ln/>
-        </p:spPr>
-        <p:txBody>
-          <a:bodyPr wrap="square" lIns="0" tIns="0" rIns="0" bIns="0" rtlCol="0" anchor="ctr"/>
-          <a:lstStyle/>
-          <a:p>
-            <a:pPr marL="0" indent="0" algn="l">
-              <a:buNone/>
-            </a:pPr>
-            <a:r>
-              <a:rPr lang="en-US" sz="1000" dirty="0">
+            <a:endParaRPr lang="en-US" sz="1600" dirty="0"/>
+          </a:p>
+        </p:txBody>
+      </p:sp>
+      <p:sp>
+        <p:nvSpPr>
+          <p:cNvPr id="28" name="Text 26"/>
+          <p:cNvSpPr/>
+          <p:nvPr/>
+        </p:nvSpPr>
+        <p:spPr>
+          <a:xfrm>
+            <a:off x="11274552" y="6446520"/>
+            <a:ext cx="457200" cy="274320"/>
+          </a:xfrm>
+          <a:prstGeom prst="rect">
+            <a:avLst/>
+          </a:prstGeom>
+          <a:noFill/>
+          <a:ln/>
+        </p:spPr>
+        <p:txBody>
+          <a:bodyPr wrap="square" lIns="0" tIns="0" rIns="0" bIns="0" rtlCol="0" anchor="ctr"/>
+          <a:lstStyle/>
+          <a:p>
+            <a:pPr marL="0" indent="0" algn="r">
+              <a:buNone/>
+            </a:pPr>
+            <a:r>
+              <a:rPr lang="en-US" sz="1400" dirty="0">
                 <a:solidFill>
                   <a:srgbClr val="8A9BA8"/>
                 </a:solidFill>
@@ -12478,48 +14840,9 @@
                 <a:ea typeface="Calibri" pitchFamily="34" charset="-122"/>
                 <a:cs typeface="Calibri" pitchFamily="34" charset="-120"/>
               </a:rPr>
-              <a:t>Systems Analysis &amp; Design  |  Week 1</a:t>
-            </a:r>
-            <a:endParaRPr lang="en-US" sz="1000" dirty="0"/>
-          </a:p>
-        </p:txBody>
-      </p:sp>
-      <p:sp>
-        <p:nvSpPr>
-          <p:cNvPr id="28" name="Text 26"/>
-          <p:cNvSpPr/>
-          <p:nvPr/>
-        </p:nvSpPr>
-        <p:spPr>
-          <a:xfrm>
-            <a:off x="11274552" y="6446520"/>
-            <a:ext cx="457200" cy="274320"/>
-          </a:xfrm>
-          <a:prstGeom prst="rect">
-            <a:avLst/>
-          </a:prstGeom>
-          <a:noFill/>
-          <a:ln/>
-        </p:spPr>
-        <p:txBody>
-          <a:bodyPr wrap="square" lIns="0" tIns="0" rIns="0" bIns="0" rtlCol="0" anchor="ctr"/>
-          <a:lstStyle/>
-          <a:p>
-            <a:pPr marL="0" indent="0" algn="r">
-              <a:buNone/>
-            </a:pPr>
-            <a:r>
-              <a:rPr lang="en-US" sz="1000" dirty="0">
-                <a:solidFill>
-                  <a:srgbClr val="8A9BA8"/>
-                </a:solidFill>
-                <a:latin typeface="Calibri" pitchFamily="34" charset="0"/>
-                <a:ea typeface="Calibri" pitchFamily="34" charset="-122"/>
-                <a:cs typeface="Calibri" pitchFamily="34" charset="-120"/>
-              </a:rPr>
               <a:t>8</a:t>
             </a:r>
-            <a:endParaRPr lang="en-US" sz="1000" dirty="0"/>
+            <a:endParaRPr lang="en-US" sz="1400" dirty="0"/>
           </a:p>
         </p:txBody>
       </p:sp>
@@ -12643,7 +14966,7 @@
         <p:spPr>
           <a:xfrm>
             <a:off x="548640" y="1417320"/>
-            <a:ext cx="10607040" cy="411480"/>
+            <a:ext cx="11064240" cy="411480"/>
           </a:xfrm>
           <a:prstGeom prst="rect">
             <a:avLst/>
@@ -12659,7 +14982,7 @@
               <a:buNone/>
             </a:pPr>
             <a:r>
-              <a:rPr lang="en-US" sz="1350" i="1" dirty="0">
+              <a:rPr lang="en-US" sz="2000" i="1" dirty="0">
                 <a:solidFill>
                   <a:srgbClr val="596A78"/>
                 </a:solidFill>
@@ -12669,7 +14992,7 @@
               </a:rPr>
               <a:t>Short, fixed-length iterations (sprints) deliver working software continuously, guided by customer feedback.</a:t>
             </a:r>
-            <a:endParaRPr lang="en-US" sz="1350" dirty="0"/>
+            <a:endParaRPr lang="en-US" sz="2000" dirty="0"/>
           </a:p>
         </p:txBody>
       </p:sp>
@@ -12682,7 +15005,7 @@
         <p:spPr>
           <a:xfrm>
             <a:off x="1828800" y="2148840"/>
-            <a:ext cx="2377440" cy="960120"/>
+            <a:ext cx="2404084" cy="960120"/>
           </a:xfrm>
           <a:prstGeom prst="roundRect">
             <a:avLst>
@@ -12698,7 +15021,7 @@
           <a:bodyPr/>
           <a:lstStyle/>
           <a:p>
-            <a:endParaRPr lang="en-US"/>
+            <a:endParaRPr lang="en-US" sz="3200"/>
           </a:p>
         </p:txBody>
       </p:sp>
@@ -12711,7 +15034,7 @@
         <p:spPr>
           <a:xfrm>
             <a:off x="1828800" y="2148840"/>
-            <a:ext cx="2377440" cy="960120"/>
+            <a:ext cx="2404084" cy="960120"/>
           </a:xfrm>
           <a:prstGeom prst="rect">
             <a:avLst/>
@@ -12727,7 +15050,7 @@
               <a:buNone/>
             </a:pPr>
             <a:r>
-              <a:rPr lang="en-US" sz="1400" b="1" dirty="0">
+              <a:rPr lang="en-US" sz="2400" b="1" dirty="0">
                 <a:solidFill>
                   <a:srgbClr val="FFFFFF"/>
                 </a:solidFill>
@@ -12737,7 +15060,7 @@
               </a:rPr>
               <a:t>Plan Sprint</a:t>
             </a:r>
-            <a:endParaRPr lang="en-US" sz="1400" dirty="0"/>
+            <a:endParaRPr lang="en-US" sz="2400" dirty="0"/>
           </a:p>
         </p:txBody>
       </p:sp>
@@ -12750,7 +15073,7 @@
         <p:spPr>
           <a:xfrm>
             <a:off x="7406640" y="2148840"/>
-            <a:ext cx="2377440" cy="960120"/>
+            <a:ext cx="2404084" cy="960120"/>
           </a:xfrm>
           <a:prstGeom prst="roundRect">
             <a:avLst>
@@ -12766,7 +15089,7 @@
           <a:bodyPr/>
           <a:lstStyle/>
           <a:p>
-            <a:endParaRPr lang="en-US"/>
+            <a:endParaRPr lang="en-US" sz="3200"/>
           </a:p>
         </p:txBody>
       </p:sp>
@@ -12779,7 +15102,7 @@
         <p:spPr>
           <a:xfrm>
             <a:off x="7406640" y="2148840"/>
-            <a:ext cx="2377440" cy="960120"/>
+            <a:ext cx="2404084" cy="960120"/>
           </a:xfrm>
           <a:prstGeom prst="rect">
             <a:avLst/>
@@ -12795,7 +15118,7 @@
               <a:buNone/>
             </a:pPr>
             <a:r>
-              <a:rPr lang="en-US" sz="1400" b="1" dirty="0">
+              <a:rPr lang="en-US" sz="2400" b="1" dirty="0">
                 <a:solidFill>
                   <a:srgbClr val="FFFFFF"/>
                 </a:solidFill>
@@ -12805,7 +15128,7 @@
               </a:rPr>
               <a:t>Build</a:t>
             </a:r>
-            <a:endParaRPr lang="en-US" sz="1400" dirty="0"/>
+            <a:endParaRPr lang="en-US" sz="2400" dirty="0"/>
           </a:p>
         </p:txBody>
       </p:sp>
@@ -12818,7 +15141,7 @@
         <p:spPr>
           <a:xfrm>
             <a:off x="7406640" y="4160520"/>
-            <a:ext cx="2377440" cy="960120"/>
+            <a:ext cx="2404084" cy="960120"/>
           </a:xfrm>
           <a:prstGeom prst="roundRect">
             <a:avLst>
@@ -12834,7 +15157,7 @@
           <a:bodyPr/>
           <a:lstStyle/>
           <a:p>
-            <a:endParaRPr lang="en-US"/>
+            <a:endParaRPr lang="en-US" sz="3200"/>
           </a:p>
         </p:txBody>
       </p:sp>
@@ -12847,7 +15170,7 @@
         <p:spPr>
           <a:xfrm>
             <a:off x="7406640" y="4160520"/>
-            <a:ext cx="2377440" cy="960120"/>
+            <a:ext cx="2404084" cy="960120"/>
           </a:xfrm>
           <a:prstGeom prst="rect">
             <a:avLst/>
@@ -12863,7 +15186,7 @@
               <a:buNone/>
             </a:pPr>
             <a:r>
-              <a:rPr lang="en-US" sz="1400" b="1" dirty="0">
+              <a:rPr lang="en-US" sz="2400" b="1" dirty="0">
                 <a:solidFill>
                   <a:srgbClr val="FFFFFF"/>
                 </a:solidFill>
@@ -12873,7 +15196,7 @@
               </a:rPr>
               <a:t>Test &amp; Review</a:t>
             </a:r>
-            <a:endParaRPr lang="en-US" sz="1400" dirty="0"/>
+            <a:endParaRPr lang="en-US" sz="2400" dirty="0"/>
           </a:p>
         </p:txBody>
       </p:sp>
@@ -12886,7 +15209,7 @@
         <p:spPr>
           <a:xfrm>
             <a:off x="1828800" y="4160520"/>
-            <a:ext cx="2377440" cy="960120"/>
+            <a:ext cx="2404084" cy="960120"/>
           </a:xfrm>
           <a:prstGeom prst="roundRect">
             <a:avLst>
@@ -12902,7 +15225,7 @@
           <a:bodyPr/>
           <a:lstStyle/>
           <a:p>
-            <a:endParaRPr lang="en-US"/>
+            <a:endParaRPr lang="en-US" sz="3200"/>
           </a:p>
         </p:txBody>
       </p:sp>
@@ -12915,7 +15238,7 @@
         <p:spPr>
           <a:xfrm>
             <a:off x="1828800" y="4160520"/>
-            <a:ext cx="2377440" cy="960120"/>
+            <a:ext cx="2404084" cy="960120"/>
           </a:xfrm>
           <a:prstGeom prst="rect">
             <a:avLst/>
@@ -12931,7 +15254,7 @@
               <a:buNone/>
             </a:pPr>
             <a:r>
-              <a:rPr lang="en-US" sz="1400" b="1" dirty="0">
+              <a:rPr lang="en-US" sz="2400" b="1" dirty="0">
                 <a:solidFill>
                   <a:srgbClr val="FFFFFF"/>
                 </a:solidFill>
@@ -12941,7 +15264,7 @@
               </a:rPr>
               <a:t>Retrospective</a:t>
             </a:r>
-            <a:endParaRPr lang="en-US" sz="1400" dirty="0"/>
+            <a:endParaRPr lang="en-US" sz="2400" dirty="0"/>
           </a:p>
         </p:txBody>
       </p:sp>
@@ -12953,8 +15276,8 @@
         </p:nvSpPr>
         <p:spPr>
           <a:xfrm>
-            <a:off x="5576976" y="2491740"/>
-            <a:ext cx="822960" cy="274320"/>
+            <a:off x="5576975" y="2491740"/>
+            <a:ext cx="832183" cy="274320"/>
           </a:xfrm>
           <a:prstGeom prst="rightArrow">
             <a:avLst/>
@@ -12968,7 +15291,7 @@
           <a:bodyPr/>
           <a:lstStyle/>
           <a:p>
-            <a:endParaRPr lang="en-US"/>
+            <a:endParaRPr lang="en-US" sz="3200"/>
           </a:p>
         </p:txBody>
       </p:sp>
@@ -12981,7 +15304,7 @@
         <p:spPr>
           <a:xfrm>
             <a:off x="8458200" y="3200400"/>
-            <a:ext cx="274320" cy="868680"/>
+            <a:ext cx="277394" cy="868680"/>
           </a:xfrm>
           <a:prstGeom prst="downArrow">
             <a:avLst/>
@@ -12995,7 +15318,7 @@
           <a:bodyPr/>
           <a:lstStyle/>
           <a:p>
-            <a:endParaRPr lang="en-US"/>
+            <a:endParaRPr lang="en-US" sz="3200"/>
           </a:p>
         </p:txBody>
       </p:sp>
@@ -13007,8 +15330,8 @@
         </p:nvSpPr>
         <p:spPr>
           <a:xfrm>
-            <a:off x="5576976" y="4503420"/>
-            <a:ext cx="822960" cy="274320"/>
+            <a:off x="5576975" y="4503420"/>
+            <a:ext cx="832183" cy="274320"/>
           </a:xfrm>
           <a:prstGeom prst="leftArrow">
             <a:avLst/>
@@ -13022,7 +15345,7 @@
           <a:bodyPr/>
           <a:lstStyle/>
           <a:p>
-            <a:endParaRPr lang="en-US"/>
+            <a:endParaRPr lang="en-US" sz="3200"/>
           </a:p>
         </p:txBody>
       </p:sp>
@@ -13035,7 +15358,7 @@
         <p:spPr>
           <a:xfrm>
             <a:off x="2880360" y="3200400"/>
-            <a:ext cx="274320" cy="868680"/>
+            <a:ext cx="277394" cy="868680"/>
           </a:xfrm>
           <a:prstGeom prst="upArrow">
             <a:avLst/>
@@ -13049,7 +15372,7 @@
           <a:bodyPr/>
           <a:lstStyle/>
           <a:p>
-            <a:endParaRPr lang="en-US"/>
+            <a:endParaRPr lang="en-US" sz="3200"/>
           </a:p>
         </p:txBody>
       </p:sp>
@@ -13062,7 +15385,7 @@
         <p:spPr>
           <a:xfrm>
             <a:off x="4251960" y="3451860"/>
-            <a:ext cx="3108960" cy="365760"/>
+            <a:ext cx="3143802" cy="365760"/>
           </a:xfrm>
           <a:prstGeom prst="rect">
             <a:avLst/>
@@ -13078,7 +15401,7 @@
               <a:buNone/>
             </a:pPr>
             <a:r>
-              <a:rPr lang="en-US" sz="1200" i="1" dirty="0">
+              <a:rPr lang="en-US" sz="2000" i="1" dirty="0">
                 <a:solidFill>
                   <a:srgbClr val="7C8A96"/>
                 </a:solidFill>
@@ -13088,36 +15411,36 @@
               </a:rPr>
               <a:t>2–4 week cycle</a:t>
             </a:r>
-            <a:endParaRPr lang="en-US" sz="1200" dirty="0"/>
-          </a:p>
-        </p:txBody>
-      </p:sp>
-      <p:sp>
-        <p:nvSpPr>
-          <p:cNvPr id="18" name="Text 16"/>
-          <p:cNvSpPr/>
-          <p:nvPr/>
-        </p:nvSpPr>
-        <p:spPr>
-          <a:xfrm>
-            <a:off x="457200" y="6446520"/>
-            <a:ext cx="6400800" cy="274320"/>
-          </a:xfrm>
-          <a:prstGeom prst="rect">
-            <a:avLst/>
-          </a:prstGeom>
-          <a:noFill/>
-          <a:ln/>
-        </p:spPr>
-        <p:txBody>
-          <a:bodyPr wrap="square" lIns="0" tIns="0" rIns="0" bIns="0" rtlCol="0" anchor="ctr"/>
-          <a:lstStyle/>
-          <a:p>
-            <a:pPr marL="0" indent="0" algn="l">
-              <a:buNone/>
-            </a:pPr>
-            <a:r>
-              <a:rPr lang="en-US" sz="1000" dirty="0">
+            <a:endParaRPr lang="en-US" sz="2000" dirty="0"/>
+          </a:p>
+        </p:txBody>
+      </p:sp>
+      <p:sp>
+        <p:nvSpPr>
+          <p:cNvPr id="19" name="Text 17"/>
+          <p:cNvSpPr/>
+          <p:nvPr/>
+        </p:nvSpPr>
+        <p:spPr>
+          <a:xfrm>
+            <a:off x="11274552" y="6446520"/>
+            <a:ext cx="462324" cy="274320"/>
+          </a:xfrm>
+          <a:prstGeom prst="rect">
+            <a:avLst/>
+          </a:prstGeom>
+          <a:noFill/>
+          <a:ln/>
+        </p:spPr>
+        <p:txBody>
+          <a:bodyPr wrap="square" lIns="0" tIns="0" rIns="0" bIns="0" rtlCol="0" anchor="ctr"/>
+          <a:lstStyle/>
+          <a:p>
+            <a:pPr marL="0" indent="0" algn="r">
+              <a:buNone/>
+            </a:pPr>
+            <a:r>
+              <a:rPr lang="en-US" sz="1400" dirty="0">
                 <a:solidFill>
                   <a:srgbClr val="8A9BA8"/>
                 </a:solidFill>
@@ -13125,48 +15448,9 @@
                 <a:ea typeface="Calibri" pitchFamily="34" charset="-122"/>
                 <a:cs typeface="Calibri" pitchFamily="34" charset="-120"/>
               </a:rPr>
-              <a:t>Systems Analysis &amp; Design  |  Week 1</a:t>
-            </a:r>
-            <a:endParaRPr lang="en-US" sz="1000" dirty="0"/>
-          </a:p>
-        </p:txBody>
-      </p:sp>
-      <p:sp>
-        <p:nvSpPr>
-          <p:cNvPr id="19" name="Text 17"/>
-          <p:cNvSpPr/>
-          <p:nvPr/>
-        </p:nvSpPr>
-        <p:spPr>
-          <a:xfrm>
-            <a:off x="11274552" y="6446520"/>
-            <a:ext cx="457200" cy="274320"/>
-          </a:xfrm>
-          <a:prstGeom prst="rect">
-            <a:avLst/>
-          </a:prstGeom>
-          <a:noFill/>
-          <a:ln/>
-        </p:spPr>
-        <p:txBody>
-          <a:bodyPr wrap="square" lIns="0" tIns="0" rIns="0" bIns="0" rtlCol="0" anchor="ctr"/>
-          <a:lstStyle/>
-          <a:p>
-            <a:pPr marL="0" indent="0" algn="r">
-              <a:buNone/>
-            </a:pPr>
-            <a:r>
-              <a:rPr lang="en-US" sz="1000" dirty="0">
-                <a:solidFill>
-                  <a:srgbClr val="8A9BA8"/>
-                </a:solidFill>
-                <a:latin typeface="Calibri" pitchFamily="34" charset="0"/>
-                <a:ea typeface="Calibri" pitchFamily="34" charset="-122"/>
-                <a:cs typeface="Calibri" pitchFamily="34" charset="-120"/>
-              </a:rPr>
               <a:t>9</a:t>
             </a:r>
-            <a:endParaRPr lang="en-US" sz="1000" dirty="0"/>
+            <a:endParaRPr lang="en-US" sz="1400" dirty="0"/>
           </a:p>
         </p:txBody>
       </p:sp>
@@ -13306,7 +15590,7 @@
           <a:bodyPr/>
           <a:lstStyle/>
           <a:p>
-            <a:endParaRPr lang="en-US"/>
+            <a:endParaRPr lang="en-US" sz="3200"/>
           </a:p>
         </p:txBody>
       </p:sp>
@@ -13335,7 +15619,7 @@
               <a:buNone/>
             </a:pPr>
             <a:r>
-              <a:rPr lang="en-US" sz="1400" b="1" dirty="0">
+              <a:rPr lang="en-US" sz="2400" b="1" dirty="0">
                 <a:solidFill>
                   <a:srgbClr val="FFFFFF"/>
                 </a:solidFill>
@@ -13345,7 +15629,7 @@
               </a:rPr>
               <a:t>Plan</a:t>
             </a:r>
-            <a:endParaRPr lang="en-US" sz="1400" dirty="0"/>
+            <a:endParaRPr lang="en-US" sz="2400" dirty="0"/>
           </a:p>
         </p:txBody>
       </p:sp>
@@ -13372,7 +15656,7 @@
           <a:bodyPr/>
           <a:lstStyle/>
           <a:p>
-            <a:endParaRPr lang="en-US"/>
+            <a:endParaRPr lang="en-US" sz="3200"/>
           </a:p>
         </p:txBody>
       </p:sp>
@@ -13401,7 +15685,7 @@
           <a:bodyPr/>
           <a:lstStyle/>
           <a:p>
-            <a:endParaRPr lang="en-US"/>
+            <a:endParaRPr lang="en-US" sz="3200"/>
           </a:p>
         </p:txBody>
       </p:sp>
@@ -13430,7 +15714,7 @@
               <a:buNone/>
             </a:pPr>
             <a:r>
-              <a:rPr lang="en-US" sz="1400" b="1" dirty="0">
+              <a:rPr lang="en-US" sz="2400" b="1" dirty="0">
                 <a:solidFill>
                   <a:srgbClr val="FFFFFF"/>
                 </a:solidFill>
@@ -13440,7 +15724,7 @@
               </a:rPr>
               <a:t>Code</a:t>
             </a:r>
-            <a:endParaRPr lang="en-US" sz="1400" dirty="0"/>
+            <a:endParaRPr lang="en-US" sz="2400" dirty="0"/>
           </a:p>
         </p:txBody>
       </p:sp>
@@ -13467,7 +15751,7 @@
           <a:bodyPr/>
           <a:lstStyle/>
           <a:p>
-            <a:endParaRPr lang="en-US"/>
+            <a:endParaRPr lang="en-US" sz="3200"/>
           </a:p>
         </p:txBody>
       </p:sp>
@@ -13496,7 +15780,7 @@
           <a:bodyPr/>
           <a:lstStyle/>
           <a:p>
-            <a:endParaRPr lang="en-US"/>
+            <a:endParaRPr lang="en-US" sz="3200"/>
           </a:p>
         </p:txBody>
       </p:sp>
@@ -13525,7 +15809,7 @@
               <a:buNone/>
             </a:pPr>
             <a:r>
-              <a:rPr lang="en-US" sz="1400" b="1" dirty="0">
+              <a:rPr lang="en-US" sz="2400" b="1" dirty="0">
                 <a:solidFill>
                   <a:srgbClr val="FFFFFF"/>
                 </a:solidFill>
@@ -13535,7 +15819,7 @@
               </a:rPr>
               <a:t>Build</a:t>
             </a:r>
-            <a:endParaRPr lang="en-US" sz="1400" dirty="0"/>
+            <a:endParaRPr lang="en-US" sz="2400" dirty="0"/>
           </a:p>
         </p:txBody>
       </p:sp>
@@ -13562,7 +15846,7 @@
           <a:bodyPr/>
           <a:lstStyle/>
           <a:p>
-            <a:endParaRPr lang="en-US"/>
+            <a:endParaRPr lang="en-US" sz="3200"/>
           </a:p>
         </p:txBody>
       </p:sp>
@@ -13591,7 +15875,7 @@
           <a:bodyPr/>
           <a:lstStyle/>
           <a:p>
-            <a:endParaRPr lang="en-US"/>
+            <a:endParaRPr lang="en-US" sz="3200"/>
           </a:p>
         </p:txBody>
       </p:sp>
@@ -13620,7 +15904,7 @@
               <a:buNone/>
             </a:pPr>
             <a:r>
-              <a:rPr lang="en-US" sz="1400" b="1" dirty="0">
+              <a:rPr lang="en-US" sz="2400" b="1" dirty="0">
                 <a:solidFill>
                   <a:srgbClr val="FFFFFF"/>
                 </a:solidFill>
@@ -13630,7 +15914,7 @@
               </a:rPr>
               <a:t>Test</a:t>
             </a:r>
-            <a:endParaRPr lang="en-US" sz="1400" dirty="0"/>
+            <a:endParaRPr lang="en-US" sz="2400" dirty="0"/>
           </a:p>
         </p:txBody>
       </p:sp>
@@ -13659,7 +15943,7 @@
           <a:bodyPr/>
           <a:lstStyle/>
           <a:p>
-            <a:endParaRPr lang="en-US"/>
+            <a:endParaRPr lang="en-US" sz="3200"/>
           </a:p>
         </p:txBody>
       </p:sp>
@@ -13688,7 +15972,7 @@
               <a:buNone/>
             </a:pPr>
             <a:r>
-              <a:rPr lang="en-US" sz="1400" b="1" dirty="0">
+              <a:rPr lang="en-US" sz="2400" b="1" dirty="0">
                 <a:solidFill>
                   <a:srgbClr val="FFFFFF"/>
                 </a:solidFill>
@@ -13698,7 +15982,7 @@
               </a:rPr>
               <a:t>Monitor</a:t>
             </a:r>
-            <a:endParaRPr lang="en-US" sz="1400" dirty="0"/>
+            <a:endParaRPr lang="en-US" sz="2400" dirty="0"/>
           </a:p>
         </p:txBody>
       </p:sp>
@@ -13727,7 +16011,7 @@
           <a:bodyPr/>
           <a:lstStyle/>
           <a:p>
-            <a:endParaRPr lang="en-US"/>
+            <a:endParaRPr lang="en-US" sz="3200"/>
           </a:p>
         </p:txBody>
       </p:sp>
@@ -13756,7 +16040,7 @@
               <a:buNone/>
             </a:pPr>
             <a:r>
-              <a:rPr lang="en-US" sz="1400" b="1" dirty="0">
+              <a:rPr lang="en-US" sz="2400" b="1" dirty="0">
                 <a:solidFill>
                   <a:srgbClr val="FFFFFF"/>
                 </a:solidFill>
@@ -13766,7 +16050,7 @@
               </a:rPr>
               <a:t>Operate</a:t>
             </a:r>
-            <a:endParaRPr lang="en-US" sz="1400" dirty="0"/>
+            <a:endParaRPr lang="en-US" sz="2400" dirty="0"/>
           </a:p>
         </p:txBody>
       </p:sp>
@@ -13793,7 +16077,7 @@
           <a:bodyPr/>
           <a:lstStyle/>
           <a:p>
-            <a:endParaRPr lang="en-US"/>
+            <a:endParaRPr lang="en-US" sz="3200"/>
           </a:p>
         </p:txBody>
       </p:sp>
@@ -13822,7 +16106,7 @@
           <a:bodyPr/>
           <a:lstStyle/>
           <a:p>
-            <a:endParaRPr lang="en-US"/>
+            <a:endParaRPr lang="en-US" sz="3200"/>
           </a:p>
         </p:txBody>
       </p:sp>
@@ -13851,7 +16135,7 @@
               <a:buNone/>
             </a:pPr>
             <a:r>
-              <a:rPr lang="en-US" sz="1400" b="1" dirty="0">
+              <a:rPr lang="en-US" sz="2400" b="1" dirty="0">
                 <a:solidFill>
                   <a:srgbClr val="FFFFFF"/>
                 </a:solidFill>
@@ -13861,7 +16145,7 @@
               </a:rPr>
               <a:t>Deploy</a:t>
             </a:r>
-            <a:endParaRPr lang="en-US" sz="1400" dirty="0"/>
+            <a:endParaRPr lang="en-US" sz="2400" dirty="0"/>
           </a:p>
         </p:txBody>
       </p:sp>
@@ -13888,7 +16172,7 @@
           <a:bodyPr/>
           <a:lstStyle/>
           <a:p>
-            <a:endParaRPr lang="en-US"/>
+            <a:endParaRPr lang="en-US" sz="3200"/>
           </a:p>
         </p:txBody>
       </p:sp>
@@ -13917,7 +16201,7 @@
           <a:bodyPr/>
           <a:lstStyle/>
           <a:p>
-            <a:endParaRPr lang="en-US"/>
+            <a:endParaRPr lang="en-US" sz="3200"/>
           </a:p>
         </p:txBody>
       </p:sp>
@@ -13946,7 +16230,7 @@
               <a:buNone/>
             </a:pPr>
             <a:r>
-              <a:rPr lang="en-US" sz="1400" b="1" dirty="0">
+              <a:rPr lang="en-US" sz="2400" b="1" dirty="0">
                 <a:solidFill>
                   <a:srgbClr val="FFFFFF"/>
                 </a:solidFill>
@@ -13956,7 +16240,7 @@
               </a:rPr>
               <a:t>Release</a:t>
             </a:r>
-            <a:endParaRPr lang="en-US" sz="1400" dirty="0"/>
+            <a:endParaRPr lang="en-US" sz="2400" dirty="0"/>
           </a:p>
         </p:txBody>
       </p:sp>
@@ -13983,7 +16267,7 @@
           <a:bodyPr/>
           <a:lstStyle/>
           <a:p>
-            <a:endParaRPr lang="en-US"/>
+            <a:endParaRPr lang="en-US" sz="3200"/>
           </a:p>
         </p:txBody>
       </p:sp>
@@ -14010,7 +16294,7 @@
           <a:bodyPr/>
           <a:lstStyle/>
           <a:p>
-            <a:endParaRPr lang="en-US"/>
+            <a:endParaRPr lang="en-US" sz="3200"/>
           </a:p>
         </p:txBody>
       </p:sp>
@@ -14037,7 +16321,7 @@
           <a:bodyPr/>
           <a:lstStyle/>
           <a:p>
-            <a:endParaRPr lang="en-US"/>
+            <a:endParaRPr lang="en-US" sz="3200"/>
           </a:p>
         </p:txBody>
       </p:sp>
@@ -14066,7 +16350,7 @@
           <a:bodyPr/>
           <a:lstStyle/>
           <a:p>
-            <a:endParaRPr lang="en-US"/>
+            <a:endParaRPr lang="en-US" sz="3200"/>
           </a:p>
         </p:txBody>
       </p:sp>
@@ -14091,14 +16375,11 @@
           <a:bodyPr wrap="square" lIns="0" tIns="0" rIns="0" bIns="0" rtlCol="0" anchor="ctr"/>
           <a:lstStyle/>
           <a:p>
-            <a:pPr marL="0" indent="0">
-              <a:lnSpc>
-                <a:spcPct val="120000"/>
-              </a:lnSpc>
-              <a:buNone/>
-            </a:pPr>
-            <a:r>
-              <a:rPr lang="en-US" sz="1350" i="1" dirty="0">
+            <a:pPr marL="0" indent="0" algn="just">
+              <a:buNone/>
+            </a:pPr>
+            <a:r>
+              <a:rPr lang="en-US" sz="1400" i="1" dirty="0">
                 <a:solidFill>
                   <a:srgbClr val="CADCFC"/>
                 </a:solidFill>
@@ -14110,14 +16391,11 @@
             </a:r>
           </a:p>
           <a:p>
-            <a:pPr marL="0" indent="0">
-              <a:lnSpc>
-                <a:spcPct val="120000"/>
-              </a:lnSpc>
-              <a:buNone/>
-            </a:pPr>
-            <a:r>
-              <a:rPr lang="en-US" sz="1350" i="1" dirty="0">
+            <a:pPr marL="0" indent="0" algn="just">
+              <a:buNone/>
+            </a:pPr>
+            <a:r>
+              <a:rPr lang="en-US" sz="1400" i="1" dirty="0">
                 <a:solidFill>
                   <a:srgbClr val="CADCFC"/>
                 </a:solidFill>
@@ -14127,36 +16405,36 @@
               </a:rPr>
               <a:t>Automated pipelines and continuous feedback erase the line between "building" and "running" a system — analysis &amp; design decisions now travel all the way to production.</a:t>
             </a:r>
-            <a:endParaRPr lang="en-US" sz="1350" dirty="0"/>
-          </a:p>
-        </p:txBody>
-      </p:sp>
-      <p:sp>
-        <p:nvSpPr>
-          <p:cNvPr id="30" name="Text 28"/>
-          <p:cNvSpPr/>
-          <p:nvPr/>
-        </p:nvSpPr>
-        <p:spPr>
-          <a:xfrm>
-            <a:off x="457200" y="6446520"/>
-            <a:ext cx="6400800" cy="274320"/>
-          </a:xfrm>
-          <a:prstGeom prst="rect">
-            <a:avLst/>
-          </a:prstGeom>
-          <a:noFill/>
-          <a:ln/>
-        </p:spPr>
-        <p:txBody>
-          <a:bodyPr wrap="square" lIns="0" tIns="0" rIns="0" bIns="0" rtlCol="0" anchor="ctr"/>
-          <a:lstStyle/>
-          <a:p>
-            <a:pPr marL="0" indent="0" algn="l">
-              <a:buNone/>
-            </a:pPr>
-            <a:r>
-              <a:rPr lang="en-US" sz="1000" dirty="0">
+            <a:endParaRPr lang="en-US" sz="1400" dirty="0"/>
+          </a:p>
+        </p:txBody>
+      </p:sp>
+      <p:sp>
+        <p:nvSpPr>
+          <p:cNvPr id="31" name="Text 29"/>
+          <p:cNvSpPr/>
+          <p:nvPr/>
+        </p:nvSpPr>
+        <p:spPr>
+          <a:xfrm>
+            <a:off x="11274552" y="6446520"/>
+            <a:ext cx="457200" cy="274320"/>
+          </a:xfrm>
+          <a:prstGeom prst="rect">
+            <a:avLst/>
+          </a:prstGeom>
+          <a:noFill/>
+          <a:ln/>
+        </p:spPr>
+        <p:txBody>
+          <a:bodyPr wrap="square" lIns="0" tIns="0" rIns="0" bIns="0" rtlCol="0" anchor="ctr"/>
+          <a:lstStyle/>
+          <a:p>
+            <a:pPr marL="0" indent="0" algn="r">
+              <a:buNone/>
+            </a:pPr>
+            <a:r>
+              <a:rPr lang="en-US" sz="1400" dirty="0">
                 <a:solidFill>
                   <a:srgbClr val="8A9BA8"/>
                 </a:solidFill>
@@ -14164,48 +16442,9 @@
                 <a:ea typeface="Calibri" pitchFamily="34" charset="-122"/>
                 <a:cs typeface="Calibri" pitchFamily="34" charset="-120"/>
               </a:rPr>
-              <a:t>Systems Analysis &amp; Design  |  Week 1</a:t>
-            </a:r>
-            <a:endParaRPr lang="en-US" sz="1000" dirty="0"/>
-          </a:p>
-        </p:txBody>
-      </p:sp>
-      <p:sp>
-        <p:nvSpPr>
-          <p:cNvPr id="31" name="Text 29"/>
-          <p:cNvSpPr/>
-          <p:nvPr/>
-        </p:nvSpPr>
-        <p:spPr>
-          <a:xfrm>
-            <a:off x="11274552" y="6446520"/>
-            <a:ext cx="457200" cy="274320"/>
-          </a:xfrm>
-          <a:prstGeom prst="rect">
-            <a:avLst/>
-          </a:prstGeom>
-          <a:noFill/>
-          <a:ln/>
-        </p:spPr>
-        <p:txBody>
-          <a:bodyPr wrap="square" lIns="0" tIns="0" rIns="0" bIns="0" rtlCol="0" anchor="ctr"/>
-          <a:lstStyle/>
-          <a:p>
-            <a:pPr marL="0" indent="0" algn="r">
-              <a:buNone/>
-            </a:pPr>
-            <a:r>
-              <a:rPr lang="en-US" sz="1000" dirty="0">
-                <a:solidFill>
-                  <a:srgbClr val="8A9BA8"/>
-                </a:solidFill>
-                <a:latin typeface="Calibri" pitchFamily="34" charset="0"/>
-                <a:ea typeface="Calibri" pitchFamily="34" charset="-122"/>
-                <a:cs typeface="Calibri" pitchFamily="34" charset="-120"/>
-              </a:rPr>
               <a:t>10</a:t>
             </a:r>
-            <a:endParaRPr lang="en-US" sz="1000" dirty="0"/>
+            <a:endParaRPr lang="en-US" sz="1400" dirty="0"/>
           </a:p>
         </p:txBody>
       </p:sp>
@@ -14228,39 +16467,39 @@
         <a:sysClr val="window" lastClr="FFFFFF"/>
       </a:lt1>
       <a:dk2>
-        <a:srgbClr val="44546A"/>
+        <a:srgbClr val="0E2841"/>
       </a:dk2>
       <a:lt2>
-        <a:srgbClr val="E7E6E6"/>
+        <a:srgbClr val="E8E8E8"/>
       </a:lt2>
       <a:accent1>
-        <a:srgbClr val="4472C4"/>
+        <a:srgbClr val="156082"/>
       </a:accent1>
       <a:accent2>
-        <a:srgbClr val="ED7D31"/>
+        <a:srgbClr val="E97132"/>
       </a:accent2>
       <a:accent3>
-        <a:srgbClr val="A5A5A5"/>
+        <a:srgbClr val="196B24"/>
       </a:accent3>
       <a:accent4>
-        <a:srgbClr val="FFC000"/>
+        <a:srgbClr val="0F9ED5"/>
       </a:accent4>
       <a:accent5>
-        <a:srgbClr val="5B9BD5"/>
+        <a:srgbClr val="A02B93"/>
       </a:accent5>
       <a:accent6>
-        <a:srgbClr val="70AD47"/>
+        <a:srgbClr val="4EA72E"/>
       </a:accent6>
       <a:hlink>
-        <a:srgbClr val="0563C1"/>
+        <a:srgbClr val="467886"/>
       </a:hlink>
       <a:folHlink>
-        <a:srgbClr val="954F72"/>
+        <a:srgbClr val="96607D"/>
       </a:folHlink>
     </a:clrScheme>
     <a:fontScheme name="Office">
       <a:majorFont>
-        <a:latin typeface="Calibri Light" panose="020F0302020204030204"/>
+        <a:latin typeface="Aptos Display" panose="02110004020202020204"/>
         <a:ea typeface=""/>
         <a:cs typeface=""/>
         <a:font script="Jpan" typeface="游ゴシック Light"/>
@@ -14312,7 +16551,7 @@
         <a:font script="Tfng" typeface="Ebrima"/>
       </a:majorFont>
       <a:minorFont>
-        <a:latin typeface="Calibri" panose="020F0502020204030204"/>
+        <a:latin typeface="Aptos" panose="02110004020202020204"/>
         <a:ea typeface=""/>
         <a:cs typeface=""/>
         <a:font script="Jpan" typeface="游ゴシック"/>
@@ -14423,13 +16662,6 @@
         </a:gradFill>
       </a:fillStyleLst>
       <a:lnStyleLst>
-        <a:ln w="6350" cap="flat" cmpd="sng" algn="ctr">
-          <a:solidFill>
-            <a:schemeClr val="phClr"/>
-          </a:solidFill>
-          <a:prstDash val="solid"/>
-          <a:miter lim="800000"/>
-        </a:ln>
         <a:ln w="12700" cap="flat" cmpd="sng" algn="ctr">
           <a:solidFill>
             <a:schemeClr val="phClr"/>
@@ -14438,6 +16670,13 @@
           <a:miter lim="800000"/>
         </a:ln>
         <a:ln w="19050" cap="flat" cmpd="sng" algn="ctr">
+          <a:solidFill>
+            <a:schemeClr val="phClr"/>
+          </a:solidFill>
+          <a:prstDash val="solid"/>
+          <a:miter lim="800000"/>
+        </a:ln>
+        <a:ln w="25400" cap="flat" cmpd="sng" algn="ctr">
           <a:solidFill>
             <a:schemeClr val="phClr"/>
           </a:solidFill>
@@ -14502,11 +16741,31 @@
       </a:bgFillStyleLst>
     </a:fmtScheme>
   </a:themeElements>
-  <a:objectDefaults/>
+  <a:objectDefaults>
+    <a:lnDef>
+      <a:spPr/>
+      <a:bodyPr/>
+      <a:lstStyle/>
+      <a:style>
+        <a:lnRef idx="2">
+          <a:schemeClr val="accent1"/>
+        </a:lnRef>
+        <a:fillRef idx="0">
+          <a:schemeClr val="accent1"/>
+        </a:fillRef>
+        <a:effectRef idx="1">
+          <a:schemeClr val="accent1"/>
+        </a:effectRef>
+        <a:fontRef idx="minor">
+          <a:schemeClr val="tx1"/>
+        </a:fontRef>
+      </a:style>
+    </a:lnDef>
+  </a:objectDefaults>
   <a:extraClrSchemeLst/>
   <a:extLst>
     <a:ext uri="{05A4C25C-085E-4340-85A3-A5531E510DB2}">
-      <thm15:themeFamily xmlns:thm15="http://schemas.microsoft.com/office/thememl/2012/main" name="Office Theme" id="{62F939B6-93AF-4DB8-9C6B-D6C7DFDC589F}" vid="{4A3C46E8-61CC-4603-A589-7422A47A8E4A}"/>
+      <thm15:themeFamily xmlns:thm15="http://schemas.microsoft.com/office/thememl/2012/main" name="Office Theme" id="{2E142A2C-CD16-42D6-873A-C26D2A0506FA}" vid="{1BDDFF52-6CD6-40A5-AB3C-68EB2F1E4D0A}"/>
     </a:ext>
   </a:extLst>
 </a:theme>
@@ -14828,6 +17087,15 @@
 </file>
 
 <file path=customXml/item1.xml><?xml version="1.0" encoding="utf-8"?>
+<?mso-contentType ?>
+<FormTemplates xmlns="http://schemas.microsoft.com/sharepoint/v3/contenttype/forms">
+  <Display>DocumentLibraryForm</Display>
+  <Edit>DocumentLibraryForm</Edit>
+  <New>DocumentLibraryForm</New>
+</FormTemplates>
+</file>
+
+<file path=customXml/item2.xml><?xml version="1.0" encoding="utf-8"?>
 <ct:contentTypeSchema xmlns:ct="http://schemas.microsoft.com/office/2006/metadata/contentType" xmlns:ma="http://schemas.microsoft.com/office/2006/metadata/properties/metaAttributes" ct:_="" ma:_="" ma:contentTypeName="Document" ma:contentTypeID="0x0101007F474BC495226A4DA390799C92E36619" ma:contentTypeVersion="3" ma:contentTypeDescription="Create a new document." ma:contentTypeScope="" ma:versionID="4a73b9420067643082b04fd5dc376804">
   <xsd:schema xmlns:xsd="http://www.w3.org/2001/XMLSchema" xmlns:xs="http://www.w3.org/2001/XMLSchema" xmlns:p="http://schemas.microsoft.com/office/2006/metadata/properties" xmlns:ns2="989db138-9486-4683-8f51-7f10e453a2b1" targetNamespace="http://schemas.microsoft.com/office/2006/metadata/properties" ma:root="true" ma:fieldsID="9e51b845acc3af0fc0e9af9baecfd305" ns2:_="">
     <xsd:import namespace="989db138-9486-4683-8f51-7f10e453a2b1"/>
@@ -14965,15 +17233,6 @@
 </ct:contentTypeSchema>
 </file>
 
-<file path=customXml/item2.xml><?xml version="1.0" encoding="utf-8"?>
-<?mso-contentType ?>
-<FormTemplates xmlns="http://schemas.microsoft.com/sharepoint/v3/contenttype/forms">
-  <Display>DocumentLibraryForm</Display>
-  <Edit>DocumentLibraryForm</Edit>
-  <New>DocumentLibraryForm</New>
-</FormTemplates>
-</file>
-
 <file path=customXml/item3.xml><?xml version="1.0" encoding="utf-8"?>
 <p:properties xmlns:p="http://schemas.microsoft.com/office/2006/metadata/properties" xmlns:xsi="http://www.w3.org/2001/XMLSchema-instance" xmlns:pc="http://schemas.microsoft.com/office/infopath/2007/PartnerControls">
   <documentManagement/>
@@ -14981,13 +17240,36 @@
 </file>
 
 <file path=customXml/itemProps1.xml><?xml version="1.0" encoding="utf-8"?>
-<ds:datastoreItem xmlns:ds="http://schemas.openxmlformats.org/officeDocument/2006/customXml" ds:itemID="{6258BD04-E929-4444-BEF2-51361E7207D4}"/>
+<ds:datastoreItem xmlns:ds="http://schemas.openxmlformats.org/officeDocument/2006/customXml" ds:itemID="{679023BF-98E2-4B88-8885-C81488F85E3C}">
+  <ds:schemaRefs>
+    <ds:schemaRef ds:uri="http://schemas.microsoft.com/sharepoint/v3/contenttype/forms"/>
+  </ds:schemaRefs>
+</ds:datastoreItem>
 </file>
 
 <file path=customXml/itemProps2.xml><?xml version="1.0" encoding="utf-8"?>
-<ds:datastoreItem xmlns:ds="http://schemas.openxmlformats.org/officeDocument/2006/customXml" ds:itemID="{679023BF-98E2-4B88-8885-C81488F85E3C}"/>
+<ds:datastoreItem xmlns:ds="http://schemas.openxmlformats.org/officeDocument/2006/customXml" ds:itemID="{6258BD04-E929-4444-BEF2-51361E7207D4}">
+  <ds:schemaRefs>
+    <ds:schemaRef ds:uri="http://schemas.microsoft.com/office/2006/metadata/contentType"/>
+    <ds:schemaRef ds:uri="http://schemas.microsoft.com/office/2006/metadata/properties/metaAttributes"/>
+    <ds:schemaRef ds:uri="http://www.w3.org/2001/XMLSchema"/>
+    <ds:schemaRef ds:uri="http://schemas.microsoft.com/office/2006/metadata/properties"/>
+    <ds:schemaRef ds:uri="989db138-9486-4683-8f51-7f10e453a2b1"/>
+    <ds:schemaRef ds:uri="http://schemas.microsoft.com/office/2006/documentManagement/types"/>
+    <ds:schemaRef ds:uri="http://schemas.microsoft.com/office/infopath/2007/PartnerControls"/>
+    <ds:schemaRef ds:uri="http://schemas.openxmlformats.org/package/2006/metadata/core-properties"/>
+    <ds:schemaRef ds:uri="http://purl.org/dc/elements/1.1/"/>
+    <ds:schemaRef ds:uri="http://purl.org/dc/terms/"/>
+    <ds:schemaRef ds:uri="http://schemas.microsoft.com/internal/obd"/>
+  </ds:schemaRefs>
+</ds:datastoreItem>
 </file>
 
 <file path=customXml/itemProps3.xml><?xml version="1.0" encoding="utf-8"?>
-<ds:datastoreItem xmlns:ds="http://schemas.openxmlformats.org/officeDocument/2006/customXml" ds:itemID="{6D8A7F96-F7B0-417D-B7C7-F25DC6AF7B6B}"/>
+<ds:datastoreItem xmlns:ds="http://schemas.openxmlformats.org/officeDocument/2006/customXml" ds:itemID="{6D8A7F96-F7B0-417D-B7C7-F25DC6AF7B6B}">
+  <ds:schemaRefs>
+    <ds:schemaRef ds:uri="http://schemas.microsoft.com/office/2006/metadata/properties"/>
+    <ds:schemaRef ds:uri="http://schemas.microsoft.com/office/infopath/2007/PartnerControls"/>
+  </ds:schemaRefs>
+</ds:datastoreItem>
 </file>